--- a/output/slides/AI_Agent_Project_I_答辩.pptx
+++ b/output/slides/AI_Agent_Project_I_答辩.pptx
@@ -578,7 +578,7 @@
           <a:lstStyle/>
           <a:p>
             <a:r>
-              <a:t>这一页讲清楚为什么做：把写代码中重复、机械的部分交给多Agent协作完成。</a:t>
+              <a:t>讲清楚为什么做：把写代码中重复、机械的部分交给多Agent协作完成。</a:t>
             </a:r>
           </a:p>
         </p:txBody>
@@ -3944,14 +3944,58 @@
       <p:grpSpPr/>
       <p:sp>
         <p:nvSpPr>
-          <p:cNvPr id="2" name="TextBox 1"/>
+          <p:cNvPr id="2" name="Rectangle 1"/>
+          <p:cNvSpPr/>
+          <p:nvPr/>
+        </p:nvSpPr>
+        <p:spPr>
+          <a:xfrm>
+            <a:off x="0" y="365760"/>
+            <a:ext cx="12191695" cy="54864"/>
+          </a:xfrm>
+          <a:prstGeom prst="rect">
+            <a:avLst/>
+          </a:prstGeom>
+          <a:solidFill>
+            <a:srgbClr val="4A90D9"/>
+          </a:solidFill>
+          <a:ln>
+            <a:noFill/>
+          </a:ln>
+          <a:effectLst/>
+        </p:spPr>
+        <p:style>
+          <a:lnRef idx="1">
+            <a:schemeClr val="accent1"/>
+          </a:lnRef>
+          <a:fillRef idx="3">
+            <a:schemeClr val="accent1"/>
+          </a:fillRef>
+          <a:effectRef idx="2">
+            <a:schemeClr val="accent1"/>
+          </a:effectRef>
+          <a:fontRef idx="minor">
+            <a:schemeClr val="lt1"/>
+          </a:fontRef>
+        </p:style>
+        <p:txBody>
+          <a:bodyPr rtlCol="0" anchor="ctr"/>
+          <a:lstStyle/>
+          <a:p>
+            <a:pPr algn="ctr"/>
+          </a:p>
+        </p:txBody>
+      </p:sp>
+      <p:sp>
+        <p:nvSpPr>
+          <p:cNvPr id="3" name="TextBox 2"/>
           <p:cNvSpPr txBox="1"/>
           <p:nvPr/>
         </p:nvSpPr>
         <p:spPr>
           <a:xfrm>
-            <a:off x="731520" y="457200"/>
-            <a:ext cx="10698480" cy="914400"/>
+            <a:off x="914400" y="2011680"/>
+            <a:ext cx="10332720" cy="1097280"/>
           </a:xfrm>
           <a:prstGeom prst="rect">
             <a:avLst/>
@@ -3959,15 +4003,23 @@
           <a:noFill/>
         </p:spPr>
         <p:txBody>
-          <a:bodyPr wrap="square">
+          <a:bodyPr wrap="square" anchor="t">
             <a:spAutoFit/>
           </a:bodyPr>
           <a:lstStyle/>
           <a:p>
-            <a:r>
-              <a:rPr sz="3600" b="1">
-                <a:solidFill>
-                  <a:srgbClr val="4A90D9"/>
+            <a:pPr algn="ctr">
+              <a:lnSpc>
+                <a:spcPct val="100000"/>
+              </a:lnSpc>
+              <a:spcAft>
+                <a:spcPts val="800"/>
+              </a:spcAft>
+            </a:pPr>
+            <a:r>
+              <a:rPr sz="5400" b="1">
+                <a:solidFill>
+                  <a:srgbClr val="FFFFFF"/>
                 </a:solidFill>
                 <a:latin typeface="微软雅黑"/>
               </a:rPr>
@@ -3978,14 +4030,14 @@
       </p:sp>
       <p:sp>
         <p:nvSpPr>
-          <p:cNvPr id="3" name="TextBox 2"/>
+          <p:cNvPr id="4" name="TextBox 3"/>
           <p:cNvSpPr txBox="1"/>
           <p:nvPr/>
         </p:nvSpPr>
         <p:spPr>
           <a:xfrm>
-            <a:off x="731520" y="2743200"/>
-            <a:ext cx="10698480" cy="1828800"/>
+            <a:off x="914400" y="3200400"/>
+            <a:ext cx="10332720" cy="548640"/>
           </a:xfrm>
           <a:prstGeom prst="rect">
             <a:avLst/>
@@ -3993,24 +4045,375 @@
           <a:noFill/>
         </p:spPr>
         <p:txBody>
-          <a:bodyPr wrap="none">
+          <a:bodyPr wrap="square" anchor="t">
             <a:spAutoFit/>
           </a:bodyPr>
           <a:lstStyle/>
           <a:p>
-            <a:r>
-              <a:rPr sz="2400">
-                <a:solidFill>
-                  <a:srgbClr val="FFFFFF"/>
+            <a:pPr algn="ctr">
+              <a:lnSpc>
+                <a:spcPct val="100000"/>
+              </a:lnSpc>
+              <a:spcAft>
+                <a:spcPts val="800"/>
+              </a:spcAft>
+            </a:pPr>
+            <a:r>
+              <a:rPr sz="2200" b="0">
+                <a:solidFill>
+                  <a:srgbClr val="4A90D9"/>
                 </a:solidFill>
                 <a:latin typeface="微软雅黑"/>
               </a:rPr>
-              <a:t>项目 I · 2026 暑期 AI Agent 成长实践</a:t>
-            </a:r>
-          </a:p>
-          <a:p>
-            <a:r>
-              <a:rPr sz="1800">
+              <a:t>Coordinator + Code / Debug / Doc Agent 自动化流水线</a:t>
+            </a:r>
+          </a:p>
+        </p:txBody>
+      </p:sp>
+      <p:sp>
+        <p:nvSpPr>
+          <p:cNvPr id="5" name="TextBox 4"/>
+          <p:cNvSpPr txBox="1"/>
+          <p:nvPr/>
+        </p:nvSpPr>
+        <p:spPr>
+          <a:xfrm>
+            <a:off x="914400" y="3840480"/>
+            <a:ext cx="10332720" cy="457200"/>
+          </a:xfrm>
+          <a:prstGeom prst="rect">
+            <a:avLst/>
+          </a:prstGeom>
+          <a:noFill/>
+        </p:spPr>
+        <p:txBody>
+          <a:bodyPr wrap="square" anchor="t">
+            <a:spAutoFit/>
+          </a:bodyPr>
+          <a:lstStyle/>
+          <a:p>
+            <a:pPr algn="ctr">
+              <a:lnSpc>
+                <a:spcPct val="100000"/>
+              </a:lnSpc>
+              <a:spcAft>
+                <a:spcPts val="800"/>
+              </a:spcAft>
+            </a:pPr>
+            <a:r>
+              <a:rPr sz="1600" b="0">
+                <a:solidFill>
+                  <a:srgbClr val="B4B9C8"/>
+                </a:solidFill>
+                <a:latin typeface="微软雅黑"/>
+              </a:rPr>
+              <a:t>2026 暑期 AI Agent 成长实践 · 项目 I</a:t>
+            </a:r>
+          </a:p>
+        </p:txBody>
+      </p:sp>
+      <p:sp>
+        <p:nvSpPr>
+          <p:cNvPr id="6" name="Rounded Rectangle 5"/>
+          <p:cNvSpPr/>
+          <p:nvPr/>
+        </p:nvSpPr>
+        <p:spPr>
+          <a:xfrm>
+            <a:off x="2011680" y="4937760"/>
+            <a:ext cx="2377440" cy="822960"/>
+          </a:xfrm>
+          <a:prstGeom prst="roundRect">
+            <a:avLst>
+              <a:gd name="adj" fmla="val 50000"/>
+            </a:avLst>
+          </a:prstGeom>
+          <a:solidFill>
+            <a:srgbClr val="262640"/>
+          </a:solidFill>
+          <a:ln w="19050">
+            <a:solidFill>
+              <a:srgbClr val="4A90D9"/>
+            </a:solidFill>
+          </a:ln>
+          <a:effectLst/>
+        </p:spPr>
+        <p:style>
+          <a:lnRef idx="1">
+            <a:schemeClr val="accent1"/>
+          </a:lnRef>
+          <a:fillRef idx="3">
+            <a:schemeClr val="accent1"/>
+          </a:fillRef>
+          <a:effectRef idx="2">
+            <a:schemeClr val="accent1"/>
+          </a:effectRef>
+          <a:fontRef idx="minor">
+            <a:schemeClr val="lt1"/>
+          </a:fontRef>
+        </p:style>
+        <p:txBody>
+          <a:bodyPr rtlCol="0" anchor="ctr"/>
+          <a:lstStyle/>
+          <a:p>
+            <a:pPr algn="ctr"/>
+          </a:p>
+        </p:txBody>
+      </p:sp>
+      <p:sp>
+        <p:nvSpPr>
+          <p:cNvPr id="7" name="TextBox 6"/>
+          <p:cNvSpPr txBox="1"/>
+          <p:nvPr/>
+        </p:nvSpPr>
+        <p:spPr>
+          <a:xfrm>
+            <a:off x="2011680" y="5074920"/>
+            <a:ext cx="2377440" cy="548640"/>
+          </a:xfrm>
+          <a:prstGeom prst="rect">
+            <a:avLst/>
+          </a:prstGeom>
+          <a:noFill/>
+        </p:spPr>
+        <p:txBody>
+          <a:bodyPr wrap="square" anchor="ctr">
+            <a:spAutoFit/>
+          </a:bodyPr>
+          <a:lstStyle/>
+          <a:p>
+            <a:pPr algn="ctr">
+              <a:lnSpc>
+                <a:spcPct val="100000"/>
+              </a:lnSpc>
+              <a:spcAft>
+                <a:spcPts val="800"/>
+              </a:spcAft>
+            </a:pPr>
+            <a:r>
+              <a:rPr sz="1800" b="1">
+                <a:solidFill>
+                  <a:srgbClr val="FFFFFF"/>
+                </a:solidFill>
+                <a:latin typeface="微软雅黑"/>
+              </a:rPr>
+              <a:t>自动写代码</a:t>
+            </a:r>
+          </a:p>
+        </p:txBody>
+      </p:sp>
+      <p:sp>
+        <p:nvSpPr>
+          <p:cNvPr id="8" name="Rounded Rectangle 7"/>
+          <p:cNvSpPr/>
+          <p:nvPr/>
+        </p:nvSpPr>
+        <p:spPr>
+          <a:xfrm>
+            <a:off x="4937760" y="4937760"/>
+            <a:ext cx="2377440" cy="822960"/>
+          </a:xfrm>
+          <a:prstGeom prst="roundRect">
+            <a:avLst>
+              <a:gd name="adj" fmla="val 50000"/>
+            </a:avLst>
+          </a:prstGeom>
+          <a:solidFill>
+            <a:srgbClr val="262640"/>
+          </a:solidFill>
+          <a:ln w="19050">
+            <a:solidFill>
+              <a:srgbClr val="4A90D9"/>
+            </a:solidFill>
+          </a:ln>
+          <a:effectLst/>
+        </p:spPr>
+        <p:style>
+          <a:lnRef idx="1">
+            <a:schemeClr val="accent1"/>
+          </a:lnRef>
+          <a:fillRef idx="3">
+            <a:schemeClr val="accent1"/>
+          </a:fillRef>
+          <a:effectRef idx="2">
+            <a:schemeClr val="accent1"/>
+          </a:effectRef>
+          <a:fontRef idx="minor">
+            <a:schemeClr val="lt1"/>
+          </a:fontRef>
+        </p:style>
+        <p:txBody>
+          <a:bodyPr rtlCol="0" anchor="ctr"/>
+          <a:lstStyle/>
+          <a:p>
+            <a:pPr algn="ctr"/>
+          </a:p>
+        </p:txBody>
+      </p:sp>
+      <p:sp>
+        <p:nvSpPr>
+          <p:cNvPr id="9" name="TextBox 8"/>
+          <p:cNvSpPr txBox="1"/>
+          <p:nvPr/>
+        </p:nvSpPr>
+        <p:spPr>
+          <a:xfrm>
+            <a:off x="4937760" y="5074920"/>
+            <a:ext cx="2377440" cy="548640"/>
+          </a:xfrm>
+          <a:prstGeom prst="rect">
+            <a:avLst/>
+          </a:prstGeom>
+          <a:noFill/>
+        </p:spPr>
+        <p:txBody>
+          <a:bodyPr wrap="square" anchor="ctr">
+            <a:spAutoFit/>
+          </a:bodyPr>
+          <a:lstStyle/>
+          <a:p>
+            <a:pPr algn="ctr">
+              <a:lnSpc>
+                <a:spcPct val="100000"/>
+              </a:lnSpc>
+              <a:spcAft>
+                <a:spcPts val="800"/>
+              </a:spcAft>
+            </a:pPr>
+            <a:r>
+              <a:rPr sz="1800" b="1">
+                <a:solidFill>
+                  <a:srgbClr val="FFFFFF"/>
+                </a:solidFill>
+                <a:latin typeface="微软雅黑"/>
+              </a:rPr>
+              <a:t>自动修 Bug</a:t>
+            </a:r>
+          </a:p>
+        </p:txBody>
+      </p:sp>
+      <p:sp>
+        <p:nvSpPr>
+          <p:cNvPr id="10" name="Rounded Rectangle 9"/>
+          <p:cNvSpPr/>
+          <p:nvPr/>
+        </p:nvSpPr>
+        <p:spPr>
+          <a:xfrm>
+            <a:off x="7863840" y="4937760"/>
+            <a:ext cx="2377440" cy="822960"/>
+          </a:xfrm>
+          <a:prstGeom prst="roundRect">
+            <a:avLst>
+              <a:gd name="adj" fmla="val 50000"/>
+            </a:avLst>
+          </a:prstGeom>
+          <a:solidFill>
+            <a:srgbClr val="262640"/>
+          </a:solidFill>
+          <a:ln w="19050">
+            <a:solidFill>
+              <a:srgbClr val="4A90D9"/>
+            </a:solidFill>
+          </a:ln>
+          <a:effectLst/>
+        </p:spPr>
+        <p:style>
+          <a:lnRef idx="1">
+            <a:schemeClr val="accent1"/>
+          </a:lnRef>
+          <a:fillRef idx="3">
+            <a:schemeClr val="accent1"/>
+          </a:fillRef>
+          <a:effectRef idx="2">
+            <a:schemeClr val="accent1"/>
+          </a:effectRef>
+          <a:fontRef idx="minor">
+            <a:schemeClr val="lt1"/>
+          </a:fontRef>
+        </p:style>
+        <p:txBody>
+          <a:bodyPr rtlCol="0" anchor="ctr"/>
+          <a:lstStyle/>
+          <a:p>
+            <a:pPr algn="ctr"/>
+          </a:p>
+        </p:txBody>
+      </p:sp>
+      <p:sp>
+        <p:nvSpPr>
+          <p:cNvPr id="11" name="TextBox 10"/>
+          <p:cNvSpPr txBox="1"/>
+          <p:nvPr/>
+        </p:nvSpPr>
+        <p:spPr>
+          <a:xfrm>
+            <a:off x="7863840" y="5074920"/>
+            <a:ext cx="2377440" cy="548640"/>
+          </a:xfrm>
+          <a:prstGeom prst="rect">
+            <a:avLst/>
+          </a:prstGeom>
+          <a:noFill/>
+        </p:spPr>
+        <p:txBody>
+          <a:bodyPr wrap="square" anchor="ctr">
+            <a:spAutoFit/>
+          </a:bodyPr>
+          <a:lstStyle/>
+          <a:p>
+            <a:pPr algn="ctr">
+              <a:lnSpc>
+                <a:spcPct val="100000"/>
+              </a:lnSpc>
+              <a:spcAft>
+                <a:spcPts val="800"/>
+              </a:spcAft>
+            </a:pPr>
+            <a:r>
+              <a:rPr sz="1800" b="1">
+                <a:solidFill>
+                  <a:srgbClr val="FFFFFF"/>
+                </a:solidFill>
+                <a:latin typeface="微软雅黑"/>
+              </a:rPr>
+              <a:t>自动写文档</a:t>
+            </a:r>
+          </a:p>
+        </p:txBody>
+      </p:sp>
+      <p:sp>
+        <p:nvSpPr>
+          <p:cNvPr id="12" name="TextBox 11"/>
+          <p:cNvSpPr txBox="1"/>
+          <p:nvPr/>
+        </p:nvSpPr>
+        <p:spPr>
+          <a:xfrm>
+            <a:off x="914400" y="6035040"/>
+            <a:ext cx="10332720" cy="365760"/>
+          </a:xfrm>
+          <a:prstGeom prst="rect">
+            <a:avLst/>
+          </a:prstGeom>
+          <a:noFill/>
+        </p:spPr>
+        <p:txBody>
+          <a:bodyPr wrap="square" anchor="t">
+            <a:spAutoFit/>
+          </a:bodyPr>
+          <a:lstStyle/>
+          <a:p>
+            <a:pPr algn="ctr">
+              <a:lnSpc>
+                <a:spcPct val="100000"/>
+              </a:lnSpc>
+              <a:spcAft>
+                <a:spcPts val="800"/>
+              </a:spcAft>
+            </a:pPr>
+            <a:r>
+              <a:rPr sz="1400" b="0">
                 <a:solidFill>
                   <a:srgbClr val="B4B9C8"/>
                 </a:solidFill>
@@ -4064,13 +4467,21 @@
           <a:noFill/>
         </p:spPr>
         <p:txBody>
-          <a:bodyPr wrap="square">
+          <a:bodyPr wrap="square" anchor="t">
             <a:spAutoFit/>
           </a:bodyPr>
           <a:lstStyle/>
           <a:p>
-            <a:r>
-              <a:rPr sz="3600" b="1">
+            <a:pPr algn="l">
+              <a:lnSpc>
+                <a:spcPct val="100000"/>
+              </a:lnSpc>
+              <a:spcAft>
+                <a:spcPts val="800"/>
+              </a:spcAft>
+            </a:pPr>
+            <a:r>
+              <a:rPr sz="3400" b="1">
                 <a:solidFill>
                   <a:srgbClr val="4A90D9"/>
                 </a:solidFill>
@@ -4083,14 +4494,148 @@
       </p:sp>
       <p:sp>
         <p:nvSpPr>
-          <p:cNvPr id="3" name="TextBox 2"/>
+          <p:cNvPr id="3" name="Rectangle 2"/>
+          <p:cNvSpPr/>
+          <p:nvPr/>
+        </p:nvSpPr>
+        <p:spPr>
+          <a:xfrm>
+            <a:off x="777240" y="1280160"/>
+            <a:ext cx="2011680" cy="45720"/>
+          </a:xfrm>
+          <a:prstGeom prst="rect">
+            <a:avLst/>
+          </a:prstGeom>
+          <a:solidFill>
+            <a:srgbClr val="2EC4B6"/>
+          </a:solidFill>
+          <a:ln>
+            <a:noFill/>
+          </a:ln>
+          <a:effectLst/>
+        </p:spPr>
+        <p:style>
+          <a:lnRef idx="1">
+            <a:schemeClr val="accent1"/>
+          </a:lnRef>
+          <a:fillRef idx="3">
+            <a:schemeClr val="accent1"/>
+          </a:fillRef>
+          <a:effectRef idx="2">
+            <a:schemeClr val="accent1"/>
+          </a:effectRef>
+          <a:fontRef idx="minor">
+            <a:schemeClr val="lt1"/>
+          </a:fontRef>
+        </p:style>
+        <p:txBody>
+          <a:bodyPr rtlCol="0" anchor="ctr"/>
+          <a:lstStyle/>
+          <a:p>
+            <a:pPr algn="ctr"/>
+          </a:p>
+        </p:txBody>
+      </p:sp>
+      <p:sp>
+        <p:nvSpPr>
+          <p:cNvPr id="4" name="Rounded Rectangle 3"/>
+          <p:cNvSpPr/>
+          <p:nvPr/>
+        </p:nvSpPr>
+        <p:spPr>
+          <a:xfrm>
+            <a:off x="731520" y="1828800"/>
+            <a:ext cx="4937760" cy="4114800"/>
+          </a:xfrm>
+          <a:prstGeom prst="roundRect">
+            <a:avLst/>
+          </a:prstGeom>
+          <a:solidFill>
+            <a:srgbClr val="262640"/>
+          </a:solidFill>
+          <a:ln w="19050">
+            <a:solidFill>
+              <a:srgbClr val="4A90D9"/>
+            </a:solidFill>
+          </a:ln>
+          <a:effectLst/>
+        </p:spPr>
+        <p:style>
+          <a:lnRef idx="1">
+            <a:schemeClr val="accent1"/>
+          </a:lnRef>
+          <a:fillRef idx="3">
+            <a:schemeClr val="accent1"/>
+          </a:fillRef>
+          <a:effectRef idx="2">
+            <a:schemeClr val="accent1"/>
+          </a:effectRef>
+          <a:fontRef idx="minor">
+            <a:schemeClr val="lt1"/>
+          </a:fontRef>
+        </p:style>
+        <p:txBody>
+          <a:bodyPr rtlCol="0" anchor="ctr"/>
+          <a:lstStyle/>
+          <a:p>
+            <a:pPr algn="ctr"/>
+          </a:p>
+        </p:txBody>
+      </p:sp>
+      <p:sp>
+        <p:nvSpPr>
+          <p:cNvPr id="5" name="Rounded Rectangle 4"/>
+          <p:cNvSpPr/>
+          <p:nvPr/>
+        </p:nvSpPr>
+        <p:spPr>
+          <a:xfrm>
+            <a:off x="731520" y="1828800"/>
+            <a:ext cx="4937760" cy="128016"/>
+          </a:xfrm>
+          <a:prstGeom prst="roundRect">
+            <a:avLst/>
+          </a:prstGeom>
+          <a:solidFill>
+            <a:srgbClr val="4A90D9"/>
+          </a:solidFill>
+          <a:ln>
+            <a:noFill/>
+          </a:ln>
+          <a:effectLst/>
+        </p:spPr>
+        <p:style>
+          <a:lnRef idx="1">
+            <a:schemeClr val="accent1"/>
+          </a:lnRef>
+          <a:fillRef idx="3">
+            <a:schemeClr val="accent1"/>
+          </a:fillRef>
+          <a:effectRef idx="2">
+            <a:schemeClr val="accent1"/>
+          </a:effectRef>
+          <a:fontRef idx="minor">
+            <a:schemeClr val="lt1"/>
+          </a:fontRef>
+        </p:style>
+        <p:txBody>
+          <a:bodyPr rtlCol="0" anchor="ctr"/>
+          <a:lstStyle/>
+          <a:p>
+            <a:pPr algn="ctr"/>
+          </a:p>
+        </p:txBody>
+      </p:sp>
+      <p:sp>
+        <p:nvSpPr>
+          <p:cNvPr id="6" name="TextBox 5"/>
           <p:cNvSpPr txBox="1"/>
           <p:nvPr/>
         </p:nvSpPr>
         <p:spPr>
           <a:xfrm>
-            <a:off x="731520" y="1554480"/>
-            <a:ext cx="10698480" cy="4846320"/>
+            <a:off x="960120" y="2103120"/>
+            <a:ext cx="4480560" cy="640080"/>
           </a:xfrm>
           <a:prstGeom prst="rect">
             <a:avLst/>
@@ -4098,88 +4643,579 @@
           <a:noFill/>
         </p:spPr>
         <p:txBody>
-          <a:bodyPr wrap="square">
+          <a:bodyPr wrap="square" anchor="t">
             <a:spAutoFit/>
           </a:bodyPr>
           <a:lstStyle/>
           <a:p>
-            <a:pPr>
+            <a:pPr algn="l">
+              <a:lnSpc>
+                <a:spcPct val="100000"/>
+              </a:lnSpc>
               <a:spcAft>
-                <a:spcPts val="1200"/>
+                <a:spcPts val="800"/>
               </a:spcAft>
             </a:pPr>
             <a:r>
-              <a:rPr sz="1800">
+              <a:rPr sz="2000" b="1">
                 <a:solidFill>
                   <a:srgbClr val="FFFFFF"/>
                 </a:solidFill>
                 <a:latin typeface="微软雅黑"/>
               </a:rPr>
-              <a:t>问题：日常开发中「写代码、跑代码、改Bug、写文档」占用大量时间</a:t>
-            </a:r>
-          </a:p>
-          <a:p>
-            <a:pPr>
+              <a:t>背景：开发中的痛点</a:t>
+            </a:r>
+          </a:p>
+        </p:txBody>
+      </p:sp>
+      <p:sp>
+        <p:nvSpPr>
+          <p:cNvPr id="7" name="TextBox 6"/>
+          <p:cNvSpPr txBox="1"/>
+          <p:nvPr/>
+        </p:nvSpPr>
+        <p:spPr>
+          <a:xfrm>
+            <a:off x="960120" y="2743200"/>
+            <a:ext cx="4480560" cy="3017520"/>
+          </a:xfrm>
+          <a:prstGeom prst="rect">
+            <a:avLst/>
+          </a:prstGeom>
+          <a:noFill/>
+        </p:spPr>
+        <p:txBody>
+          <a:bodyPr wrap="square" anchor="t">
+            <a:spAutoFit/>
+          </a:bodyPr>
+          <a:lstStyle/>
+          <a:p>
+            <a:pPr algn="l">
+              <a:lnSpc>
+                <a:spcPct val="100000"/>
+              </a:lnSpc>
               <a:spcAft>
-                <a:spcPts val="1200"/>
+                <a:spcPts val="600"/>
               </a:spcAft>
             </a:pPr>
             <a:r>
-              <a:rPr sz="1800">
-                <a:solidFill>
-                  <a:srgbClr val="FFFFFF"/>
+              <a:rPr sz="1500" b="0">
+                <a:solidFill>
+                  <a:srgbClr val="B4B9C8"/>
                 </a:solidFill>
                 <a:latin typeface="微软雅黑"/>
               </a:rPr>
-              <a:t>思路：让多个 AI Agent 各司其职，协作完成这条流水线</a:t>
-            </a:r>
-          </a:p>
-          <a:p>
-            <a:pPr>
+              <a:t>每次写代码都要手动写、跑、改、查文档</a:t>
+            </a:r>
+          </a:p>
+          <a:p>
+            <a:pPr algn="l">
+              <a:lnSpc>
+                <a:spcPct val="100000"/>
+              </a:lnSpc>
               <a:spcAft>
-                <a:spcPts val="1200"/>
+                <a:spcPts val="600"/>
               </a:spcAft>
             </a:pPr>
             <a:r>
-              <a:rPr sz="1800">
-                <a:solidFill>
-                  <a:srgbClr val="FFFFFF"/>
+              <a:rPr sz="1500" b="0">
+                <a:solidFill>
+                  <a:srgbClr val="B4B9C8"/>
                 </a:solidFill>
                 <a:latin typeface="微软雅黑"/>
               </a:rPr>
-              <a:t>目标1：输入一句自然语言，自动生成可运行的 Python 程序</a:t>
-            </a:r>
-          </a:p>
-          <a:p>
-            <a:pPr>
+              <a:t>重复机械的操作占用了大量时间</a:t>
+            </a:r>
+          </a:p>
+          <a:p>
+            <a:pPr algn="l">
+              <a:lnSpc>
+                <a:spcPct val="100000"/>
+              </a:lnSpc>
               <a:spcAft>
-                <a:spcPts val="1200"/>
+                <a:spcPts val="600"/>
               </a:spcAft>
             </a:pPr>
             <a:r>
-              <a:rPr sz="1800">
-                <a:solidFill>
-                  <a:srgbClr val="FFFFFF"/>
+              <a:rPr sz="1500" b="0">
+                <a:solidFill>
+                  <a:srgbClr val="B4B9C8"/>
                 </a:solidFill>
                 <a:latin typeface="微软雅黑"/>
               </a:rPr>
-              <a:t>目标2：运行失败时，Debug Agent 自动定位并修复（至多 N 轮）</a:t>
-            </a:r>
-          </a:p>
-          <a:p>
-            <a:pPr>
+              <a:t>希望用 AI 自动化这条完整流水线</a:t>
+            </a:r>
+          </a:p>
+        </p:txBody>
+      </p:sp>
+      <p:sp>
+        <p:nvSpPr>
+          <p:cNvPr id="8" name="TextBox 7"/>
+          <p:cNvSpPr txBox="1"/>
+          <p:nvPr/>
+        </p:nvSpPr>
+        <p:spPr>
+          <a:xfrm>
+            <a:off x="6035040" y="1828800"/>
+            <a:ext cx="5486400" cy="548640"/>
+          </a:xfrm>
+          <a:prstGeom prst="rect">
+            <a:avLst/>
+          </a:prstGeom>
+          <a:noFill/>
+        </p:spPr>
+        <p:txBody>
+          <a:bodyPr wrap="square" anchor="t">
+            <a:spAutoFit/>
+          </a:bodyPr>
+          <a:lstStyle/>
+          <a:p>
+            <a:pPr algn="l">
+              <a:lnSpc>
+                <a:spcPct val="100000"/>
+              </a:lnSpc>
               <a:spcAft>
-                <a:spcPts val="1200"/>
+                <a:spcPts val="800"/>
               </a:spcAft>
             </a:pPr>
             <a:r>
-              <a:rPr sz="1800">
+              <a:rPr sz="2200" b="1">
                 <a:solidFill>
                   <a:srgbClr val="FFFFFF"/>
                 </a:solidFill>
                 <a:latin typeface="微软雅黑"/>
               </a:rPr>
-              <a:t>目标3：成功后自动生成 README 文档，全流程可视化</a:t>
+              <a:t>目标</a:t>
+            </a:r>
+          </a:p>
+        </p:txBody>
+      </p:sp>
+      <p:sp>
+        <p:nvSpPr>
+          <p:cNvPr id="9" name="Oval 8"/>
+          <p:cNvSpPr/>
+          <p:nvPr/>
+        </p:nvSpPr>
+        <p:spPr>
+          <a:xfrm>
+            <a:off x="6126480" y="2761488"/>
+            <a:ext cx="146304" cy="146304"/>
+          </a:xfrm>
+          <a:prstGeom prst="ellipse">
+            <a:avLst/>
+          </a:prstGeom>
+          <a:solidFill>
+            <a:srgbClr val="4A90D9"/>
+          </a:solidFill>
+          <a:ln>
+            <a:noFill/>
+          </a:ln>
+          <a:effectLst/>
+        </p:spPr>
+        <p:style>
+          <a:lnRef idx="1">
+            <a:schemeClr val="accent1"/>
+          </a:lnRef>
+          <a:fillRef idx="3">
+            <a:schemeClr val="accent1"/>
+          </a:fillRef>
+          <a:effectRef idx="2">
+            <a:schemeClr val="accent1"/>
+          </a:effectRef>
+          <a:fontRef idx="minor">
+            <a:schemeClr val="lt1"/>
+          </a:fontRef>
+        </p:style>
+        <p:txBody>
+          <a:bodyPr rtlCol="0" anchor="ctr"/>
+          <a:lstStyle/>
+          <a:p>
+            <a:pPr algn="ctr"/>
+          </a:p>
+        </p:txBody>
+      </p:sp>
+      <p:sp>
+        <p:nvSpPr>
+          <p:cNvPr id="10" name="TextBox 9"/>
+          <p:cNvSpPr txBox="1"/>
+          <p:nvPr/>
+        </p:nvSpPr>
+        <p:spPr>
+          <a:xfrm>
+            <a:off x="6400800" y="2651760"/>
+            <a:ext cx="5120640" cy="731520"/>
+          </a:xfrm>
+          <a:prstGeom prst="rect">
+            <a:avLst/>
+          </a:prstGeom>
+          <a:noFill/>
+        </p:spPr>
+        <p:txBody>
+          <a:bodyPr wrap="square" anchor="t">
+            <a:spAutoFit/>
+          </a:bodyPr>
+          <a:lstStyle/>
+          <a:p>
+            <a:pPr algn="l">
+              <a:lnSpc>
+                <a:spcPct val="100000"/>
+              </a:lnSpc>
+              <a:spcAft>
+                <a:spcPts val="0"/>
+              </a:spcAft>
+            </a:pPr>
+            <a:r>
+              <a:rPr sz="1700" b="0">
+                <a:solidFill>
+                  <a:srgbClr val="FFFFFF"/>
+                </a:solidFill>
+                <a:latin typeface="微软雅黑"/>
+              </a:rPr>
+              <a:t>输入一句自然语言 → 自动生成可运行代码</a:t>
+            </a:r>
+          </a:p>
+        </p:txBody>
+      </p:sp>
+      <p:sp>
+        <p:nvSpPr>
+          <p:cNvPr id="11" name="Oval 10"/>
+          <p:cNvSpPr/>
+          <p:nvPr/>
+        </p:nvSpPr>
+        <p:spPr>
+          <a:xfrm>
+            <a:off x="6126480" y="3675887"/>
+            <a:ext cx="146304" cy="146304"/>
+          </a:xfrm>
+          <a:prstGeom prst="ellipse">
+            <a:avLst/>
+          </a:prstGeom>
+          <a:solidFill>
+            <a:srgbClr val="4A90D9"/>
+          </a:solidFill>
+          <a:ln>
+            <a:noFill/>
+          </a:ln>
+          <a:effectLst/>
+        </p:spPr>
+        <p:style>
+          <a:lnRef idx="1">
+            <a:schemeClr val="accent1"/>
+          </a:lnRef>
+          <a:fillRef idx="3">
+            <a:schemeClr val="accent1"/>
+          </a:fillRef>
+          <a:effectRef idx="2">
+            <a:schemeClr val="accent1"/>
+          </a:effectRef>
+          <a:fontRef idx="minor">
+            <a:schemeClr val="lt1"/>
+          </a:fontRef>
+        </p:style>
+        <p:txBody>
+          <a:bodyPr rtlCol="0" anchor="ctr"/>
+          <a:lstStyle/>
+          <a:p>
+            <a:pPr algn="ctr"/>
+          </a:p>
+        </p:txBody>
+      </p:sp>
+      <p:sp>
+        <p:nvSpPr>
+          <p:cNvPr id="12" name="TextBox 11"/>
+          <p:cNvSpPr txBox="1"/>
+          <p:nvPr/>
+        </p:nvSpPr>
+        <p:spPr>
+          <a:xfrm>
+            <a:off x="6400800" y="3566160"/>
+            <a:ext cx="5120640" cy="731520"/>
+          </a:xfrm>
+          <a:prstGeom prst="rect">
+            <a:avLst/>
+          </a:prstGeom>
+          <a:noFill/>
+        </p:spPr>
+        <p:txBody>
+          <a:bodyPr wrap="square" anchor="t">
+            <a:spAutoFit/>
+          </a:bodyPr>
+          <a:lstStyle/>
+          <a:p>
+            <a:pPr algn="l">
+              <a:lnSpc>
+                <a:spcPct val="100000"/>
+              </a:lnSpc>
+              <a:spcAft>
+                <a:spcPts val="0"/>
+              </a:spcAft>
+            </a:pPr>
+            <a:r>
+              <a:rPr sz="1700" b="0">
+                <a:solidFill>
+                  <a:srgbClr val="FFFFFF"/>
+                </a:solidFill>
+                <a:latin typeface="微软雅黑"/>
+              </a:rPr>
+              <a:t>运行失败 → Debug Agent 自动定位并修复（至多 N 轮）</a:t>
+            </a:r>
+          </a:p>
+        </p:txBody>
+      </p:sp>
+      <p:sp>
+        <p:nvSpPr>
+          <p:cNvPr id="13" name="Oval 12"/>
+          <p:cNvSpPr/>
+          <p:nvPr/>
+        </p:nvSpPr>
+        <p:spPr>
+          <a:xfrm>
+            <a:off x="6126480" y="4590288"/>
+            <a:ext cx="146304" cy="146304"/>
+          </a:xfrm>
+          <a:prstGeom prst="ellipse">
+            <a:avLst/>
+          </a:prstGeom>
+          <a:solidFill>
+            <a:srgbClr val="4A90D9"/>
+          </a:solidFill>
+          <a:ln>
+            <a:noFill/>
+          </a:ln>
+          <a:effectLst/>
+        </p:spPr>
+        <p:style>
+          <a:lnRef idx="1">
+            <a:schemeClr val="accent1"/>
+          </a:lnRef>
+          <a:fillRef idx="3">
+            <a:schemeClr val="accent1"/>
+          </a:fillRef>
+          <a:effectRef idx="2">
+            <a:schemeClr val="accent1"/>
+          </a:effectRef>
+          <a:fontRef idx="minor">
+            <a:schemeClr val="lt1"/>
+          </a:fontRef>
+        </p:style>
+        <p:txBody>
+          <a:bodyPr rtlCol="0" anchor="ctr"/>
+          <a:lstStyle/>
+          <a:p>
+            <a:pPr algn="ctr"/>
+          </a:p>
+        </p:txBody>
+      </p:sp>
+      <p:sp>
+        <p:nvSpPr>
+          <p:cNvPr id="14" name="TextBox 13"/>
+          <p:cNvSpPr txBox="1"/>
+          <p:nvPr/>
+        </p:nvSpPr>
+        <p:spPr>
+          <a:xfrm>
+            <a:off x="6400800" y="4480560"/>
+            <a:ext cx="5120640" cy="731520"/>
+          </a:xfrm>
+          <a:prstGeom prst="rect">
+            <a:avLst/>
+          </a:prstGeom>
+          <a:noFill/>
+        </p:spPr>
+        <p:txBody>
+          <a:bodyPr wrap="square" anchor="t">
+            <a:spAutoFit/>
+          </a:bodyPr>
+          <a:lstStyle/>
+          <a:p>
+            <a:pPr algn="l">
+              <a:lnSpc>
+                <a:spcPct val="100000"/>
+              </a:lnSpc>
+              <a:spcAft>
+                <a:spcPts val="0"/>
+              </a:spcAft>
+            </a:pPr>
+            <a:r>
+              <a:rPr sz="1700" b="0">
+                <a:solidFill>
+                  <a:srgbClr val="FFFFFF"/>
+                </a:solidFill>
+                <a:latin typeface="微软雅黑"/>
+              </a:rPr>
+              <a:t>成功 → Doc Agent 自动生成 README 文档</a:t>
+            </a:r>
+          </a:p>
+        </p:txBody>
+      </p:sp>
+      <p:sp>
+        <p:nvSpPr>
+          <p:cNvPr id="15" name="Oval 14"/>
+          <p:cNvSpPr/>
+          <p:nvPr/>
+        </p:nvSpPr>
+        <p:spPr>
+          <a:xfrm>
+            <a:off x="6126480" y="5504688"/>
+            <a:ext cx="146304" cy="146304"/>
+          </a:xfrm>
+          <a:prstGeom prst="ellipse">
+            <a:avLst/>
+          </a:prstGeom>
+          <a:solidFill>
+            <a:srgbClr val="4A90D9"/>
+          </a:solidFill>
+          <a:ln>
+            <a:noFill/>
+          </a:ln>
+          <a:effectLst/>
+        </p:spPr>
+        <p:style>
+          <a:lnRef idx="1">
+            <a:schemeClr val="accent1"/>
+          </a:lnRef>
+          <a:fillRef idx="3">
+            <a:schemeClr val="accent1"/>
+          </a:fillRef>
+          <a:effectRef idx="2">
+            <a:schemeClr val="accent1"/>
+          </a:effectRef>
+          <a:fontRef idx="minor">
+            <a:schemeClr val="lt1"/>
+          </a:fontRef>
+        </p:style>
+        <p:txBody>
+          <a:bodyPr rtlCol="0" anchor="ctr"/>
+          <a:lstStyle/>
+          <a:p>
+            <a:pPr algn="ctr"/>
+          </a:p>
+        </p:txBody>
+      </p:sp>
+      <p:sp>
+        <p:nvSpPr>
+          <p:cNvPr id="16" name="TextBox 15"/>
+          <p:cNvSpPr txBox="1"/>
+          <p:nvPr/>
+        </p:nvSpPr>
+        <p:spPr>
+          <a:xfrm>
+            <a:off x="6400800" y="5394960"/>
+            <a:ext cx="5120640" cy="731520"/>
+          </a:xfrm>
+          <a:prstGeom prst="rect">
+            <a:avLst/>
+          </a:prstGeom>
+          <a:noFill/>
+        </p:spPr>
+        <p:txBody>
+          <a:bodyPr wrap="square" anchor="t">
+            <a:spAutoFit/>
+          </a:bodyPr>
+          <a:lstStyle/>
+          <a:p>
+            <a:pPr algn="l">
+              <a:lnSpc>
+                <a:spcPct val="100000"/>
+              </a:lnSpc>
+              <a:spcAft>
+                <a:spcPts val="0"/>
+              </a:spcAft>
+            </a:pPr>
+            <a:r>
+              <a:rPr sz="1700" b="0">
+                <a:solidFill>
+                  <a:srgbClr val="FFFFFF"/>
+                </a:solidFill>
+                <a:latin typeface="微软雅黑"/>
+              </a:rPr>
+              <a:t>全过程事件流可视化，随时可查</a:t>
+            </a:r>
+          </a:p>
+        </p:txBody>
+      </p:sp>
+      <p:sp>
+        <p:nvSpPr>
+          <p:cNvPr id="17" name="Rectangle 16"/>
+          <p:cNvSpPr/>
+          <p:nvPr/>
+        </p:nvSpPr>
+        <p:spPr>
+          <a:xfrm>
+            <a:off x="0" y="6601968"/>
+            <a:ext cx="12191695" cy="27432"/>
+          </a:xfrm>
+          <a:prstGeom prst="rect">
+            <a:avLst/>
+          </a:prstGeom>
+          <a:solidFill>
+            <a:srgbClr val="4A90D9"/>
+          </a:solidFill>
+          <a:ln>
+            <a:noFill/>
+          </a:ln>
+          <a:effectLst/>
+        </p:spPr>
+        <p:style>
+          <a:lnRef idx="1">
+            <a:schemeClr val="accent1"/>
+          </a:lnRef>
+          <a:fillRef idx="3">
+            <a:schemeClr val="accent1"/>
+          </a:fillRef>
+          <a:effectRef idx="2">
+            <a:schemeClr val="accent1"/>
+          </a:effectRef>
+          <a:fontRef idx="minor">
+            <a:schemeClr val="lt1"/>
+          </a:fontRef>
+        </p:style>
+        <p:txBody>
+          <a:bodyPr rtlCol="0" anchor="ctr"/>
+          <a:lstStyle/>
+          <a:p>
+            <a:pPr algn="ctr"/>
+          </a:p>
+        </p:txBody>
+      </p:sp>
+      <p:sp>
+        <p:nvSpPr>
+          <p:cNvPr id="18" name="TextBox 17"/>
+          <p:cNvSpPr txBox="1"/>
+          <p:nvPr/>
+        </p:nvSpPr>
+        <p:spPr>
+          <a:xfrm>
+            <a:off x="11094415" y="6629400"/>
+            <a:ext cx="914400" cy="228600"/>
+          </a:xfrm>
+          <a:prstGeom prst="rect">
+            <a:avLst/>
+          </a:prstGeom>
+          <a:noFill/>
+        </p:spPr>
+        <p:txBody>
+          <a:bodyPr wrap="square" anchor="t">
+            <a:spAutoFit/>
+          </a:bodyPr>
+          <a:lstStyle/>
+          <a:p>
+            <a:pPr algn="r">
+              <a:lnSpc>
+                <a:spcPct val="100000"/>
+              </a:lnSpc>
+              <a:spcAft>
+                <a:spcPts val="800"/>
+              </a:spcAft>
+            </a:pPr>
+            <a:r>
+              <a:rPr sz="1200" b="0">
+                <a:solidFill>
+                  <a:srgbClr val="B4B9C8"/>
+                </a:solidFill>
+                <a:latin typeface="微软雅黑"/>
+              </a:rPr>
+              <a:t>2</a:t>
             </a:r>
           </a:p>
         </p:txBody>
@@ -4227,13 +5263,21 @@
           <a:noFill/>
         </p:spPr>
         <p:txBody>
-          <a:bodyPr wrap="square">
+          <a:bodyPr wrap="square" anchor="t">
             <a:spAutoFit/>
           </a:bodyPr>
           <a:lstStyle/>
           <a:p>
-            <a:r>
-              <a:rPr sz="3600" b="1">
+            <a:pPr algn="l">
+              <a:lnSpc>
+                <a:spcPct val="100000"/>
+              </a:lnSpc>
+              <a:spcAft>
+                <a:spcPts val="800"/>
+              </a:spcAft>
+            </a:pPr>
+            <a:r>
+              <a:rPr sz="3400" b="1">
                 <a:solidFill>
                   <a:srgbClr val="4A90D9"/>
                 </a:solidFill>
@@ -4246,14 +5290,104 @@
       </p:sp>
       <p:sp>
         <p:nvSpPr>
-          <p:cNvPr id="3" name="TextBox 2"/>
+          <p:cNvPr id="3" name="Rectangle 2"/>
+          <p:cNvSpPr/>
+          <p:nvPr/>
+        </p:nvSpPr>
+        <p:spPr>
+          <a:xfrm>
+            <a:off x="777240" y="1280160"/>
+            <a:ext cx="2011680" cy="45720"/>
+          </a:xfrm>
+          <a:prstGeom prst="rect">
+            <a:avLst/>
+          </a:prstGeom>
+          <a:solidFill>
+            <a:srgbClr val="2EC4B6"/>
+          </a:solidFill>
+          <a:ln>
+            <a:noFill/>
+          </a:ln>
+          <a:effectLst/>
+        </p:spPr>
+        <p:style>
+          <a:lnRef idx="1">
+            <a:schemeClr val="accent1"/>
+          </a:lnRef>
+          <a:fillRef idx="3">
+            <a:schemeClr val="accent1"/>
+          </a:fillRef>
+          <a:effectRef idx="2">
+            <a:schemeClr val="accent1"/>
+          </a:effectRef>
+          <a:fontRef idx="minor">
+            <a:schemeClr val="lt1"/>
+          </a:fontRef>
+        </p:style>
+        <p:txBody>
+          <a:bodyPr rtlCol="0" anchor="ctr"/>
+          <a:lstStyle/>
+          <a:p>
+            <a:pPr algn="ctr"/>
+          </a:p>
+        </p:txBody>
+      </p:sp>
+      <p:sp>
+        <p:nvSpPr>
+          <p:cNvPr id="4" name="Rounded Rectangle 3"/>
+          <p:cNvSpPr/>
+          <p:nvPr/>
+        </p:nvSpPr>
+        <p:spPr>
+          <a:xfrm>
+            <a:off x="3657600" y="1645920"/>
+            <a:ext cx="4846320" cy="1005840"/>
+          </a:xfrm>
+          <a:prstGeom prst="roundRect">
+            <a:avLst>
+              <a:gd name="adj" fmla="val 25000"/>
+            </a:avLst>
+          </a:prstGeom>
+          <a:solidFill>
+            <a:srgbClr val="4A90D9"/>
+          </a:solidFill>
+          <a:ln>
+            <a:noFill/>
+          </a:ln>
+          <a:effectLst/>
+        </p:spPr>
+        <p:style>
+          <a:lnRef idx="1">
+            <a:schemeClr val="accent1"/>
+          </a:lnRef>
+          <a:fillRef idx="3">
+            <a:schemeClr val="accent1"/>
+          </a:fillRef>
+          <a:effectRef idx="2">
+            <a:schemeClr val="accent1"/>
+          </a:effectRef>
+          <a:fontRef idx="minor">
+            <a:schemeClr val="lt1"/>
+          </a:fontRef>
+        </p:style>
+        <p:txBody>
+          <a:bodyPr rtlCol="0" anchor="ctr"/>
+          <a:lstStyle/>
+          <a:p>
+            <a:pPr algn="ctr"/>
+          </a:p>
+        </p:txBody>
+      </p:sp>
+      <p:sp>
+        <p:nvSpPr>
+          <p:cNvPr id="5" name="TextBox 4"/>
           <p:cNvSpPr txBox="1"/>
           <p:nvPr/>
         </p:nvSpPr>
         <p:spPr>
           <a:xfrm>
-            <a:off x="731520" y="1554480"/>
-            <a:ext cx="10698480" cy="4846320"/>
+            <a:off x="3657600" y="1874519"/>
+            <a:ext cx="4846320" cy="640080"/>
           </a:xfrm>
           <a:prstGeom prst="rect">
             <a:avLst/>
@@ -4261,88 +5395,701 @@
           <a:noFill/>
         </p:spPr>
         <p:txBody>
-          <a:bodyPr wrap="square">
+          <a:bodyPr wrap="square" anchor="ctr">
             <a:spAutoFit/>
           </a:bodyPr>
           <a:lstStyle/>
           <a:p>
-            <a:pPr>
+            <a:pPr algn="ctr">
+              <a:lnSpc>
+                <a:spcPct val="100000"/>
+              </a:lnSpc>
               <a:spcAft>
-                <a:spcPts val="1200"/>
+                <a:spcPts val="800"/>
               </a:spcAft>
             </a:pPr>
             <a:r>
-              <a:rPr sz="1800">
-                <a:solidFill>
-                  <a:srgbClr val="FFFFFF"/>
+              <a:rPr sz="2000" b="1">
+                <a:solidFill>
+                  <a:srgbClr val="1A1A2E"/>
                 </a:solidFill>
                 <a:latin typeface="微软雅黑"/>
               </a:rPr>
               <a:t>Coordinator（总控编排）</a:t>
             </a:r>
           </a:p>
-          <a:p>
-            <a:pPr>
+        </p:txBody>
+      </p:sp>
+      <p:sp>
+        <p:nvSpPr>
+          <p:cNvPr id="6" name="Rounded Rectangle 5"/>
+          <p:cNvSpPr/>
+          <p:nvPr/>
+        </p:nvSpPr>
+        <p:spPr>
+          <a:xfrm>
+            <a:off x="914400" y="3749039"/>
+            <a:ext cx="2651760" cy="1554480"/>
+          </a:xfrm>
+          <a:prstGeom prst="roundRect">
+            <a:avLst/>
+          </a:prstGeom>
+          <a:solidFill>
+            <a:srgbClr val="262640"/>
+          </a:solidFill>
+          <a:ln w="25400">
+            <a:solidFill>
+              <a:srgbClr val="2EC4B6"/>
+            </a:solidFill>
+          </a:ln>
+          <a:effectLst/>
+        </p:spPr>
+        <p:style>
+          <a:lnRef idx="1">
+            <a:schemeClr val="accent1"/>
+          </a:lnRef>
+          <a:fillRef idx="3">
+            <a:schemeClr val="accent1"/>
+          </a:fillRef>
+          <a:effectRef idx="2">
+            <a:schemeClr val="accent1"/>
+          </a:effectRef>
+          <a:fontRef idx="minor">
+            <a:schemeClr val="lt1"/>
+          </a:fontRef>
+        </p:style>
+        <p:txBody>
+          <a:bodyPr rtlCol="0" anchor="ctr"/>
+          <a:lstStyle/>
+          <a:p>
+            <a:pPr algn="ctr"/>
+          </a:p>
+        </p:txBody>
+      </p:sp>
+      <p:sp>
+        <p:nvSpPr>
+          <p:cNvPr id="7" name="TextBox 6"/>
+          <p:cNvSpPr txBox="1"/>
+          <p:nvPr/>
+        </p:nvSpPr>
+        <p:spPr>
+          <a:xfrm>
+            <a:off x="914400" y="4023360"/>
+            <a:ext cx="2651760" cy="548640"/>
+          </a:xfrm>
+          <a:prstGeom prst="rect">
+            <a:avLst/>
+          </a:prstGeom>
+          <a:noFill/>
+        </p:spPr>
+        <p:txBody>
+          <a:bodyPr wrap="square" anchor="t">
+            <a:spAutoFit/>
+          </a:bodyPr>
+          <a:lstStyle/>
+          <a:p>
+            <a:pPr algn="ctr">
+              <a:lnSpc>
+                <a:spcPct val="100000"/>
+              </a:lnSpc>
               <a:spcAft>
-                <a:spcPts val="1200"/>
+                <a:spcPts val="800"/>
               </a:spcAft>
             </a:pPr>
             <a:r>
-              <a:rPr sz="1800">
-                <a:solidFill>
-                  <a:srgbClr val="B4B9C8"/>
+              <a:rPr sz="1900" b="1">
+                <a:solidFill>
+                  <a:srgbClr val="FFFFFF"/>
                 </a:solidFill>
                 <a:latin typeface="微软雅黑"/>
               </a:rPr>
-              <a:t>  ├── Code Agent   : 自然语言 → 生成 Python 代码</a:t>
-            </a:r>
-          </a:p>
-          <a:p>
-            <a:pPr>
+              <a:t>Code Agent</a:t>
+            </a:r>
+          </a:p>
+        </p:txBody>
+      </p:sp>
+      <p:sp>
+        <p:nvSpPr>
+          <p:cNvPr id="8" name="TextBox 7"/>
+          <p:cNvSpPr txBox="1"/>
+          <p:nvPr/>
+        </p:nvSpPr>
+        <p:spPr>
+          <a:xfrm>
+            <a:off x="914400" y="4617720"/>
+            <a:ext cx="2651760" cy="457200"/>
+          </a:xfrm>
+          <a:prstGeom prst="rect">
+            <a:avLst/>
+          </a:prstGeom>
+          <a:noFill/>
+        </p:spPr>
+        <p:txBody>
+          <a:bodyPr wrap="square" anchor="t">
+            <a:spAutoFit/>
+          </a:bodyPr>
+          <a:lstStyle/>
+          <a:p>
+            <a:pPr algn="ctr">
+              <a:lnSpc>
+                <a:spcPct val="100000"/>
+              </a:lnSpc>
               <a:spcAft>
-                <a:spcPts val="1200"/>
+                <a:spcPts val="800"/>
               </a:spcAft>
             </a:pPr>
             <a:r>
-              <a:rPr sz="1800">
+              <a:rPr sz="1400" b="0">
                 <a:solidFill>
                   <a:srgbClr val="B4B9C8"/>
                 </a:solidFill>
                 <a:latin typeface="微软雅黑"/>
               </a:rPr>
-              <a:t>  ├── Debug Agent  : 沙箱运行 → 失败自动修复（循环）</a:t>
-            </a:r>
-          </a:p>
-          <a:p>
-            <a:pPr>
+              <a:t>生成代码</a:t>
+            </a:r>
+          </a:p>
+        </p:txBody>
+      </p:sp>
+      <p:sp>
+        <p:nvSpPr>
+          <p:cNvPr id="9" name="Rounded Rectangle 8"/>
+          <p:cNvSpPr/>
+          <p:nvPr/>
+        </p:nvSpPr>
+        <p:spPr>
+          <a:xfrm>
+            <a:off x="4754880" y="3749039"/>
+            <a:ext cx="2651760" cy="1554480"/>
+          </a:xfrm>
+          <a:prstGeom prst="roundRect">
+            <a:avLst/>
+          </a:prstGeom>
+          <a:solidFill>
+            <a:srgbClr val="262640"/>
+          </a:solidFill>
+          <a:ln w="25400">
+            <a:solidFill>
+              <a:srgbClr val="4A90D9"/>
+            </a:solidFill>
+          </a:ln>
+          <a:effectLst/>
+        </p:spPr>
+        <p:style>
+          <a:lnRef idx="1">
+            <a:schemeClr val="accent1"/>
+          </a:lnRef>
+          <a:fillRef idx="3">
+            <a:schemeClr val="accent1"/>
+          </a:fillRef>
+          <a:effectRef idx="2">
+            <a:schemeClr val="accent1"/>
+          </a:effectRef>
+          <a:fontRef idx="minor">
+            <a:schemeClr val="lt1"/>
+          </a:fontRef>
+        </p:style>
+        <p:txBody>
+          <a:bodyPr rtlCol="0" anchor="ctr"/>
+          <a:lstStyle/>
+          <a:p>
+            <a:pPr algn="ctr"/>
+          </a:p>
+        </p:txBody>
+      </p:sp>
+      <p:sp>
+        <p:nvSpPr>
+          <p:cNvPr id="10" name="TextBox 9"/>
+          <p:cNvSpPr txBox="1"/>
+          <p:nvPr/>
+        </p:nvSpPr>
+        <p:spPr>
+          <a:xfrm>
+            <a:off x="4754880" y="4023360"/>
+            <a:ext cx="2651760" cy="548640"/>
+          </a:xfrm>
+          <a:prstGeom prst="rect">
+            <a:avLst/>
+          </a:prstGeom>
+          <a:noFill/>
+        </p:spPr>
+        <p:txBody>
+          <a:bodyPr wrap="square" anchor="t">
+            <a:spAutoFit/>
+          </a:bodyPr>
+          <a:lstStyle/>
+          <a:p>
+            <a:pPr algn="ctr">
+              <a:lnSpc>
+                <a:spcPct val="100000"/>
+              </a:lnSpc>
               <a:spcAft>
-                <a:spcPts val="1200"/>
+                <a:spcPts val="800"/>
               </a:spcAft>
             </a:pPr>
             <a:r>
-              <a:rPr sz="1800">
-                <a:solidFill>
-                  <a:srgbClr val="B4B9C8"/>
+              <a:rPr sz="1900" b="1">
+                <a:solidFill>
+                  <a:srgbClr val="FFFFFF"/>
                 </a:solidFill>
                 <a:latin typeface="微软雅黑"/>
               </a:rPr>
-              <a:t>  ├── Doc Agent    : 运行通过 → 生成 README.md</a:t>
-            </a:r>
-          </a:p>
-          <a:p>
-            <a:pPr>
+              <a:t>Debug Agent</a:t>
+            </a:r>
+          </a:p>
+        </p:txBody>
+      </p:sp>
+      <p:sp>
+        <p:nvSpPr>
+          <p:cNvPr id="11" name="TextBox 10"/>
+          <p:cNvSpPr txBox="1"/>
+          <p:nvPr/>
+        </p:nvSpPr>
+        <p:spPr>
+          <a:xfrm>
+            <a:off x="4754880" y="4617720"/>
+            <a:ext cx="2651760" cy="457200"/>
+          </a:xfrm>
+          <a:prstGeom prst="rect">
+            <a:avLst/>
+          </a:prstGeom>
+          <a:noFill/>
+        </p:spPr>
+        <p:txBody>
+          <a:bodyPr wrap="square" anchor="t">
+            <a:spAutoFit/>
+          </a:bodyPr>
+          <a:lstStyle/>
+          <a:p>
+            <a:pPr algn="ctr">
+              <a:lnSpc>
+                <a:spcPct val="100000"/>
+              </a:lnSpc>
               <a:spcAft>
-                <a:spcPts val="1200"/>
+                <a:spcPts val="800"/>
               </a:spcAft>
             </a:pPr>
             <a:r>
-              <a:rPr sz="1800">
+              <a:rPr sz="1400" b="0">
                 <a:solidFill>
                   <a:srgbClr val="B4B9C8"/>
                 </a:solidFill>
                 <a:latin typeface="微软雅黑"/>
               </a:rPr>
-              <a:t>  └── 事件流(EventBus) : 全过程实时可见，前端/CLI 渲染</a:t>
+              <a:t>运行 + 自动修复</a:t>
+            </a:r>
+          </a:p>
+        </p:txBody>
+      </p:sp>
+      <p:sp>
+        <p:nvSpPr>
+          <p:cNvPr id="12" name="Rounded Rectangle 11"/>
+          <p:cNvSpPr/>
+          <p:nvPr/>
+        </p:nvSpPr>
+        <p:spPr>
+          <a:xfrm>
+            <a:off x="8595360" y="3749039"/>
+            <a:ext cx="2651760" cy="1554480"/>
+          </a:xfrm>
+          <a:prstGeom prst="roundRect">
+            <a:avLst/>
+          </a:prstGeom>
+          <a:solidFill>
+            <a:srgbClr val="262640"/>
+          </a:solidFill>
+          <a:ln w="25400">
+            <a:solidFill>
+              <a:srgbClr val="2EC4B6"/>
+            </a:solidFill>
+          </a:ln>
+          <a:effectLst/>
+        </p:spPr>
+        <p:style>
+          <a:lnRef idx="1">
+            <a:schemeClr val="accent1"/>
+          </a:lnRef>
+          <a:fillRef idx="3">
+            <a:schemeClr val="accent1"/>
+          </a:fillRef>
+          <a:effectRef idx="2">
+            <a:schemeClr val="accent1"/>
+          </a:effectRef>
+          <a:fontRef idx="minor">
+            <a:schemeClr val="lt1"/>
+          </a:fontRef>
+        </p:style>
+        <p:txBody>
+          <a:bodyPr rtlCol="0" anchor="ctr"/>
+          <a:lstStyle/>
+          <a:p>
+            <a:pPr algn="ctr"/>
+          </a:p>
+        </p:txBody>
+      </p:sp>
+      <p:sp>
+        <p:nvSpPr>
+          <p:cNvPr id="13" name="TextBox 12"/>
+          <p:cNvSpPr txBox="1"/>
+          <p:nvPr/>
+        </p:nvSpPr>
+        <p:spPr>
+          <a:xfrm>
+            <a:off x="8595360" y="4023360"/>
+            <a:ext cx="2651760" cy="548640"/>
+          </a:xfrm>
+          <a:prstGeom prst="rect">
+            <a:avLst/>
+          </a:prstGeom>
+          <a:noFill/>
+        </p:spPr>
+        <p:txBody>
+          <a:bodyPr wrap="square" anchor="t">
+            <a:spAutoFit/>
+          </a:bodyPr>
+          <a:lstStyle/>
+          <a:p>
+            <a:pPr algn="ctr">
+              <a:lnSpc>
+                <a:spcPct val="100000"/>
+              </a:lnSpc>
+              <a:spcAft>
+                <a:spcPts val="800"/>
+              </a:spcAft>
+            </a:pPr>
+            <a:r>
+              <a:rPr sz="1900" b="1">
+                <a:solidFill>
+                  <a:srgbClr val="FFFFFF"/>
+                </a:solidFill>
+                <a:latin typeface="微软雅黑"/>
+              </a:rPr>
+              <a:t>Doc Agent</a:t>
+            </a:r>
+          </a:p>
+        </p:txBody>
+      </p:sp>
+      <p:sp>
+        <p:nvSpPr>
+          <p:cNvPr id="14" name="TextBox 13"/>
+          <p:cNvSpPr txBox="1"/>
+          <p:nvPr/>
+        </p:nvSpPr>
+        <p:spPr>
+          <a:xfrm>
+            <a:off x="8595360" y="4617720"/>
+            <a:ext cx="2651760" cy="457200"/>
+          </a:xfrm>
+          <a:prstGeom prst="rect">
+            <a:avLst/>
+          </a:prstGeom>
+          <a:noFill/>
+        </p:spPr>
+        <p:txBody>
+          <a:bodyPr wrap="square" anchor="t">
+            <a:spAutoFit/>
+          </a:bodyPr>
+          <a:lstStyle/>
+          <a:p>
+            <a:pPr algn="ctr">
+              <a:lnSpc>
+                <a:spcPct val="100000"/>
+              </a:lnSpc>
+              <a:spcAft>
+                <a:spcPts val="800"/>
+              </a:spcAft>
+            </a:pPr>
+            <a:r>
+              <a:rPr sz="1400" b="0">
+                <a:solidFill>
+                  <a:srgbClr val="B4B9C8"/>
+                </a:solidFill>
+                <a:latin typeface="微软雅黑"/>
+              </a:rPr>
+              <a:t>生成 README</a:t>
+            </a:r>
+          </a:p>
+        </p:txBody>
+      </p:sp>
+      <p:cxnSp>
+        <p:nvCxnSpPr>
+          <p:cNvPr id="15" name="Connector 14"/>
+          <p:cNvCxnSpPr/>
+          <p:nvPr/>
+        </p:nvCxnSpPr>
+        <p:spPr>
+          <a:xfrm flipH="1">
+            <a:off x="2240280" y="2651760"/>
+            <a:ext cx="3840480" cy="1097279"/>
+          </a:xfrm>
+          <a:prstGeom prst="line">
+            <a:avLst/>
+          </a:prstGeom>
+          <a:ln w="25400">
+            <a:solidFill>
+              <a:srgbClr val="4A90D9"/>
+            </a:solidFill>
+          </a:ln>
+          <a:effectLst/>
+        </p:spPr>
+        <p:style>
+          <a:lnRef idx="2">
+            <a:schemeClr val="accent1"/>
+          </a:lnRef>
+          <a:fillRef idx="0">
+            <a:schemeClr val="accent1"/>
+          </a:fillRef>
+          <a:effectRef idx="1">
+            <a:schemeClr val="accent1"/>
+          </a:effectRef>
+          <a:fontRef idx="minor">
+            <a:schemeClr val="tx1"/>
+          </a:fontRef>
+        </p:style>
+      </p:cxnSp>
+      <p:cxnSp>
+        <p:nvCxnSpPr>
+          <p:cNvPr id="16" name="Connector 15"/>
+          <p:cNvCxnSpPr/>
+          <p:nvPr/>
+        </p:nvCxnSpPr>
+        <p:spPr>
+          <a:xfrm>
+            <a:off x="6080760" y="2651760"/>
+            <a:ext cx="0" cy="1097279"/>
+          </a:xfrm>
+          <a:prstGeom prst="line">
+            <a:avLst/>
+          </a:prstGeom>
+          <a:ln w="25400">
+            <a:solidFill>
+              <a:srgbClr val="4A90D9"/>
+            </a:solidFill>
+          </a:ln>
+          <a:effectLst/>
+        </p:spPr>
+        <p:style>
+          <a:lnRef idx="2">
+            <a:schemeClr val="accent1"/>
+          </a:lnRef>
+          <a:fillRef idx="0">
+            <a:schemeClr val="accent1"/>
+          </a:fillRef>
+          <a:effectRef idx="1">
+            <a:schemeClr val="accent1"/>
+          </a:effectRef>
+          <a:fontRef idx="minor">
+            <a:schemeClr val="tx1"/>
+          </a:fontRef>
+        </p:style>
+      </p:cxnSp>
+      <p:cxnSp>
+        <p:nvCxnSpPr>
+          <p:cNvPr id="17" name="Connector 16"/>
+          <p:cNvCxnSpPr/>
+          <p:nvPr/>
+        </p:nvCxnSpPr>
+        <p:spPr>
+          <a:xfrm>
+            <a:off x="6080760" y="2651760"/>
+            <a:ext cx="3840480" cy="1097279"/>
+          </a:xfrm>
+          <a:prstGeom prst="line">
+            <a:avLst/>
+          </a:prstGeom>
+          <a:ln w="25400">
+            <a:solidFill>
+              <a:srgbClr val="4A90D9"/>
+            </a:solidFill>
+          </a:ln>
+          <a:effectLst/>
+        </p:spPr>
+        <p:style>
+          <a:lnRef idx="2">
+            <a:schemeClr val="accent1"/>
+          </a:lnRef>
+          <a:fillRef idx="0">
+            <a:schemeClr val="accent1"/>
+          </a:fillRef>
+          <a:effectRef idx="1">
+            <a:schemeClr val="accent1"/>
+          </a:effectRef>
+          <a:fontRef idx="minor">
+            <a:schemeClr val="tx1"/>
+          </a:fontRef>
+        </p:style>
+      </p:cxnSp>
+      <p:sp>
+        <p:nvSpPr>
+          <p:cNvPr id="18" name="Rounded Rectangle 17"/>
+          <p:cNvSpPr/>
+          <p:nvPr/>
+        </p:nvSpPr>
+        <p:spPr>
+          <a:xfrm>
+            <a:off x="731520" y="5669280"/>
+            <a:ext cx="10698480" cy="640080"/>
+          </a:xfrm>
+          <a:prstGeom prst="roundRect">
+            <a:avLst>
+              <a:gd name="adj" fmla="val 30000"/>
+            </a:avLst>
+          </a:prstGeom>
+          <a:solidFill>
+            <a:srgbClr val="262640"/>
+          </a:solidFill>
+          <a:ln w="19050">
+            <a:solidFill>
+              <a:srgbClr val="2EC4B6"/>
+            </a:solidFill>
+          </a:ln>
+          <a:effectLst/>
+        </p:spPr>
+        <p:style>
+          <a:lnRef idx="1">
+            <a:schemeClr val="accent1"/>
+          </a:lnRef>
+          <a:fillRef idx="3">
+            <a:schemeClr val="accent1"/>
+          </a:fillRef>
+          <a:effectRef idx="2">
+            <a:schemeClr val="accent1"/>
+          </a:effectRef>
+          <a:fontRef idx="minor">
+            <a:schemeClr val="lt1"/>
+          </a:fontRef>
+        </p:style>
+        <p:txBody>
+          <a:bodyPr rtlCol="0" anchor="ctr"/>
+          <a:lstStyle/>
+          <a:p>
+            <a:pPr algn="ctr"/>
+          </a:p>
+        </p:txBody>
+      </p:sp>
+      <p:sp>
+        <p:nvSpPr>
+          <p:cNvPr id="19" name="TextBox 18"/>
+          <p:cNvSpPr txBox="1"/>
+          <p:nvPr/>
+        </p:nvSpPr>
+        <p:spPr>
+          <a:xfrm>
+            <a:off x="731520" y="5806440"/>
+            <a:ext cx="10698480" cy="365760"/>
+          </a:xfrm>
+          <a:prstGeom prst="rect">
+            <a:avLst/>
+          </a:prstGeom>
+          <a:noFill/>
+        </p:spPr>
+        <p:txBody>
+          <a:bodyPr wrap="square" anchor="t">
+            <a:spAutoFit/>
+          </a:bodyPr>
+          <a:lstStyle/>
+          <a:p>
+            <a:pPr algn="ctr">
+              <a:lnSpc>
+                <a:spcPct val="100000"/>
+              </a:lnSpc>
+              <a:spcAft>
+                <a:spcPts val="800"/>
+              </a:spcAft>
+            </a:pPr>
+            <a:r>
+              <a:rPr sz="1600" b="1">
+                <a:solidFill>
+                  <a:srgbClr val="FFFFFF"/>
+                </a:solidFill>
+                <a:latin typeface="微软雅黑"/>
+              </a:rPr>
+              <a:t>事件流 EventBus → CLI / SSE / Streamlit 实时展示</a:t>
+            </a:r>
+          </a:p>
+        </p:txBody>
+      </p:sp>
+      <p:sp>
+        <p:nvSpPr>
+          <p:cNvPr id="20" name="Rectangle 19"/>
+          <p:cNvSpPr/>
+          <p:nvPr/>
+        </p:nvSpPr>
+        <p:spPr>
+          <a:xfrm>
+            <a:off x="0" y="6601968"/>
+            <a:ext cx="12191695" cy="27432"/>
+          </a:xfrm>
+          <a:prstGeom prst="rect">
+            <a:avLst/>
+          </a:prstGeom>
+          <a:solidFill>
+            <a:srgbClr val="4A90D9"/>
+          </a:solidFill>
+          <a:ln>
+            <a:noFill/>
+          </a:ln>
+          <a:effectLst/>
+        </p:spPr>
+        <p:style>
+          <a:lnRef idx="1">
+            <a:schemeClr val="accent1"/>
+          </a:lnRef>
+          <a:fillRef idx="3">
+            <a:schemeClr val="accent1"/>
+          </a:fillRef>
+          <a:effectRef idx="2">
+            <a:schemeClr val="accent1"/>
+          </a:effectRef>
+          <a:fontRef idx="minor">
+            <a:schemeClr val="lt1"/>
+          </a:fontRef>
+        </p:style>
+        <p:txBody>
+          <a:bodyPr rtlCol="0" anchor="ctr"/>
+          <a:lstStyle/>
+          <a:p>
+            <a:pPr algn="ctr"/>
+          </a:p>
+        </p:txBody>
+      </p:sp>
+      <p:sp>
+        <p:nvSpPr>
+          <p:cNvPr id="21" name="TextBox 20"/>
+          <p:cNvSpPr txBox="1"/>
+          <p:nvPr/>
+        </p:nvSpPr>
+        <p:spPr>
+          <a:xfrm>
+            <a:off x="11094415" y="6629400"/>
+            <a:ext cx="914400" cy="228600"/>
+          </a:xfrm>
+          <a:prstGeom prst="rect">
+            <a:avLst/>
+          </a:prstGeom>
+          <a:noFill/>
+        </p:spPr>
+        <p:txBody>
+          <a:bodyPr wrap="square" anchor="t">
+            <a:spAutoFit/>
+          </a:bodyPr>
+          <a:lstStyle/>
+          <a:p>
+            <a:pPr algn="r">
+              <a:lnSpc>
+                <a:spcPct val="100000"/>
+              </a:lnSpc>
+              <a:spcAft>
+                <a:spcPts val="800"/>
+              </a:spcAft>
+            </a:pPr>
+            <a:r>
+              <a:rPr sz="1200" b="0">
+                <a:solidFill>
+                  <a:srgbClr val="B4B9C8"/>
+                </a:solidFill>
+                <a:latin typeface="微软雅黑"/>
+              </a:rPr>
+              <a:t>3</a:t>
             </a:r>
           </a:p>
         </p:txBody>
@@ -4390,13 +6137,21 @@
           <a:noFill/>
         </p:spPr>
         <p:txBody>
-          <a:bodyPr wrap="square">
+          <a:bodyPr wrap="square" anchor="t">
             <a:spAutoFit/>
           </a:bodyPr>
           <a:lstStyle/>
           <a:p>
-            <a:r>
-              <a:rPr sz="3600" b="1">
+            <a:pPr algn="l">
+              <a:lnSpc>
+                <a:spcPct val="100000"/>
+              </a:lnSpc>
+              <a:spcAft>
+                <a:spcPts val="800"/>
+              </a:spcAft>
+            </a:pPr>
+            <a:r>
+              <a:rPr sz="3400" b="1">
                 <a:solidFill>
                   <a:srgbClr val="4A90D9"/>
                 </a:solidFill>
@@ -4409,14 +6164,148 @@
       </p:sp>
       <p:sp>
         <p:nvSpPr>
-          <p:cNvPr id="3" name="TextBox 2"/>
+          <p:cNvPr id="3" name="Rectangle 2"/>
+          <p:cNvSpPr/>
+          <p:nvPr/>
+        </p:nvSpPr>
+        <p:spPr>
+          <a:xfrm>
+            <a:off x="777240" y="1280160"/>
+            <a:ext cx="2011680" cy="45720"/>
+          </a:xfrm>
+          <a:prstGeom prst="rect">
+            <a:avLst/>
+          </a:prstGeom>
+          <a:solidFill>
+            <a:srgbClr val="2EC4B6"/>
+          </a:solidFill>
+          <a:ln>
+            <a:noFill/>
+          </a:ln>
+          <a:effectLst/>
+        </p:spPr>
+        <p:style>
+          <a:lnRef idx="1">
+            <a:schemeClr val="accent1"/>
+          </a:lnRef>
+          <a:fillRef idx="3">
+            <a:schemeClr val="accent1"/>
+          </a:fillRef>
+          <a:effectRef idx="2">
+            <a:schemeClr val="accent1"/>
+          </a:effectRef>
+          <a:fontRef idx="minor">
+            <a:schemeClr val="lt1"/>
+          </a:fontRef>
+        </p:style>
+        <p:txBody>
+          <a:bodyPr rtlCol="0" anchor="ctr"/>
+          <a:lstStyle/>
+          <a:p>
+            <a:pPr algn="ctr"/>
+          </a:p>
+        </p:txBody>
+      </p:sp>
+      <p:sp>
+        <p:nvSpPr>
+          <p:cNvPr id="4" name="Rounded Rectangle 3"/>
+          <p:cNvSpPr/>
+          <p:nvPr/>
+        </p:nvSpPr>
+        <p:spPr>
+          <a:xfrm>
+            <a:off x="731520" y="1737360"/>
+            <a:ext cx="5120640" cy="2286000"/>
+          </a:xfrm>
+          <a:prstGeom prst="roundRect">
+            <a:avLst/>
+          </a:prstGeom>
+          <a:solidFill>
+            <a:srgbClr val="262640"/>
+          </a:solidFill>
+          <a:ln w="19050">
+            <a:solidFill>
+              <a:srgbClr val="4A90D9"/>
+            </a:solidFill>
+          </a:ln>
+          <a:effectLst/>
+        </p:spPr>
+        <p:style>
+          <a:lnRef idx="1">
+            <a:schemeClr val="accent1"/>
+          </a:lnRef>
+          <a:fillRef idx="3">
+            <a:schemeClr val="accent1"/>
+          </a:fillRef>
+          <a:effectRef idx="2">
+            <a:schemeClr val="accent1"/>
+          </a:effectRef>
+          <a:fontRef idx="minor">
+            <a:schemeClr val="lt1"/>
+          </a:fontRef>
+        </p:style>
+        <p:txBody>
+          <a:bodyPr rtlCol="0" anchor="ctr"/>
+          <a:lstStyle/>
+          <a:p>
+            <a:pPr algn="ctr"/>
+          </a:p>
+        </p:txBody>
+      </p:sp>
+      <p:sp>
+        <p:nvSpPr>
+          <p:cNvPr id="5" name="Rounded Rectangle 4"/>
+          <p:cNvSpPr/>
+          <p:nvPr/>
+        </p:nvSpPr>
+        <p:spPr>
+          <a:xfrm>
+            <a:off x="731520" y="1737360"/>
+            <a:ext cx="5120640" cy="128016"/>
+          </a:xfrm>
+          <a:prstGeom prst="roundRect">
+            <a:avLst/>
+          </a:prstGeom>
+          <a:solidFill>
+            <a:srgbClr val="4A90D9"/>
+          </a:solidFill>
+          <a:ln>
+            <a:noFill/>
+          </a:ln>
+          <a:effectLst/>
+        </p:spPr>
+        <p:style>
+          <a:lnRef idx="1">
+            <a:schemeClr val="accent1"/>
+          </a:lnRef>
+          <a:fillRef idx="3">
+            <a:schemeClr val="accent1"/>
+          </a:fillRef>
+          <a:effectRef idx="2">
+            <a:schemeClr val="accent1"/>
+          </a:effectRef>
+          <a:fontRef idx="minor">
+            <a:schemeClr val="lt1"/>
+          </a:fontRef>
+        </p:style>
+        <p:txBody>
+          <a:bodyPr rtlCol="0" anchor="ctr"/>
+          <a:lstStyle/>
+          <a:p>
+            <a:pPr algn="ctr"/>
+          </a:p>
+        </p:txBody>
+      </p:sp>
+      <p:sp>
+        <p:nvSpPr>
+          <p:cNvPr id="6" name="TextBox 5"/>
           <p:cNvSpPr txBox="1"/>
           <p:nvPr/>
         </p:nvSpPr>
         <p:spPr>
           <a:xfrm>
-            <a:off x="731520" y="1554480"/>
-            <a:ext cx="10698480" cy="4846320"/>
+            <a:off x="960120" y="2011679"/>
+            <a:ext cx="4663440" cy="640080"/>
           </a:xfrm>
           <a:prstGeom prst="rect">
             <a:avLst/>
@@ -4424,88 +6313,829 @@
           <a:noFill/>
         </p:spPr>
         <p:txBody>
-          <a:bodyPr wrap="square">
+          <a:bodyPr wrap="square" anchor="t">
             <a:spAutoFit/>
           </a:bodyPr>
           <a:lstStyle/>
           <a:p>
-            <a:pPr>
+            <a:pPr algn="l">
+              <a:lnSpc>
+                <a:spcPct val="100000"/>
+              </a:lnSpc>
               <a:spcAft>
-                <a:spcPts val="1200"/>
+                <a:spcPts val="800"/>
               </a:spcAft>
             </a:pPr>
             <a:r>
-              <a:rPr sz="1800">
+              <a:rPr sz="2000" b="1">
                 <a:solidFill>
                   <a:srgbClr val="FFFFFF"/>
                 </a:solidFill>
                 <a:latin typeface="微软雅黑"/>
               </a:rPr>
-              <a:t>LLM 抽象层：默认 DeepSeek，接口统一，可换 Claude</a:t>
-            </a:r>
-          </a:p>
-          <a:p>
-            <a:pPr>
+              <a:t>LLM 抽象层</a:t>
+            </a:r>
+          </a:p>
+        </p:txBody>
+      </p:sp>
+      <p:sp>
+        <p:nvSpPr>
+          <p:cNvPr id="7" name="TextBox 6"/>
+          <p:cNvSpPr txBox="1"/>
+          <p:nvPr/>
+        </p:nvSpPr>
+        <p:spPr>
+          <a:xfrm>
+            <a:off x="960120" y="2651760"/>
+            <a:ext cx="4663440" cy="1188720"/>
+          </a:xfrm>
+          <a:prstGeom prst="rect">
+            <a:avLst/>
+          </a:prstGeom>
+          <a:noFill/>
+        </p:spPr>
+        <p:txBody>
+          <a:bodyPr wrap="square" anchor="t">
+            <a:spAutoFit/>
+          </a:bodyPr>
+          <a:lstStyle/>
+          <a:p>
+            <a:pPr algn="l">
+              <a:lnSpc>
+                <a:spcPct val="100000"/>
+              </a:lnSpc>
               <a:spcAft>
-                <a:spcPts val="1200"/>
+                <a:spcPts val="600"/>
               </a:spcAft>
             </a:pPr>
             <a:r>
-              <a:rPr sz="1800">
-                <a:solidFill>
-                  <a:srgbClr val="FFFFFF"/>
+              <a:rPr sz="1500" b="0">
+                <a:solidFill>
+                  <a:srgbClr val="B4B9C8"/>
                 </a:solidFill>
                 <a:latin typeface="微软雅黑"/>
               </a:rPr>
-              <a:t>沙箱执行：subprocess 隔离 + 临时目录 + 超时保护</a:t>
-            </a:r>
-          </a:p>
-          <a:p>
-            <a:pPr>
+              <a:t>统一 chat 接口</a:t>
+            </a:r>
+          </a:p>
+          <a:p>
+            <a:pPr algn="l">
+              <a:lnSpc>
+                <a:spcPct val="100000"/>
+              </a:lnSpc>
               <a:spcAft>
-                <a:spcPts val="1200"/>
+                <a:spcPts val="600"/>
               </a:spcAft>
             </a:pPr>
             <a:r>
-              <a:rPr sz="1800">
-                <a:solidFill>
-                  <a:srgbClr val="FFFFFF"/>
+              <a:rPr sz="1500" b="0">
+                <a:solidFill>
+                  <a:srgbClr val="B4B9C8"/>
                 </a:solidFill>
                 <a:latin typeface="微软雅黑"/>
               </a:rPr>
-              <a:t>修复循环：失败 → 报错喂回 LLM → 重跑，至多 N 轮</a:t>
-            </a:r>
-          </a:p>
-          <a:p>
-            <a:pPr>
+              <a:t>DeepSeek 默认，可换 Claude</a:t>
+            </a:r>
+          </a:p>
+          <a:p>
+            <a:pPr algn="l">
+              <a:lnSpc>
+                <a:spcPct val="100000"/>
+              </a:lnSpc>
               <a:spcAft>
-                <a:spcPts val="1200"/>
+                <a:spcPts val="600"/>
               </a:spcAft>
             </a:pPr>
             <a:r>
-              <a:rPr sz="1800">
-                <a:solidFill>
-                  <a:srgbClr val="FFFFFF"/>
+              <a:rPr sz="1500" b="0">
+                <a:solidFill>
+                  <a:srgbClr val="B4B9C8"/>
                 </a:solidFill>
                 <a:latin typeface="微软雅黑"/>
               </a:rPr>
-              <a:t>事件流：结构化事件经 EventBus 广播，CLI/SSE/Web 三种消费端</a:t>
-            </a:r>
-          </a:p>
-          <a:p>
-            <a:pPr>
+              <a:t>FakeClient 测试不花 token</a:t>
+            </a:r>
+          </a:p>
+        </p:txBody>
+      </p:sp>
+      <p:sp>
+        <p:nvSpPr>
+          <p:cNvPr id="8" name="Rounded Rectangle 7"/>
+          <p:cNvSpPr/>
+          <p:nvPr/>
+        </p:nvSpPr>
+        <p:spPr>
+          <a:xfrm>
+            <a:off x="6309360" y="1737360"/>
+            <a:ext cx="5120640" cy="2286000"/>
+          </a:xfrm>
+          <a:prstGeom prst="roundRect">
+            <a:avLst/>
+          </a:prstGeom>
+          <a:solidFill>
+            <a:srgbClr val="262640"/>
+          </a:solidFill>
+          <a:ln w="19050">
+            <a:solidFill>
+              <a:srgbClr val="4A90D9"/>
+            </a:solidFill>
+          </a:ln>
+          <a:effectLst/>
+        </p:spPr>
+        <p:style>
+          <a:lnRef idx="1">
+            <a:schemeClr val="accent1"/>
+          </a:lnRef>
+          <a:fillRef idx="3">
+            <a:schemeClr val="accent1"/>
+          </a:fillRef>
+          <a:effectRef idx="2">
+            <a:schemeClr val="accent1"/>
+          </a:effectRef>
+          <a:fontRef idx="minor">
+            <a:schemeClr val="lt1"/>
+          </a:fontRef>
+        </p:style>
+        <p:txBody>
+          <a:bodyPr rtlCol="0" anchor="ctr"/>
+          <a:lstStyle/>
+          <a:p>
+            <a:pPr algn="ctr"/>
+          </a:p>
+        </p:txBody>
+      </p:sp>
+      <p:sp>
+        <p:nvSpPr>
+          <p:cNvPr id="9" name="Rounded Rectangle 8"/>
+          <p:cNvSpPr/>
+          <p:nvPr/>
+        </p:nvSpPr>
+        <p:spPr>
+          <a:xfrm>
+            <a:off x="6309360" y="1737360"/>
+            <a:ext cx="5120640" cy="128016"/>
+          </a:xfrm>
+          <a:prstGeom prst="roundRect">
+            <a:avLst/>
+          </a:prstGeom>
+          <a:solidFill>
+            <a:srgbClr val="4A90D9"/>
+          </a:solidFill>
+          <a:ln>
+            <a:noFill/>
+          </a:ln>
+          <a:effectLst/>
+        </p:spPr>
+        <p:style>
+          <a:lnRef idx="1">
+            <a:schemeClr val="accent1"/>
+          </a:lnRef>
+          <a:fillRef idx="3">
+            <a:schemeClr val="accent1"/>
+          </a:fillRef>
+          <a:effectRef idx="2">
+            <a:schemeClr val="accent1"/>
+          </a:effectRef>
+          <a:fontRef idx="minor">
+            <a:schemeClr val="lt1"/>
+          </a:fontRef>
+        </p:style>
+        <p:txBody>
+          <a:bodyPr rtlCol="0" anchor="ctr"/>
+          <a:lstStyle/>
+          <a:p>
+            <a:pPr algn="ctr"/>
+          </a:p>
+        </p:txBody>
+      </p:sp>
+      <p:sp>
+        <p:nvSpPr>
+          <p:cNvPr id="10" name="TextBox 9"/>
+          <p:cNvSpPr txBox="1"/>
+          <p:nvPr/>
+        </p:nvSpPr>
+        <p:spPr>
+          <a:xfrm>
+            <a:off x="6537960" y="2011679"/>
+            <a:ext cx="4663440" cy="640080"/>
+          </a:xfrm>
+          <a:prstGeom prst="rect">
+            <a:avLst/>
+          </a:prstGeom>
+          <a:noFill/>
+        </p:spPr>
+        <p:txBody>
+          <a:bodyPr wrap="square" anchor="t">
+            <a:spAutoFit/>
+          </a:bodyPr>
+          <a:lstStyle/>
+          <a:p>
+            <a:pPr algn="l">
+              <a:lnSpc>
+                <a:spcPct val="100000"/>
+              </a:lnSpc>
               <a:spcAft>
-                <a:spcPts val="1200"/>
+                <a:spcPts val="800"/>
               </a:spcAft>
             </a:pPr>
             <a:r>
-              <a:rPr sz="1800">
+              <a:rPr sz="2000" b="1">
                 <a:solidFill>
                   <a:srgbClr val="FFFFFF"/>
                 </a:solidFill>
                 <a:latin typeface="微软雅黑"/>
               </a:rPr>
-              <a:t>安全：API Key 存 .env 不入库，沙箱不装未知依赖</a:t>
+              <a:t>沙箱执行</a:t>
+            </a:r>
+          </a:p>
+        </p:txBody>
+      </p:sp>
+      <p:sp>
+        <p:nvSpPr>
+          <p:cNvPr id="11" name="TextBox 10"/>
+          <p:cNvSpPr txBox="1"/>
+          <p:nvPr/>
+        </p:nvSpPr>
+        <p:spPr>
+          <a:xfrm>
+            <a:off x="6537960" y="2651760"/>
+            <a:ext cx="4663440" cy="1188720"/>
+          </a:xfrm>
+          <a:prstGeom prst="rect">
+            <a:avLst/>
+          </a:prstGeom>
+          <a:noFill/>
+        </p:spPr>
+        <p:txBody>
+          <a:bodyPr wrap="square" anchor="t">
+            <a:spAutoFit/>
+          </a:bodyPr>
+          <a:lstStyle/>
+          <a:p>
+            <a:pPr algn="l">
+              <a:lnSpc>
+                <a:spcPct val="100000"/>
+              </a:lnSpc>
+              <a:spcAft>
+                <a:spcPts val="600"/>
+              </a:spcAft>
+            </a:pPr>
+            <a:r>
+              <a:rPr sz="1500" b="0">
+                <a:solidFill>
+                  <a:srgbClr val="B4B9C8"/>
+                </a:solidFill>
+                <a:latin typeface="微软雅黑"/>
+              </a:rPr>
+              <a:t>subprocess 隔离</a:t>
+            </a:r>
+          </a:p>
+          <a:p>
+            <a:pPr algn="l">
+              <a:lnSpc>
+                <a:spcPct val="100000"/>
+              </a:lnSpc>
+              <a:spcAft>
+                <a:spcPts val="600"/>
+              </a:spcAft>
+            </a:pPr>
+            <a:r>
+              <a:rPr sz="1500" b="0">
+                <a:solidFill>
+                  <a:srgbClr val="B4B9C8"/>
+                </a:solidFill>
+                <a:latin typeface="微软雅黑"/>
+              </a:rPr>
+              <a:t>临时目录 + 超时保护</a:t>
+            </a:r>
+          </a:p>
+          <a:p>
+            <a:pPr algn="l">
+              <a:lnSpc>
+                <a:spcPct val="100000"/>
+              </a:lnSpc>
+              <a:spcAft>
+                <a:spcPts val="600"/>
+              </a:spcAft>
+            </a:pPr>
+            <a:r>
+              <a:rPr sz="1500" b="0">
+                <a:solidFill>
+                  <a:srgbClr val="B4B9C8"/>
+                </a:solidFill>
+                <a:latin typeface="微软雅黑"/>
+              </a:rPr>
+              <a:t>捕获输出 / 报错 / 退出码</a:t>
+            </a:r>
+          </a:p>
+        </p:txBody>
+      </p:sp>
+      <p:sp>
+        <p:nvSpPr>
+          <p:cNvPr id="12" name="Rounded Rectangle 11"/>
+          <p:cNvSpPr/>
+          <p:nvPr/>
+        </p:nvSpPr>
+        <p:spPr>
+          <a:xfrm>
+            <a:off x="731520" y="4206240"/>
+            <a:ext cx="5120640" cy="2286000"/>
+          </a:xfrm>
+          <a:prstGeom prst="roundRect">
+            <a:avLst/>
+          </a:prstGeom>
+          <a:solidFill>
+            <a:srgbClr val="262640"/>
+          </a:solidFill>
+          <a:ln w="19050">
+            <a:solidFill>
+              <a:srgbClr val="4A90D9"/>
+            </a:solidFill>
+          </a:ln>
+          <a:effectLst/>
+        </p:spPr>
+        <p:style>
+          <a:lnRef idx="1">
+            <a:schemeClr val="accent1"/>
+          </a:lnRef>
+          <a:fillRef idx="3">
+            <a:schemeClr val="accent1"/>
+          </a:fillRef>
+          <a:effectRef idx="2">
+            <a:schemeClr val="accent1"/>
+          </a:effectRef>
+          <a:fontRef idx="minor">
+            <a:schemeClr val="lt1"/>
+          </a:fontRef>
+        </p:style>
+        <p:txBody>
+          <a:bodyPr rtlCol="0" anchor="ctr"/>
+          <a:lstStyle/>
+          <a:p>
+            <a:pPr algn="ctr"/>
+          </a:p>
+        </p:txBody>
+      </p:sp>
+      <p:sp>
+        <p:nvSpPr>
+          <p:cNvPr id="13" name="Rounded Rectangle 12"/>
+          <p:cNvSpPr/>
+          <p:nvPr/>
+        </p:nvSpPr>
+        <p:spPr>
+          <a:xfrm>
+            <a:off x="731520" y="4206240"/>
+            <a:ext cx="5120640" cy="128016"/>
+          </a:xfrm>
+          <a:prstGeom prst="roundRect">
+            <a:avLst/>
+          </a:prstGeom>
+          <a:solidFill>
+            <a:srgbClr val="4A90D9"/>
+          </a:solidFill>
+          <a:ln>
+            <a:noFill/>
+          </a:ln>
+          <a:effectLst/>
+        </p:spPr>
+        <p:style>
+          <a:lnRef idx="1">
+            <a:schemeClr val="accent1"/>
+          </a:lnRef>
+          <a:fillRef idx="3">
+            <a:schemeClr val="accent1"/>
+          </a:fillRef>
+          <a:effectRef idx="2">
+            <a:schemeClr val="accent1"/>
+          </a:effectRef>
+          <a:fontRef idx="minor">
+            <a:schemeClr val="lt1"/>
+          </a:fontRef>
+        </p:style>
+        <p:txBody>
+          <a:bodyPr rtlCol="0" anchor="ctr"/>
+          <a:lstStyle/>
+          <a:p>
+            <a:pPr algn="ctr"/>
+          </a:p>
+        </p:txBody>
+      </p:sp>
+      <p:sp>
+        <p:nvSpPr>
+          <p:cNvPr id="14" name="TextBox 13"/>
+          <p:cNvSpPr txBox="1"/>
+          <p:nvPr/>
+        </p:nvSpPr>
+        <p:spPr>
+          <a:xfrm>
+            <a:off x="960120" y="4480559"/>
+            <a:ext cx="4663440" cy="640080"/>
+          </a:xfrm>
+          <a:prstGeom prst="rect">
+            <a:avLst/>
+          </a:prstGeom>
+          <a:noFill/>
+        </p:spPr>
+        <p:txBody>
+          <a:bodyPr wrap="square" anchor="t">
+            <a:spAutoFit/>
+          </a:bodyPr>
+          <a:lstStyle/>
+          <a:p>
+            <a:pPr algn="l">
+              <a:lnSpc>
+                <a:spcPct val="100000"/>
+              </a:lnSpc>
+              <a:spcAft>
+                <a:spcPts val="800"/>
+              </a:spcAft>
+            </a:pPr>
+            <a:r>
+              <a:rPr sz="2000" b="1">
+                <a:solidFill>
+                  <a:srgbClr val="FFFFFF"/>
+                </a:solidFill>
+                <a:latin typeface="微软雅黑"/>
+              </a:rPr>
+              <a:t>修复循环</a:t>
+            </a:r>
+          </a:p>
+        </p:txBody>
+      </p:sp>
+      <p:sp>
+        <p:nvSpPr>
+          <p:cNvPr id="15" name="TextBox 14"/>
+          <p:cNvSpPr txBox="1"/>
+          <p:nvPr/>
+        </p:nvSpPr>
+        <p:spPr>
+          <a:xfrm>
+            <a:off x="960120" y="5120640"/>
+            <a:ext cx="4663440" cy="1188720"/>
+          </a:xfrm>
+          <a:prstGeom prst="rect">
+            <a:avLst/>
+          </a:prstGeom>
+          <a:noFill/>
+        </p:spPr>
+        <p:txBody>
+          <a:bodyPr wrap="square" anchor="t">
+            <a:spAutoFit/>
+          </a:bodyPr>
+          <a:lstStyle/>
+          <a:p>
+            <a:pPr algn="l">
+              <a:lnSpc>
+                <a:spcPct val="100000"/>
+              </a:lnSpc>
+              <a:spcAft>
+                <a:spcPts val="600"/>
+              </a:spcAft>
+            </a:pPr>
+            <a:r>
+              <a:rPr sz="1500" b="0">
+                <a:solidFill>
+                  <a:srgbClr val="B4B9C8"/>
+                </a:solidFill>
+                <a:latin typeface="微软雅黑"/>
+              </a:rPr>
+              <a:t>失败 → 报错喂回 LLM</a:t>
+            </a:r>
+          </a:p>
+          <a:p>
+            <a:pPr algn="l">
+              <a:lnSpc>
+                <a:spcPct val="100000"/>
+              </a:lnSpc>
+              <a:spcAft>
+                <a:spcPts val="600"/>
+              </a:spcAft>
+            </a:pPr>
+            <a:r>
+              <a:rPr sz="1500" b="0">
+                <a:solidFill>
+                  <a:srgbClr val="B4B9C8"/>
+                </a:solidFill>
+                <a:latin typeface="微软雅黑"/>
+              </a:rPr>
+              <a:t>自动生成修复代码</a:t>
+            </a:r>
+          </a:p>
+          <a:p>
+            <a:pPr algn="l">
+              <a:lnSpc>
+                <a:spcPct val="100000"/>
+              </a:lnSpc>
+              <a:spcAft>
+                <a:spcPts val="600"/>
+              </a:spcAft>
+            </a:pPr>
+            <a:r>
+              <a:rPr sz="1500" b="0">
+                <a:solidFill>
+                  <a:srgbClr val="B4B9C8"/>
+                </a:solidFill>
+                <a:latin typeface="微软雅黑"/>
+              </a:rPr>
+              <a:t>至多 N 轮（默认 3）</a:t>
+            </a:r>
+          </a:p>
+        </p:txBody>
+      </p:sp>
+      <p:sp>
+        <p:nvSpPr>
+          <p:cNvPr id="16" name="Rounded Rectangle 15"/>
+          <p:cNvSpPr/>
+          <p:nvPr/>
+        </p:nvSpPr>
+        <p:spPr>
+          <a:xfrm>
+            <a:off x="6309360" y="4206240"/>
+            <a:ext cx="5120640" cy="2286000"/>
+          </a:xfrm>
+          <a:prstGeom prst="roundRect">
+            <a:avLst/>
+          </a:prstGeom>
+          <a:solidFill>
+            <a:srgbClr val="262640"/>
+          </a:solidFill>
+          <a:ln w="19050">
+            <a:solidFill>
+              <a:srgbClr val="4A90D9"/>
+            </a:solidFill>
+          </a:ln>
+          <a:effectLst/>
+        </p:spPr>
+        <p:style>
+          <a:lnRef idx="1">
+            <a:schemeClr val="accent1"/>
+          </a:lnRef>
+          <a:fillRef idx="3">
+            <a:schemeClr val="accent1"/>
+          </a:fillRef>
+          <a:effectRef idx="2">
+            <a:schemeClr val="accent1"/>
+          </a:effectRef>
+          <a:fontRef idx="minor">
+            <a:schemeClr val="lt1"/>
+          </a:fontRef>
+        </p:style>
+        <p:txBody>
+          <a:bodyPr rtlCol="0" anchor="ctr"/>
+          <a:lstStyle/>
+          <a:p>
+            <a:pPr algn="ctr"/>
+          </a:p>
+        </p:txBody>
+      </p:sp>
+      <p:sp>
+        <p:nvSpPr>
+          <p:cNvPr id="17" name="Rounded Rectangle 16"/>
+          <p:cNvSpPr/>
+          <p:nvPr/>
+        </p:nvSpPr>
+        <p:spPr>
+          <a:xfrm>
+            <a:off x="6309360" y="4206240"/>
+            <a:ext cx="5120640" cy="128016"/>
+          </a:xfrm>
+          <a:prstGeom prst="roundRect">
+            <a:avLst/>
+          </a:prstGeom>
+          <a:solidFill>
+            <a:srgbClr val="4A90D9"/>
+          </a:solidFill>
+          <a:ln>
+            <a:noFill/>
+          </a:ln>
+          <a:effectLst/>
+        </p:spPr>
+        <p:style>
+          <a:lnRef idx="1">
+            <a:schemeClr val="accent1"/>
+          </a:lnRef>
+          <a:fillRef idx="3">
+            <a:schemeClr val="accent1"/>
+          </a:fillRef>
+          <a:effectRef idx="2">
+            <a:schemeClr val="accent1"/>
+          </a:effectRef>
+          <a:fontRef idx="minor">
+            <a:schemeClr val="lt1"/>
+          </a:fontRef>
+        </p:style>
+        <p:txBody>
+          <a:bodyPr rtlCol="0" anchor="ctr"/>
+          <a:lstStyle/>
+          <a:p>
+            <a:pPr algn="ctr"/>
+          </a:p>
+        </p:txBody>
+      </p:sp>
+      <p:sp>
+        <p:nvSpPr>
+          <p:cNvPr id="18" name="TextBox 17"/>
+          <p:cNvSpPr txBox="1"/>
+          <p:nvPr/>
+        </p:nvSpPr>
+        <p:spPr>
+          <a:xfrm>
+            <a:off x="6537960" y="4480559"/>
+            <a:ext cx="4663440" cy="640080"/>
+          </a:xfrm>
+          <a:prstGeom prst="rect">
+            <a:avLst/>
+          </a:prstGeom>
+          <a:noFill/>
+        </p:spPr>
+        <p:txBody>
+          <a:bodyPr wrap="square" anchor="t">
+            <a:spAutoFit/>
+          </a:bodyPr>
+          <a:lstStyle/>
+          <a:p>
+            <a:pPr algn="l">
+              <a:lnSpc>
+                <a:spcPct val="100000"/>
+              </a:lnSpc>
+              <a:spcAft>
+                <a:spcPts val="800"/>
+              </a:spcAft>
+            </a:pPr>
+            <a:r>
+              <a:rPr sz="2000" b="1">
+                <a:solidFill>
+                  <a:srgbClr val="FFFFFF"/>
+                </a:solidFill>
+                <a:latin typeface="微软雅黑"/>
+              </a:rPr>
+              <a:t>安全设计</a:t>
+            </a:r>
+          </a:p>
+        </p:txBody>
+      </p:sp>
+      <p:sp>
+        <p:nvSpPr>
+          <p:cNvPr id="19" name="TextBox 18"/>
+          <p:cNvSpPr txBox="1"/>
+          <p:nvPr/>
+        </p:nvSpPr>
+        <p:spPr>
+          <a:xfrm>
+            <a:off x="6537960" y="5120640"/>
+            <a:ext cx="4663440" cy="1188720"/>
+          </a:xfrm>
+          <a:prstGeom prst="rect">
+            <a:avLst/>
+          </a:prstGeom>
+          <a:noFill/>
+        </p:spPr>
+        <p:txBody>
+          <a:bodyPr wrap="square" anchor="t">
+            <a:spAutoFit/>
+          </a:bodyPr>
+          <a:lstStyle/>
+          <a:p>
+            <a:pPr algn="l">
+              <a:lnSpc>
+                <a:spcPct val="100000"/>
+              </a:lnSpc>
+              <a:spcAft>
+                <a:spcPts val="600"/>
+              </a:spcAft>
+            </a:pPr>
+            <a:r>
+              <a:rPr sz="1500" b="0">
+                <a:solidFill>
+                  <a:srgbClr val="B4B9C8"/>
+                </a:solidFill>
+                <a:latin typeface="微软雅黑"/>
+              </a:rPr>
+              <a:t>API Key 存 .env 不入库</a:t>
+            </a:r>
+          </a:p>
+          <a:p>
+            <a:pPr algn="l">
+              <a:lnSpc>
+                <a:spcPct val="100000"/>
+              </a:lnSpc>
+              <a:spcAft>
+                <a:spcPts val="600"/>
+              </a:spcAft>
+            </a:pPr>
+            <a:r>
+              <a:rPr sz="1500" b="0">
+                <a:solidFill>
+                  <a:srgbClr val="B4B9C8"/>
+                </a:solidFill>
+                <a:latin typeface="微软雅黑"/>
+              </a:rPr>
+              <a:t>沙箱不装未知依赖</a:t>
+            </a:r>
+          </a:p>
+          <a:p>
+            <a:pPr algn="l">
+              <a:lnSpc>
+                <a:spcPct val="100000"/>
+              </a:lnSpc>
+              <a:spcAft>
+                <a:spcPts val="600"/>
+              </a:spcAft>
+            </a:pPr>
+            <a:r>
+              <a:rPr sz="1500" b="0">
+                <a:solidFill>
+                  <a:srgbClr val="B4B9C8"/>
+                </a:solidFill>
+                <a:latin typeface="微软雅黑"/>
+              </a:rPr>
+              <a:t>事件流全流程可观测</a:t>
+            </a:r>
+          </a:p>
+        </p:txBody>
+      </p:sp>
+      <p:sp>
+        <p:nvSpPr>
+          <p:cNvPr id="20" name="Rectangle 19"/>
+          <p:cNvSpPr/>
+          <p:nvPr/>
+        </p:nvSpPr>
+        <p:spPr>
+          <a:xfrm>
+            <a:off x="0" y="6601968"/>
+            <a:ext cx="12191695" cy="27432"/>
+          </a:xfrm>
+          <a:prstGeom prst="rect">
+            <a:avLst/>
+          </a:prstGeom>
+          <a:solidFill>
+            <a:srgbClr val="4A90D9"/>
+          </a:solidFill>
+          <a:ln>
+            <a:noFill/>
+          </a:ln>
+          <a:effectLst/>
+        </p:spPr>
+        <p:style>
+          <a:lnRef idx="1">
+            <a:schemeClr val="accent1"/>
+          </a:lnRef>
+          <a:fillRef idx="3">
+            <a:schemeClr val="accent1"/>
+          </a:fillRef>
+          <a:effectRef idx="2">
+            <a:schemeClr val="accent1"/>
+          </a:effectRef>
+          <a:fontRef idx="minor">
+            <a:schemeClr val="lt1"/>
+          </a:fontRef>
+        </p:style>
+        <p:txBody>
+          <a:bodyPr rtlCol="0" anchor="ctr"/>
+          <a:lstStyle/>
+          <a:p>
+            <a:pPr algn="ctr"/>
+          </a:p>
+        </p:txBody>
+      </p:sp>
+      <p:sp>
+        <p:nvSpPr>
+          <p:cNvPr id="21" name="TextBox 20"/>
+          <p:cNvSpPr txBox="1"/>
+          <p:nvPr/>
+        </p:nvSpPr>
+        <p:spPr>
+          <a:xfrm>
+            <a:off x="11094415" y="6629400"/>
+            <a:ext cx="914400" cy="228600"/>
+          </a:xfrm>
+          <a:prstGeom prst="rect">
+            <a:avLst/>
+          </a:prstGeom>
+          <a:noFill/>
+        </p:spPr>
+        <p:txBody>
+          <a:bodyPr wrap="square" anchor="t">
+            <a:spAutoFit/>
+          </a:bodyPr>
+          <a:lstStyle/>
+          <a:p>
+            <a:pPr algn="r">
+              <a:lnSpc>
+                <a:spcPct val="100000"/>
+              </a:lnSpc>
+              <a:spcAft>
+                <a:spcPts val="800"/>
+              </a:spcAft>
+            </a:pPr>
+            <a:r>
+              <a:rPr sz="1200" b="0">
+                <a:solidFill>
+                  <a:srgbClr val="B4B9C8"/>
+                </a:solidFill>
+                <a:latin typeface="微软雅黑"/>
+              </a:rPr>
+              <a:t>4</a:t>
             </a:r>
           </a:p>
         </p:txBody>
@@ -4553,13 +7183,21 @@
           <a:noFill/>
         </p:spPr>
         <p:txBody>
-          <a:bodyPr wrap="square">
+          <a:bodyPr wrap="square" anchor="t">
             <a:spAutoFit/>
           </a:bodyPr>
           <a:lstStyle/>
           <a:p>
-            <a:r>
-              <a:rPr sz="3600" b="1">
+            <a:pPr algn="l">
+              <a:lnSpc>
+                <a:spcPct val="100000"/>
+              </a:lnSpc>
+              <a:spcAft>
+                <a:spcPts val="800"/>
+              </a:spcAft>
+            </a:pPr>
+            <a:r>
+              <a:rPr sz="3400" b="1">
                 <a:solidFill>
                   <a:srgbClr val="4A90D9"/>
                 </a:solidFill>
@@ -4572,14 +7210,148 @@
       </p:sp>
       <p:sp>
         <p:nvSpPr>
-          <p:cNvPr id="3" name="TextBox 2"/>
+          <p:cNvPr id="3" name="Rectangle 2"/>
+          <p:cNvSpPr/>
+          <p:nvPr/>
+        </p:nvSpPr>
+        <p:spPr>
+          <a:xfrm>
+            <a:off x="777240" y="1280160"/>
+            <a:ext cx="2011680" cy="45720"/>
+          </a:xfrm>
+          <a:prstGeom prst="rect">
+            <a:avLst/>
+          </a:prstGeom>
+          <a:solidFill>
+            <a:srgbClr val="2EC4B6"/>
+          </a:solidFill>
+          <a:ln>
+            <a:noFill/>
+          </a:ln>
+          <a:effectLst/>
+        </p:spPr>
+        <p:style>
+          <a:lnRef idx="1">
+            <a:schemeClr val="accent1"/>
+          </a:lnRef>
+          <a:fillRef idx="3">
+            <a:schemeClr val="accent1"/>
+          </a:fillRef>
+          <a:effectRef idx="2">
+            <a:schemeClr val="accent1"/>
+          </a:effectRef>
+          <a:fontRef idx="minor">
+            <a:schemeClr val="lt1"/>
+          </a:fontRef>
+        </p:style>
+        <p:txBody>
+          <a:bodyPr rtlCol="0" anchor="ctr"/>
+          <a:lstStyle/>
+          <a:p>
+            <a:pPr algn="ctr"/>
+          </a:p>
+        </p:txBody>
+      </p:sp>
+      <p:sp>
+        <p:nvSpPr>
+          <p:cNvPr id="4" name="Rounded Rectangle 3"/>
+          <p:cNvSpPr/>
+          <p:nvPr/>
+        </p:nvSpPr>
+        <p:spPr>
+          <a:xfrm>
+            <a:off x="731520" y="1737360"/>
+            <a:ext cx="3383280" cy="3108960"/>
+          </a:xfrm>
+          <a:prstGeom prst="roundRect">
+            <a:avLst/>
+          </a:prstGeom>
+          <a:solidFill>
+            <a:srgbClr val="262640"/>
+          </a:solidFill>
+          <a:ln w="19050">
+            <a:solidFill>
+              <a:srgbClr val="4A90D9"/>
+            </a:solidFill>
+          </a:ln>
+          <a:effectLst/>
+        </p:spPr>
+        <p:style>
+          <a:lnRef idx="1">
+            <a:schemeClr val="accent1"/>
+          </a:lnRef>
+          <a:fillRef idx="3">
+            <a:schemeClr val="accent1"/>
+          </a:fillRef>
+          <a:effectRef idx="2">
+            <a:schemeClr val="accent1"/>
+          </a:effectRef>
+          <a:fontRef idx="minor">
+            <a:schemeClr val="lt1"/>
+          </a:fontRef>
+        </p:style>
+        <p:txBody>
+          <a:bodyPr rtlCol="0" anchor="ctr"/>
+          <a:lstStyle/>
+          <a:p>
+            <a:pPr algn="ctr"/>
+          </a:p>
+        </p:txBody>
+      </p:sp>
+      <p:sp>
+        <p:nvSpPr>
+          <p:cNvPr id="5" name="Rounded Rectangle 4"/>
+          <p:cNvSpPr/>
+          <p:nvPr/>
+        </p:nvSpPr>
+        <p:spPr>
+          <a:xfrm>
+            <a:off x="731520" y="1737360"/>
+            <a:ext cx="3383280" cy="128016"/>
+          </a:xfrm>
+          <a:prstGeom prst="roundRect">
+            <a:avLst/>
+          </a:prstGeom>
+          <a:solidFill>
+            <a:srgbClr val="4A90D9"/>
+          </a:solidFill>
+          <a:ln>
+            <a:noFill/>
+          </a:ln>
+          <a:effectLst/>
+        </p:spPr>
+        <p:style>
+          <a:lnRef idx="1">
+            <a:schemeClr val="accent1"/>
+          </a:lnRef>
+          <a:fillRef idx="3">
+            <a:schemeClr val="accent1"/>
+          </a:fillRef>
+          <a:effectRef idx="2">
+            <a:schemeClr val="accent1"/>
+          </a:effectRef>
+          <a:fontRef idx="minor">
+            <a:schemeClr val="lt1"/>
+          </a:fontRef>
+        </p:style>
+        <p:txBody>
+          <a:bodyPr rtlCol="0" anchor="ctr"/>
+          <a:lstStyle/>
+          <a:p>
+            <a:pPr algn="ctr"/>
+          </a:p>
+        </p:txBody>
+      </p:sp>
+      <p:sp>
+        <p:nvSpPr>
+          <p:cNvPr id="6" name="TextBox 5"/>
           <p:cNvSpPr txBox="1"/>
           <p:nvPr/>
         </p:nvSpPr>
         <p:spPr>
           <a:xfrm>
-            <a:off x="731520" y="1554480"/>
-            <a:ext cx="10698480" cy="4846320"/>
+            <a:off x="960120" y="2011679"/>
+            <a:ext cx="2926080" cy="640080"/>
           </a:xfrm>
           <a:prstGeom prst="rect">
             <a:avLst/>
@@ -4587,72 +7359,705 @@
           <a:noFill/>
         </p:spPr>
         <p:txBody>
-          <a:bodyPr wrap="square">
+          <a:bodyPr wrap="square" anchor="t">
             <a:spAutoFit/>
           </a:bodyPr>
           <a:lstStyle/>
           <a:p>
-            <a:pPr>
+            <a:pPr algn="l">
+              <a:lnSpc>
+                <a:spcPct val="100000"/>
+              </a:lnSpc>
               <a:spcAft>
-                <a:spcPts val="1200"/>
+                <a:spcPts val="800"/>
               </a:spcAft>
             </a:pPr>
             <a:r>
-              <a:rPr sz="1800">
+              <a:rPr sz="2000" b="1">
                 <a:solidFill>
                   <a:srgbClr val="FFFFFF"/>
                 </a:solidFill>
                 <a:latin typeface="微软雅黑"/>
               </a:rPr>
-              <a:t>命令行：python -m app.cli "写一个计算斐波那契数列的程序"</a:t>
-            </a:r>
-          </a:p>
-          <a:p>
-            <a:pPr>
+              <a:t>⌨ 命令行</a:t>
+            </a:r>
+          </a:p>
+        </p:txBody>
+      </p:sp>
+      <p:sp>
+        <p:nvSpPr>
+          <p:cNvPr id="7" name="TextBox 6"/>
+          <p:cNvSpPr txBox="1"/>
+          <p:nvPr/>
+        </p:nvSpPr>
+        <p:spPr>
+          <a:xfrm>
+            <a:off x="960120" y="2651760"/>
+            <a:ext cx="2926080" cy="2011680"/>
+          </a:xfrm>
+          <a:prstGeom prst="rect">
+            <a:avLst/>
+          </a:prstGeom>
+          <a:noFill/>
+        </p:spPr>
+        <p:txBody>
+          <a:bodyPr wrap="square" anchor="t">
+            <a:spAutoFit/>
+          </a:bodyPr>
+          <a:lstStyle/>
+          <a:p>
+            <a:pPr algn="l">
+              <a:lnSpc>
+                <a:spcPct val="100000"/>
+              </a:lnSpc>
               <a:spcAft>
-                <a:spcPts val="1200"/>
+                <a:spcPts val="600"/>
               </a:spcAft>
             </a:pPr>
             <a:r>
-              <a:rPr sz="1800">
-                <a:solidFill>
-                  <a:srgbClr val="FFFFFF"/>
+              <a:rPr sz="1500" b="0">
+                <a:solidFill>
+                  <a:srgbClr val="B4B9C8"/>
                 </a:solidFill>
                 <a:latin typeface="微软雅黑"/>
               </a:rPr>
-              <a:t>Web 界面：Streamlit 实时观看 Agent 工作过程</a:t>
-            </a:r>
-          </a:p>
-          <a:p>
-            <a:pPr>
+              <a:t>python -m app.cli</a:t>
+            </a:r>
+          </a:p>
+          <a:p>
+            <a:pPr algn="l">
+              <a:lnSpc>
+                <a:spcPct val="100000"/>
+              </a:lnSpc>
               <a:spcAft>
-                <a:spcPts val="1200"/>
+                <a:spcPts val="600"/>
               </a:spcAft>
             </a:pPr>
             <a:r>
-              <a:rPr sz="1800">
-                <a:solidFill>
-                  <a:srgbClr val="FFFFFF"/>
+              <a:rPr sz="1500" b="0">
+                <a:solidFill>
+                  <a:srgbClr val="B4B9C8"/>
                 </a:solidFill>
                 <a:latin typeface="微软雅黑"/>
               </a:rPr>
-              <a:t>API：POST /api/run（同步）+ GET /api/run/stream（SSE 流式）</a:t>
-            </a:r>
-          </a:p>
-          <a:p>
-            <a:pPr>
+              <a:t>"写一个斐波那契程序"</a:t>
+            </a:r>
+          </a:p>
+          <a:p>
+            <a:pPr algn="l">
+              <a:lnSpc>
+                <a:spcPct val="100000"/>
+              </a:lnSpc>
               <a:spcAft>
-                <a:spcPts val="1200"/>
+                <a:spcPts val="600"/>
               </a:spcAft>
             </a:pPr>
             <a:r>
-              <a:rPr sz="1800">
-                <a:solidFill>
-                  <a:srgbClr val="FFFFFF"/>
+              <a:rPr sz="1500" b="0">
+                <a:solidFill>
+                  <a:srgbClr val="B4B9C8"/>
                 </a:solidFill>
                 <a:latin typeface="微软雅黑"/>
               </a:rPr>
-              <a:t>真实效果：生成→运行→修Bug→README，端到端 7.5 秒完成</a:t>
+              <a:t>实时打印 Agent 过程</a:t>
+            </a:r>
+          </a:p>
+        </p:txBody>
+      </p:sp>
+      <p:sp>
+        <p:nvSpPr>
+          <p:cNvPr id="8" name="Rounded Rectangle 7"/>
+          <p:cNvSpPr/>
+          <p:nvPr/>
+        </p:nvSpPr>
+        <p:spPr>
+          <a:xfrm>
+            <a:off x="4389120" y="1737360"/>
+            <a:ext cx="3383280" cy="3108960"/>
+          </a:xfrm>
+          <a:prstGeom prst="roundRect">
+            <a:avLst/>
+          </a:prstGeom>
+          <a:solidFill>
+            <a:srgbClr val="262640"/>
+          </a:solidFill>
+          <a:ln w="19050">
+            <a:solidFill>
+              <a:srgbClr val="4A90D9"/>
+            </a:solidFill>
+          </a:ln>
+          <a:effectLst/>
+        </p:spPr>
+        <p:style>
+          <a:lnRef idx="1">
+            <a:schemeClr val="accent1"/>
+          </a:lnRef>
+          <a:fillRef idx="3">
+            <a:schemeClr val="accent1"/>
+          </a:fillRef>
+          <a:effectRef idx="2">
+            <a:schemeClr val="accent1"/>
+          </a:effectRef>
+          <a:fontRef idx="minor">
+            <a:schemeClr val="lt1"/>
+          </a:fontRef>
+        </p:style>
+        <p:txBody>
+          <a:bodyPr rtlCol="0" anchor="ctr"/>
+          <a:lstStyle/>
+          <a:p>
+            <a:pPr algn="ctr"/>
+          </a:p>
+        </p:txBody>
+      </p:sp>
+      <p:sp>
+        <p:nvSpPr>
+          <p:cNvPr id="9" name="Rounded Rectangle 8"/>
+          <p:cNvSpPr/>
+          <p:nvPr/>
+        </p:nvSpPr>
+        <p:spPr>
+          <a:xfrm>
+            <a:off x="4389120" y="1737360"/>
+            <a:ext cx="3383280" cy="128016"/>
+          </a:xfrm>
+          <a:prstGeom prst="roundRect">
+            <a:avLst/>
+          </a:prstGeom>
+          <a:solidFill>
+            <a:srgbClr val="4A90D9"/>
+          </a:solidFill>
+          <a:ln>
+            <a:noFill/>
+          </a:ln>
+          <a:effectLst/>
+        </p:spPr>
+        <p:style>
+          <a:lnRef idx="1">
+            <a:schemeClr val="accent1"/>
+          </a:lnRef>
+          <a:fillRef idx="3">
+            <a:schemeClr val="accent1"/>
+          </a:fillRef>
+          <a:effectRef idx="2">
+            <a:schemeClr val="accent1"/>
+          </a:effectRef>
+          <a:fontRef idx="minor">
+            <a:schemeClr val="lt1"/>
+          </a:fontRef>
+        </p:style>
+        <p:txBody>
+          <a:bodyPr rtlCol="0" anchor="ctr"/>
+          <a:lstStyle/>
+          <a:p>
+            <a:pPr algn="ctr"/>
+          </a:p>
+        </p:txBody>
+      </p:sp>
+      <p:sp>
+        <p:nvSpPr>
+          <p:cNvPr id="10" name="TextBox 9"/>
+          <p:cNvSpPr txBox="1"/>
+          <p:nvPr/>
+        </p:nvSpPr>
+        <p:spPr>
+          <a:xfrm>
+            <a:off x="4617720" y="2011679"/>
+            <a:ext cx="2926080" cy="640080"/>
+          </a:xfrm>
+          <a:prstGeom prst="rect">
+            <a:avLst/>
+          </a:prstGeom>
+          <a:noFill/>
+        </p:spPr>
+        <p:txBody>
+          <a:bodyPr wrap="square" anchor="t">
+            <a:spAutoFit/>
+          </a:bodyPr>
+          <a:lstStyle/>
+          <a:p>
+            <a:pPr algn="l">
+              <a:lnSpc>
+                <a:spcPct val="100000"/>
+              </a:lnSpc>
+              <a:spcAft>
+                <a:spcPts val="800"/>
+              </a:spcAft>
+            </a:pPr>
+            <a:r>
+              <a:rPr sz="2000" b="1">
+                <a:solidFill>
+                  <a:srgbClr val="FFFFFF"/>
+                </a:solidFill>
+                <a:latin typeface="微软雅黑"/>
+              </a:rPr>
+              <a:t>🌐 Web 界面</a:t>
+            </a:r>
+          </a:p>
+        </p:txBody>
+      </p:sp>
+      <p:sp>
+        <p:nvSpPr>
+          <p:cNvPr id="11" name="TextBox 10"/>
+          <p:cNvSpPr txBox="1"/>
+          <p:nvPr/>
+        </p:nvSpPr>
+        <p:spPr>
+          <a:xfrm>
+            <a:off x="4617720" y="2651760"/>
+            <a:ext cx="2926080" cy="2011680"/>
+          </a:xfrm>
+          <a:prstGeom prst="rect">
+            <a:avLst/>
+          </a:prstGeom>
+          <a:noFill/>
+        </p:spPr>
+        <p:txBody>
+          <a:bodyPr wrap="square" anchor="t">
+            <a:spAutoFit/>
+          </a:bodyPr>
+          <a:lstStyle/>
+          <a:p>
+            <a:pPr algn="l">
+              <a:lnSpc>
+                <a:spcPct val="100000"/>
+              </a:lnSpc>
+              <a:spcAft>
+                <a:spcPts val="600"/>
+              </a:spcAft>
+            </a:pPr>
+            <a:r>
+              <a:rPr sz="1500" b="0">
+                <a:solidFill>
+                  <a:srgbClr val="B4B9C8"/>
+                </a:solidFill>
+                <a:latin typeface="微软雅黑"/>
+              </a:rPr>
+              <a:t>Streamlit 可视化</a:t>
+            </a:r>
+          </a:p>
+          <a:p>
+            <a:pPr algn="l">
+              <a:lnSpc>
+                <a:spcPct val="100000"/>
+              </a:lnSpc>
+              <a:spcAft>
+                <a:spcPts val="600"/>
+              </a:spcAft>
+            </a:pPr>
+            <a:r>
+              <a:rPr sz="1500" b="0">
+                <a:solidFill>
+                  <a:srgbClr val="B4B9C8"/>
+                </a:solidFill>
+                <a:latin typeface="微软雅黑"/>
+              </a:rPr>
+              <a:t>实时观看工作过程</a:t>
+            </a:r>
+          </a:p>
+          <a:p>
+            <a:pPr algn="l">
+              <a:lnSpc>
+                <a:spcPct val="100000"/>
+              </a:lnSpc>
+              <a:spcAft>
+                <a:spcPts val="600"/>
+              </a:spcAft>
+            </a:pPr>
+            <a:r>
+              <a:rPr sz="1500" b="0">
+                <a:solidFill>
+                  <a:srgbClr val="B4B9C8"/>
+                </a:solidFill>
+                <a:latin typeface="微软雅黑"/>
+              </a:rPr>
+              <a:t>事件流逐条渲染</a:t>
+            </a:r>
+          </a:p>
+        </p:txBody>
+      </p:sp>
+      <p:sp>
+        <p:nvSpPr>
+          <p:cNvPr id="12" name="Rounded Rectangle 11"/>
+          <p:cNvSpPr/>
+          <p:nvPr/>
+        </p:nvSpPr>
+        <p:spPr>
+          <a:xfrm>
+            <a:off x="8046720" y="1737360"/>
+            <a:ext cx="3383280" cy="3108960"/>
+          </a:xfrm>
+          <a:prstGeom prst="roundRect">
+            <a:avLst/>
+          </a:prstGeom>
+          <a:solidFill>
+            <a:srgbClr val="262640"/>
+          </a:solidFill>
+          <a:ln w="19050">
+            <a:solidFill>
+              <a:srgbClr val="4A90D9"/>
+            </a:solidFill>
+          </a:ln>
+          <a:effectLst/>
+        </p:spPr>
+        <p:style>
+          <a:lnRef idx="1">
+            <a:schemeClr val="accent1"/>
+          </a:lnRef>
+          <a:fillRef idx="3">
+            <a:schemeClr val="accent1"/>
+          </a:fillRef>
+          <a:effectRef idx="2">
+            <a:schemeClr val="accent1"/>
+          </a:effectRef>
+          <a:fontRef idx="minor">
+            <a:schemeClr val="lt1"/>
+          </a:fontRef>
+        </p:style>
+        <p:txBody>
+          <a:bodyPr rtlCol="0" anchor="ctr"/>
+          <a:lstStyle/>
+          <a:p>
+            <a:pPr algn="ctr"/>
+          </a:p>
+        </p:txBody>
+      </p:sp>
+      <p:sp>
+        <p:nvSpPr>
+          <p:cNvPr id="13" name="Rounded Rectangle 12"/>
+          <p:cNvSpPr/>
+          <p:nvPr/>
+        </p:nvSpPr>
+        <p:spPr>
+          <a:xfrm>
+            <a:off x="8046720" y="1737360"/>
+            <a:ext cx="3383280" cy="128016"/>
+          </a:xfrm>
+          <a:prstGeom prst="roundRect">
+            <a:avLst/>
+          </a:prstGeom>
+          <a:solidFill>
+            <a:srgbClr val="4A90D9"/>
+          </a:solidFill>
+          <a:ln>
+            <a:noFill/>
+          </a:ln>
+          <a:effectLst/>
+        </p:spPr>
+        <p:style>
+          <a:lnRef idx="1">
+            <a:schemeClr val="accent1"/>
+          </a:lnRef>
+          <a:fillRef idx="3">
+            <a:schemeClr val="accent1"/>
+          </a:fillRef>
+          <a:effectRef idx="2">
+            <a:schemeClr val="accent1"/>
+          </a:effectRef>
+          <a:fontRef idx="minor">
+            <a:schemeClr val="lt1"/>
+          </a:fontRef>
+        </p:style>
+        <p:txBody>
+          <a:bodyPr rtlCol="0" anchor="ctr"/>
+          <a:lstStyle/>
+          <a:p>
+            <a:pPr algn="ctr"/>
+          </a:p>
+        </p:txBody>
+      </p:sp>
+      <p:sp>
+        <p:nvSpPr>
+          <p:cNvPr id="14" name="TextBox 13"/>
+          <p:cNvSpPr txBox="1"/>
+          <p:nvPr/>
+        </p:nvSpPr>
+        <p:spPr>
+          <a:xfrm>
+            <a:off x="8275320" y="2011679"/>
+            <a:ext cx="2926080" cy="640080"/>
+          </a:xfrm>
+          <a:prstGeom prst="rect">
+            <a:avLst/>
+          </a:prstGeom>
+          <a:noFill/>
+        </p:spPr>
+        <p:txBody>
+          <a:bodyPr wrap="square" anchor="t">
+            <a:spAutoFit/>
+          </a:bodyPr>
+          <a:lstStyle/>
+          <a:p>
+            <a:pPr algn="l">
+              <a:lnSpc>
+                <a:spcPct val="100000"/>
+              </a:lnSpc>
+              <a:spcAft>
+                <a:spcPts val="800"/>
+              </a:spcAft>
+            </a:pPr>
+            <a:r>
+              <a:rPr sz="2000" b="1">
+                <a:solidFill>
+                  <a:srgbClr val="FFFFFF"/>
+                </a:solidFill>
+                <a:latin typeface="微软雅黑"/>
+              </a:rPr>
+              <a:t>⚡ API / SSE</a:t>
+            </a:r>
+          </a:p>
+        </p:txBody>
+      </p:sp>
+      <p:sp>
+        <p:nvSpPr>
+          <p:cNvPr id="15" name="TextBox 14"/>
+          <p:cNvSpPr txBox="1"/>
+          <p:nvPr/>
+        </p:nvSpPr>
+        <p:spPr>
+          <a:xfrm>
+            <a:off x="8275320" y="2651760"/>
+            <a:ext cx="2926080" cy="2011680"/>
+          </a:xfrm>
+          <a:prstGeom prst="rect">
+            <a:avLst/>
+          </a:prstGeom>
+          <a:noFill/>
+        </p:spPr>
+        <p:txBody>
+          <a:bodyPr wrap="square" anchor="t">
+            <a:spAutoFit/>
+          </a:bodyPr>
+          <a:lstStyle/>
+          <a:p>
+            <a:pPr algn="l">
+              <a:lnSpc>
+                <a:spcPct val="100000"/>
+              </a:lnSpc>
+              <a:spcAft>
+                <a:spcPts val="600"/>
+              </a:spcAft>
+            </a:pPr>
+            <a:r>
+              <a:rPr sz="1500" b="0">
+                <a:solidFill>
+                  <a:srgbClr val="B4B9C8"/>
+                </a:solidFill>
+                <a:latin typeface="微软雅黑"/>
+              </a:rPr>
+              <a:t>POST /api/run</a:t>
+            </a:r>
+          </a:p>
+          <a:p>
+            <a:pPr algn="l">
+              <a:lnSpc>
+                <a:spcPct val="100000"/>
+              </a:lnSpc>
+              <a:spcAft>
+                <a:spcPts val="600"/>
+              </a:spcAft>
+            </a:pPr>
+            <a:r>
+              <a:rPr sz="1500" b="0">
+                <a:solidFill>
+                  <a:srgbClr val="B4B9C8"/>
+                </a:solidFill>
+                <a:latin typeface="微软雅黑"/>
+              </a:rPr>
+              <a:t>GET /api/run/stream</a:t>
+            </a:r>
+          </a:p>
+          <a:p>
+            <a:pPr algn="l">
+              <a:lnSpc>
+                <a:spcPct val="100000"/>
+              </a:lnSpc>
+              <a:spcAft>
+                <a:spcPts val="600"/>
+              </a:spcAft>
+            </a:pPr>
+            <a:r>
+              <a:rPr sz="1500" b="0">
+                <a:solidFill>
+                  <a:srgbClr val="B4B9C8"/>
+                </a:solidFill>
+                <a:latin typeface="微软雅黑"/>
+              </a:rPr>
+              <a:t>流式推送事件</a:t>
+            </a:r>
+          </a:p>
+        </p:txBody>
+      </p:sp>
+      <p:sp>
+        <p:nvSpPr>
+          <p:cNvPr id="16" name="Rounded Rectangle 15"/>
+          <p:cNvSpPr/>
+          <p:nvPr/>
+        </p:nvSpPr>
+        <p:spPr>
+          <a:xfrm>
+            <a:off x="731520" y="5212080"/>
+            <a:ext cx="10698480" cy="1005840"/>
+          </a:xfrm>
+          <a:prstGeom prst="roundRect">
+            <a:avLst>
+              <a:gd name="adj" fmla="val 20000"/>
+            </a:avLst>
+          </a:prstGeom>
+          <a:solidFill>
+            <a:srgbClr val="4A90D9"/>
+          </a:solidFill>
+          <a:ln>
+            <a:noFill/>
+          </a:ln>
+          <a:effectLst/>
+        </p:spPr>
+        <p:style>
+          <a:lnRef idx="1">
+            <a:schemeClr val="accent1"/>
+          </a:lnRef>
+          <a:fillRef idx="3">
+            <a:schemeClr val="accent1"/>
+          </a:fillRef>
+          <a:effectRef idx="2">
+            <a:schemeClr val="accent1"/>
+          </a:effectRef>
+          <a:fontRef idx="minor">
+            <a:schemeClr val="lt1"/>
+          </a:fontRef>
+        </p:style>
+        <p:txBody>
+          <a:bodyPr rtlCol="0" anchor="ctr"/>
+          <a:lstStyle/>
+          <a:p>
+            <a:pPr algn="ctr"/>
+          </a:p>
+        </p:txBody>
+      </p:sp>
+      <p:sp>
+        <p:nvSpPr>
+          <p:cNvPr id="17" name="TextBox 16"/>
+          <p:cNvSpPr txBox="1"/>
+          <p:nvPr/>
+        </p:nvSpPr>
+        <p:spPr>
+          <a:xfrm>
+            <a:off x="731520" y="5486400"/>
+            <a:ext cx="10698480" cy="548640"/>
+          </a:xfrm>
+          <a:prstGeom prst="rect">
+            <a:avLst/>
+          </a:prstGeom>
+          <a:noFill/>
+        </p:spPr>
+        <p:txBody>
+          <a:bodyPr wrap="square" anchor="t">
+            <a:spAutoFit/>
+          </a:bodyPr>
+          <a:lstStyle/>
+          <a:p>
+            <a:pPr algn="ctr">
+              <a:lnSpc>
+                <a:spcPct val="100000"/>
+              </a:lnSpc>
+              <a:spcAft>
+                <a:spcPts val="800"/>
+              </a:spcAft>
+            </a:pPr>
+            <a:r>
+              <a:rPr sz="2000" b="1">
+                <a:solidFill>
+                  <a:srgbClr val="1A1A2E"/>
+                </a:solidFill>
+                <a:latin typeface="微软雅黑"/>
+              </a:rPr>
+              <a:t>真实效果：生成 → 运行 → 修Bug → README，端到端 7.5 秒完成</a:t>
+            </a:r>
+          </a:p>
+        </p:txBody>
+      </p:sp>
+      <p:sp>
+        <p:nvSpPr>
+          <p:cNvPr id="18" name="Rectangle 17"/>
+          <p:cNvSpPr/>
+          <p:nvPr/>
+        </p:nvSpPr>
+        <p:spPr>
+          <a:xfrm>
+            <a:off x="0" y="6601968"/>
+            <a:ext cx="12191695" cy="27432"/>
+          </a:xfrm>
+          <a:prstGeom prst="rect">
+            <a:avLst/>
+          </a:prstGeom>
+          <a:solidFill>
+            <a:srgbClr val="4A90D9"/>
+          </a:solidFill>
+          <a:ln>
+            <a:noFill/>
+          </a:ln>
+          <a:effectLst/>
+        </p:spPr>
+        <p:style>
+          <a:lnRef idx="1">
+            <a:schemeClr val="accent1"/>
+          </a:lnRef>
+          <a:fillRef idx="3">
+            <a:schemeClr val="accent1"/>
+          </a:fillRef>
+          <a:effectRef idx="2">
+            <a:schemeClr val="accent1"/>
+          </a:effectRef>
+          <a:fontRef idx="minor">
+            <a:schemeClr val="lt1"/>
+          </a:fontRef>
+        </p:style>
+        <p:txBody>
+          <a:bodyPr rtlCol="0" anchor="ctr"/>
+          <a:lstStyle/>
+          <a:p>
+            <a:pPr algn="ctr"/>
+          </a:p>
+        </p:txBody>
+      </p:sp>
+      <p:sp>
+        <p:nvSpPr>
+          <p:cNvPr id="19" name="TextBox 18"/>
+          <p:cNvSpPr txBox="1"/>
+          <p:nvPr/>
+        </p:nvSpPr>
+        <p:spPr>
+          <a:xfrm>
+            <a:off x="11094415" y="6629400"/>
+            <a:ext cx="914400" cy="228600"/>
+          </a:xfrm>
+          <a:prstGeom prst="rect">
+            <a:avLst/>
+          </a:prstGeom>
+          <a:noFill/>
+        </p:spPr>
+        <p:txBody>
+          <a:bodyPr wrap="square" anchor="t">
+            <a:spAutoFit/>
+          </a:bodyPr>
+          <a:lstStyle/>
+          <a:p>
+            <a:pPr algn="r">
+              <a:lnSpc>
+                <a:spcPct val="100000"/>
+              </a:lnSpc>
+              <a:spcAft>
+                <a:spcPts val="800"/>
+              </a:spcAft>
+            </a:pPr>
+            <a:r>
+              <a:rPr sz="1200" b="0">
+                <a:solidFill>
+                  <a:srgbClr val="B4B9C8"/>
+                </a:solidFill>
+                <a:latin typeface="微软雅黑"/>
+              </a:rPr>
+              <a:t>5</a:t>
             </a:r>
           </a:p>
         </p:txBody>
@@ -4700,13 +8105,21 @@
           <a:noFill/>
         </p:spPr>
         <p:txBody>
-          <a:bodyPr wrap="square">
+          <a:bodyPr wrap="square" anchor="t">
             <a:spAutoFit/>
           </a:bodyPr>
           <a:lstStyle/>
           <a:p>
-            <a:r>
-              <a:rPr sz="3600" b="1">
+            <a:pPr algn="l">
+              <a:lnSpc>
+                <a:spcPct val="100000"/>
+              </a:lnSpc>
+              <a:spcAft>
+                <a:spcPts val="800"/>
+              </a:spcAft>
+            </a:pPr>
+            <a:r>
+              <a:rPr sz="3400" b="1">
                 <a:solidFill>
                   <a:srgbClr val="4A90D9"/>
                 </a:solidFill>
@@ -4719,14 +8132,104 @@
       </p:sp>
       <p:sp>
         <p:nvSpPr>
-          <p:cNvPr id="3" name="TextBox 2"/>
+          <p:cNvPr id="3" name="Rectangle 2"/>
+          <p:cNvSpPr/>
+          <p:nvPr/>
+        </p:nvSpPr>
+        <p:spPr>
+          <a:xfrm>
+            <a:off x="777240" y="1280160"/>
+            <a:ext cx="2011680" cy="45720"/>
+          </a:xfrm>
+          <a:prstGeom prst="rect">
+            <a:avLst/>
+          </a:prstGeom>
+          <a:solidFill>
+            <a:srgbClr val="2EC4B6"/>
+          </a:solidFill>
+          <a:ln>
+            <a:noFill/>
+          </a:ln>
+          <a:effectLst/>
+        </p:spPr>
+        <p:style>
+          <a:lnRef idx="1">
+            <a:schemeClr val="accent1"/>
+          </a:lnRef>
+          <a:fillRef idx="3">
+            <a:schemeClr val="accent1"/>
+          </a:fillRef>
+          <a:effectRef idx="2">
+            <a:schemeClr val="accent1"/>
+          </a:effectRef>
+          <a:fontRef idx="minor">
+            <a:schemeClr val="lt1"/>
+          </a:fontRef>
+        </p:style>
+        <p:txBody>
+          <a:bodyPr rtlCol="0" anchor="ctr"/>
+          <a:lstStyle/>
+          <a:p>
+            <a:pPr algn="ctr"/>
+          </a:p>
+        </p:txBody>
+      </p:sp>
+      <p:sp>
+        <p:nvSpPr>
+          <p:cNvPr id="4" name="Rounded Rectangle 3"/>
+          <p:cNvSpPr/>
+          <p:nvPr/>
+        </p:nvSpPr>
+        <p:spPr>
+          <a:xfrm>
+            <a:off x="731520" y="1737360"/>
+            <a:ext cx="5120640" cy="2286000"/>
+          </a:xfrm>
+          <a:prstGeom prst="roundRect">
+            <a:avLst/>
+          </a:prstGeom>
+          <a:solidFill>
+            <a:srgbClr val="262640"/>
+          </a:solidFill>
+          <a:ln w="25400">
+            <a:solidFill>
+              <a:srgbClr val="2EC4B6"/>
+            </a:solidFill>
+          </a:ln>
+          <a:effectLst/>
+        </p:spPr>
+        <p:style>
+          <a:lnRef idx="1">
+            <a:schemeClr val="accent1"/>
+          </a:lnRef>
+          <a:fillRef idx="3">
+            <a:schemeClr val="accent1"/>
+          </a:fillRef>
+          <a:effectRef idx="2">
+            <a:schemeClr val="accent1"/>
+          </a:effectRef>
+          <a:fontRef idx="minor">
+            <a:schemeClr val="lt1"/>
+          </a:fontRef>
+        </p:style>
+        <p:txBody>
+          <a:bodyPr rtlCol="0" anchor="ctr"/>
+          <a:lstStyle/>
+          <a:p>
+            <a:pPr algn="ctr"/>
+          </a:p>
+        </p:txBody>
+      </p:sp>
+      <p:sp>
+        <p:nvSpPr>
+          <p:cNvPr id="5" name="TextBox 4"/>
           <p:cNvSpPr txBox="1"/>
           <p:nvPr/>
         </p:nvSpPr>
         <p:spPr>
           <a:xfrm>
-            <a:off x="731520" y="1554480"/>
-            <a:ext cx="10698480" cy="4846320"/>
+            <a:off x="1005840" y="2057400"/>
+            <a:ext cx="4572000" cy="1005840"/>
           </a:xfrm>
           <a:prstGeom prst="rect">
             <a:avLst/>
@@ -4734,88 +8237,635 @@
           <a:noFill/>
         </p:spPr>
         <p:txBody>
-          <a:bodyPr wrap="square">
+          <a:bodyPr wrap="square" anchor="t">
             <a:spAutoFit/>
           </a:bodyPr>
           <a:lstStyle/>
           <a:p>
-            <a:pPr>
+            <a:pPr algn="l">
+              <a:lnSpc>
+                <a:spcPct val="100000"/>
+              </a:lnSpc>
               <a:spcAft>
-                <a:spcPts val="1200"/>
+                <a:spcPts val="800"/>
               </a:spcAft>
             </a:pPr>
             <a:r>
-              <a:rPr sz="1800">
-                <a:solidFill>
-                  <a:srgbClr val="FFFFFF"/>
+              <a:rPr sz="4800" b="1">
+                <a:solidFill>
+                  <a:srgbClr val="2EC4B6"/>
                 </a:solidFill>
                 <a:latin typeface="微软雅黑"/>
               </a:rPr>
-              <a:t>测试：15 个 pytest 测试全部通过（Fake LLM，不消耗 token）</a:t>
-            </a:r>
-          </a:p>
-          <a:p>
-            <a:pPr>
+              <a:t>15</a:t>
+            </a:r>
+          </a:p>
+        </p:txBody>
+      </p:sp>
+      <p:sp>
+        <p:nvSpPr>
+          <p:cNvPr id="6" name="TextBox 5"/>
+          <p:cNvSpPr txBox="1"/>
+          <p:nvPr/>
+        </p:nvSpPr>
+        <p:spPr>
+          <a:xfrm>
+            <a:off x="1005840" y="3200400"/>
+            <a:ext cx="4572000" cy="548640"/>
+          </a:xfrm>
+          <a:prstGeom prst="rect">
+            <a:avLst/>
+          </a:prstGeom>
+          <a:noFill/>
+        </p:spPr>
+        <p:txBody>
+          <a:bodyPr wrap="square" anchor="t">
+            <a:spAutoFit/>
+          </a:bodyPr>
+          <a:lstStyle/>
+          <a:p>
+            <a:pPr algn="l">
+              <a:lnSpc>
+                <a:spcPct val="100000"/>
+              </a:lnSpc>
               <a:spcAft>
-                <a:spcPts val="1200"/>
+                <a:spcPts val="800"/>
               </a:spcAft>
             </a:pPr>
             <a:r>
-              <a:rPr sz="1800">
+              <a:rPr sz="1600" b="0">
                 <a:solidFill>
                   <a:srgbClr val="FFFFFF"/>
                 </a:solidFill>
                 <a:latin typeface="微软雅黑"/>
               </a:rPr>
-              <a:t>CI/CD：GitHub Actions 自动验证，推送即跑，全绿</a:t>
-            </a:r>
-          </a:p>
-          <a:p>
-            <a:pPr>
+              <a:t>pytest 测试全部通过</a:t>
+            </a:r>
+          </a:p>
+        </p:txBody>
+      </p:sp>
+      <p:sp>
+        <p:nvSpPr>
+          <p:cNvPr id="7" name="Rounded Rectangle 6"/>
+          <p:cNvSpPr/>
+          <p:nvPr/>
+        </p:nvSpPr>
+        <p:spPr>
+          <a:xfrm>
+            <a:off x="6309360" y="1737360"/>
+            <a:ext cx="5120640" cy="2286000"/>
+          </a:xfrm>
+          <a:prstGeom prst="roundRect">
+            <a:avLst/>
+          </a:prstGeom>
+          <a:solidFill>
+            <a:srgbClr val="262640"/>
+          </a:solidFill>
+          <a:ln w="25400">
+            <a:solidFill>
+              <a:srgbClr val="4A90D9"/>
+            </a:solidFill>
+          </a:ln>
+          <a:effectLst/>
+        </p:spPr>
+        <p:style>
+          <a:lnRef idx="1">
+            <a:schemeClr val="accent1"/>
+          </a:lnRef>
+          <a:fillRef idx="3">
+            <a:schemeClr val="accent1"/>
+          </a:fillRef>
+          <a:effectRef idx="2">
+            <a:schemeClr val="accent1"/>
+          </a:effectRef>
+          <a:fontRef idx="minor">
+            <a:schemeClr val="lt1"/>
+          </a:fontRef>
+        </p:style>
+        <p:txBody>
+          <a:bodyPr rtlCol="0" anchor="ctr"/>
+          <a:lstStyle/>
+          <a:p>
+            <a:pPr algn="ctr"/>
+          </a:p>
+        </p:txBody>
+      </p:sp>
+      <p:sp>
+        <p:nvSpPr>
+          <p:cNvPr id="8" name="TextBox 7"/>
+          <p:cNvSpPr txBox="1"/>
+          <p:nvPr/>
+        </p:nvSpPr>
+        <p:spPr>
+          <a:xfrm>
+            <a:off x="6583680" y="2057400"/>
+            <a:ext cx="4572000" cy="1005840"/>
+          </a:xfrm>
+          <a:prstGeom prst="rect">
+            <a:avLst/>
+          </a:prstGeom>
+          <a:noFill/>
+        </p:spPr>
+        <p:txBody>
+          <a:bodyPr wrap="square" anchor="t">
+            <a:spAutoFit/>
+          </a:bodyPr>
+          <a:lstStyle/>
+          <a:p>
+            <a:pPr algn="l">
+              <a:lnSpc>
+                <a:spcPct val="100000"/>
+              </a:lnSpc>
               <a:spcAft>
-                <a:spcPts val="1200"/>
+                <a:spcPts val="800"/>
               </a:spcAft>
             </a:pPr>
             <a:r>
-              <a:rPr sz="1800">
-                <a:solidFill>
-                  <a:srgbClr val="FFFFFF"/>
+              <a:rPr sz="4800" b="1">
+                <a:solidFill>
+                  <a:srgbClr val="4A90D9"/>
                 </a:solidFill>
                 <a:latin typeface="微软雅黑"/>
               </a:rPr>
-              <a:t>版本：GitHub Release v1.0.0，含完整 Release Note</a:t>
-            </a:r>
-          </a:p>
-          <a:p>
-            <a:pPr>
+              <a:t>7.5s</a:t>
+            </a:r>
+          </a:p>
+        </p:txBody>
+      </p:sp>
+      <p:sp>
+        <p:nvSpPr>
+          <p:cNvPr id="9" name="TextBox 8"/>
+          <p:cNvSpPr txBox="1"/>
+          <p:nvPr/>
+        </p:nvSpPr>
+        <p:spPr>
+          <a:xfrm>
+            <a:off x="6583680" y="3200400"/>
+            <a:ext cx="4572000" cy="548640"/>
+          </a:xfrm>
+          <a:prstGeom prst="rect">
+            <a:avLst/>
+          </a:prstGeom>
+          <a:noFill/>
+        </p:spPr>
+        <p:txBody>
+          <a:bodyPr wrap="square" anchor="t">
+            <a:spAutoFit/>
+          </a:bodyPr>
+          <a:lstStyle/>
+          <a:p>
+            <a:pPr algn="l">
+              <a:lnSpc>
+                <a:spcPct val="100000"/>
+              </a:lnSpc>
               <a:spcAft>
-                <a:spcPts val="1200"/>
+                <a:spcPts val="800"/>
               </a:spcAft>
             </a:pPr>
             <a:r>
-              <a:rPr sz="1800">
+              <a:rPr sz="1600" b="0">
                 <a:solidFill>
                   <a:srgbClr val="FFFFFF"/>
                 </a:solidFill>
                 <a:latin typeface="微软雅黑"/>
               </a:rPr>
-              <a:t>工程规范：MIT License + CONTRIBUTING 贡献指南</a:t>
-            </a:r>
-          </a:p>
-          <a:p>
-            <a:pPr>
+              <a:t>端到端真实运行耗时</a:t>
+            </a:r>
+          </a:p>
+        </p:txBody>
+      </p:sp>
+      <p:sp>
+        <p:nvSpPr>
+          <p:cNvPr id="10" name="Rounded Rectangle 9"/>
+          <p:cNvSpPr/>
+          <p:nvPr/>
+        </p:nvSpPr>
+        <p:spPr>
+          <a:xfrm>
+            <a:off x="731520" y="4206240"/>
+            <a:ext cx="5120640" cy="2286000"/>
+          </a:xfrm>
+          <a:prstGeom prst="roundRect">
+            <a:avLst/>
+          </a:prstGeom>
+          <a:solidFill>
+            <a:srgbClr val="262640"/>
+          </a:solidFill>
+          <a:ln w="25400">
+            <a:solidFill>
+              <a:srgbClr val="2EC4B6"/>
+            </a:solidFill>
+          </a:ln>
+          <a:effectLst/>
+        </p:spPr>
+        <p:style>
+          <a:lnRef idx="1">
+            <a:schemeClr val="accent1"/>
+          </a:lnRef>
+          <a:fillRef idx="3">
+            <a:schemeClr val="accent1"/>
+          </a:fillRef>
+          <a:effectRef idx="2">
+            <a:schemeClr val="accent1"/>
+          </a:effectRef>
+          <a:fontRef idx="minor">
+            <a:schemeClr val="lt1"/>
+          </a:fontRef>
+        </p:style>
+        <p:txBody>
+          <a:bodyPr rtlCol="0" anchor="ctr"/>
+          <a:lstStyle/>
+          <a:p>
+            <a:pPr algn="ctr"/>
+          </a:p>
+        </p:txBody>
+      </p:sp>
+      <p:sp>
+        <p:nvSpPr>
+          <p:cNvPr id="11" name="TextBox 10"/>
+          <p:cNvSpPr txBox="1"/>
+          <p:nvPr/>
+        </p:nvSpPr>
+        <p:spPr>
+          <a:xfrm>
+            <a:off x="1005840" y="4526279"/>
+            <a:ext cx="4572000" cy="1005840"/>
+          </a:xfrm>
+          <a:prstGeom prst="rect">
+            <a:avLst/>
+          </a:prstGeom>
+          <a:noFill/>
+        </p:spPr>
+        <p:txBody>
+          <a:bodyPr wrap="square" anchor="t">
+            <a:spAutoFit/>
+          </a:bodyPr>
+          <a:lstStyle/>
+          <a:p>
+            <a:pPr algn="l">
+              <a:lnSpc>
+                <a:spcPct val="100000"/>
+              </a:lnSpc>
               <a:spcAft>
-                <a:spcPts val="1200"/>
+                <a:spcPts val="800"/>
               </a:spcAft>
             </a:pPr>
             <a:r>
-              <a:rPr sz="1800">
-                <a:solidFill>
-                  <a:srgbClr val="FFFFFF"/>
+              <a:rPr sz="4800" b="1">
+                <a:solidFill>
+                  <a:srgbClr val="2EC4B6"/>
                 </a:solidFill>
                 <a:latin typeface="微软雅黑"/>
               </a:rPr>
-              <a:t>三种入口：CLI / Web / API，全部实测可用</a:t>
+              <a:t>100%</a:t>
+            </a:r>
+          </a:p>
+        </p:txBody>
+      </p:sp>
+      <p:sp>
+        <p:nvSpPr>
+          <p:cNvPr id="12" name="TextBox 11"/>
+          <p:cNvSpPr txBox="1"/>
+          <p:nvPr/>
+        </p:nvSpPr>
+        <p:spPr>
+          <a:xfrm>
+            <a:off x="1005840" y="5669279"/>
+            <a:ext cx="4572000" cy="548640"/>
+          </a:xfrm>
+          <a:prstGeom prst="rect">
+            <a:avLst/>
+          </a:prstGeom>
+          <a:noFill/>
+        </p:spPr>
+        <p:txBody>
+          <a:bodyPr wrap="square" anchor="t">
+            <a:spAutoFit/>
+          </a:bodyPr>
+          <a:lstStyle/>
+          <a:p>
+            <a:pPr algn="l">
+              <a:lnSpc>
+                <a:spcPct val="100000"/>
+              </a:lnSpc>
+              <a:spcAft>
+                <a:spcPts val="800"/>
+              </a:spcAft>
+            </a:pPr>
+            <a:r>
+              <a:rPr sz="1600" b="0">
+                <a:solidFill>
+                  <a:srgbClr val="FFFFFF"/>
+                </a:solidFill>
+                <a:latin typeface="微软雅黑"/>
+              </a:rPr>
+              <a:t>CI 全绿，每次推送自动验证</a:t>
+            </a:r>
+          </a:p>
+        </p:txBody>
+      </p:sp>
+      <p:sp>
+        <p:nvSpPr>
+          <p:cNvPr id="13" name="Rounded Rectangle 12"/>
+          <p:cNvSpPr/>
+          <p:nvPr/>
+        </p:nvSpPr>
+        <p:spPr>
+          <a:xfrm>
+            <a:off x="6309360" y="4206240"/>
+            <a:ext cx="5120640" cy="2286000"/>
+          </a:xfrm>
+          <a:prstGeom prst="roundRect">
+            <a:avLst/>
+          </a:prstGeom>
+          <a:solidFill>
+            <a:srgbClr val="262640"/>
+          </a:solidFill>
+          <a:ln w="25400">
+            <a:solidFill>
+              <a:srgbClr val="4A90D9"/>
+            </a:solidFill>
+          </a:ln>
+          <a:effectLst/>
+        </p:spPr>
+        <p:style>
+          <a:lnRef idx="1">
+            <a:schemeClr val="accent1"/>
+          </a:lnRef>
+          <a:fillRef idx="3">
+            <a:schemeClr val="accent1"/>
+          </a:fillRef>
+          <a:effectRef idx="2">
+            <a:schemeClr val="accent1"/>
+          </a:effectRef>
+          <a:fontRef idx="minor">
+            <a:schemeClr val="lt1"/>
+          </a:fontRef>
+        </p:style>
+        <p:txBody>
+          <a:bodyPr rtlCol="0" anchor="ctr"/>
+          <a:lstStyle/>
+          <a:p>
+            <a:pPr algn="ctr"/>
+          </a:p>
+        </p:txBody>
+      </p:sp>
+      <p:sp>
+        <p:nvSpPr>
+          <p:cNvPr id="14" name="TextBox 13"/>
+          <p:cNvSpPr txBox="1"/>
+          <p:nvPr/>
+        </p:nvSpPr>
+        <p:spPr>
+          <a:xfrm>
+            <a:off x="6583680" y="4526279"/>
+            <a:ext cx="4572000" cy="1005840"/>
+          </a:xfrm>
+          <a:prstGeom prst="rect">
+            <a:avLst/>
+          </a:prstGeom>
+          <a:noFill/>
+        </p:spPr>
+        <p:txBody>
+          <a:bodyPr wrap="square" anchor="t">
+            <a:spAutoFit/>
+          </a:bodyPr>
+          <a:lstStyle/>
+          <a:p>
+            <a:pPr algn="l">
+              <a:lnSpc>
+                <a:spcPct val="100000"/>
+              </a:lnSpc>
+              <a:spcAft>
+                <a:spcPts val="800"/>
+              </a:spcAft>
+            </a:pPr>
+            <a:r>
+              <a:rPr sz="4800" b="1">
+                <a:solidFill>
+                  <a:srgbClr val="4A90D9"/>
+                </a:solidFill>
+                <a:latin typeface="微软雅黑"/>
+              </a:rPr>
+              <a:t>v1.0.0</a:t>
+            </a:r>
+          </a:p>
+        </p:txBody>
+      </p:sp>
+      <p:sp>
+        <p:nvSpPr>
+          <p:cNvPr id="15" name="TextBox 14"/>
+          <p:cNvSpPr txBox="1"/>
+          <p:nvPr/>
+        </p:nvSpPr>
+        <p:spPr>
+          <a:xfrm>
+            <a:off x="6583680" y="5669279"/>
+            <a:ext cx="4572000" cy="548640"/>
+          </a:xfrm>
+          <a:prstGeom prst="rect">
+            <a:avLst/>
+          </a:prstGeom>
+          <a:noFill/>
+        </p:spPr>
+        <p:txBody>
+          <a:bodyPr wrap="square" anchor="t">
+            <a:spAutoFit/>
+          </a:bodyPr>
+          <a:lstStyle/>
+          <a:p>
+            <a:pPr algn="l">
+              <a:lnSpc>
+                <a:spcPct val="100000"/>
+              </a:lnSpc>
+              <a:spcAft>
+                <a:spcPts val="800"/>
+              </a:spcAft>
+            </a:pPr>
+            <a:r>
+              <a:rPr sz="1600" b="0">
+                <a:solidFill>
+                  <a:srgbClr val="FFFFFF"/>
+                </a:solidFill>
+                <a:latin typeface="微软雅黑"/>
+              </a:rPr>
+              <a:t>GitHub Release 已发布</a:t>
+            </a:r>
+          </a:p>
+        </p:txBody>
+      </p:sp>
+      <p:sp>
+        <p:nvSpPr>
+          <p:cNvPr id="16" name="Rounded Rectangle 15"/>
+          <p:cNvSpPr/>
+          <p:nvPr/>
+        </p:nvSpPr>
+        <p:spPr>
+          <a:xfrm>
+            <a:off x="731520" y="5943600"/>
+            <a:ext cx="10698480" cy="548640"/>
+          </a:xfrm>
+          <a:prstGeom prst="roundRect">
+            <a:avLst>
+              <a:gd name="adj" fmla="val 30000"/>
+            </a:avLst>
+          </a:prstGeom>
+          <a:solidFill>
+            <a:srgbClr val="262640"/>
+          </a:solidFill>
+          <a:ln w="19050">
+            <a:solidFill>
+              <a:srgbClr val="2EC4B6"/>
+            </a:solidFill>
+          </a:ln>
+          <a:effectLst/>
+        </p:spPr>
+        <p:style>
+          <a:lnRef idx="1">
+            <a:schemeClr val="accent1"/>
+          </a:lnRef>
+          <a:fillRef idx="3">
+            <a:schemeClr val="accent1"/>
+          </a:fillRef>
+          <a:effectRef idx="2">
+            <a:schemeClr val="accent1"/>
+          </a:effectRef>
+          <a:fontRef idx="minor">
+            <a:schemeClr val="lt1"/>
+          </a:fontRef>
+        </p:style>
+        <p:txBody>
+          <a:bodyPr rtlCol="0" anchor="ctr"/>
+          <a:lstStyle/>
+          <a:p>
+            <a:pPr algn="ctr"/>
+          </a:p>
+        </p:txBody>
+      </p:sp>
+      <p:sp>
+        <p:nvSpPr>
+          <p:cNvPr id="17" name="TextBox 16"/>
+          <p:cNvSpPr txBox="1"/>
+          <p:nvPr/>
+        </p:nvSpPr>
+        <p:spPr>
+          <a:xfrm>
+            <a:off x="731520" y="6035040"/>
+            <a:ext cx="10698480" cy="365760"/>
+          </a:xfrm>
+          <a:prstGeom prst="rect">
+            <a:avLst/>
+          </a:prstGeom>
+          <a:noFill/>
+        </p:spPr>
+        <p:txBody>
+          <a:bodyPr wrap="square" anchor="t">
+            <a:spAutoFit/>
+          </a:bodyPr>
+          <a:lstStyle/>
+          <a:p>
+            <a:pPr algn="ctr">
+              <a:lnSpc>
+                <a:spcPct val="100000"/>
+              </a:lnSpc>
+              <a:spcAft>
+                <a:spcPts val="800"/>
+              </a:spcAft>
+            </a:pPr>
+            <a:r>
+              <a:rPr sz="1500" b="0">
+                <a:solidFill>
+                  <a:srgbClr val="B4B9C8"/>
+                </a:solidFill>
+                <a:latin typeface="微软雅黑"/>
+              </a:rPr>
+              <a:t>工程规范：MIT License · CONTRIBUTING 贡献指南 · 三种入口全部实测可用</a:t>
+            </a:r>
+          </a:p>
+        </p:txBody>
+      </p:sp>
+      <p:sp>
+        <p:nvSpPr>
+          <p:cNvPr id="18" name="Rectangle 17"/>
+          <p:cNvSpPr/>
+          <p:nvPr/>
+        </p:nvSpPr>
+        <p:spPr>
+          <a:xfrm>
+            <a:off x="0" y="6601968"/>
+            <a:ext cx="12191695" cy="27432"/>
+          </a:xfrm>
+          <a:prstGeom prst="rect">
+            <a:avLst/>
+          </a:prstGeom>
+          <a:solidFill>
+            <a:srgbClr val="4A90D9"/>
+          </a:solidFill>
+          <a:ln>
+            <a:noFill/>
+          </a:ln>
+          <a:effectLst/>
+        </p:spPr>
+        <p:style>
+          <a:lnRef idx="1">
+            <a:schemeClr val="accent1"/>
+          </a:lnRef>
+          <a:fillRef idx="3">
+            <a:schemeClr val="accent1"/>
+          </a:fillRef>
+          <a:effectRef idx="2">
+            <a:schemeClr val="accent1"/>
+          </a:effectRef>
+          <a:fontRef idx="minor">
+            <a:schemeClr val="lt1"/>
+          </a:fontRef>
+        </p:style>
+        <p:txBody>
+          <a:bodyPr rtlCol="0" anchor="ctr"/>
+          <a:lstStyle/>
+          <a:p>
+            <a:pPr algn="ctr"/>
+          </a:p>
+        </p:txBody>
+      </p:sp>
+      <p:sp>
+        <p:nvSpPr>
+          <p:cNvPr id="19" name="TextBox 18"/>
+          <p:cNvSpPr txBox="1"/>
+          <p:nvPr/>
+        </p:nvSpPr>
+        <p:spPr>
+          <a:xfrm>
+            <a:off x="11094415" y="6629400"/>
+            <a:ext cx="914400" cy="228600"/>
+          </a:xfrm>
+          <a:prstGeom prst="rect">
+            <a:avLst/>
+          </a:prstGeom>
+          <a:noFill/>
+        </p:spPr>
+        <p:txBody>
+          <a:bodyPr wrap="square" anchor="t">
+            <a:spAutoFit/>
+          </a:bodyPr>
+          <a:lstStyle/>
+          <a:p>
+            <a:pPr algn="r">
+              <a:lnSpc>
+                <a:spcPct val="100000"/>
+              </a:lnSpc>
+              <a:spcAft>
+                <a:spcPts val="800"/>
+              </a:spcAft>
+            </a:pPr>
+            <a:r>
+              <a:rPr sz="1200" b="0">
+                <a:solidFill>
+                  <a:srgbClr val="B4B9C8"/>
+                </a:solidFill>
+                <a:latin typeface="微软雅黑"/>
+              </a:rPr>
+              <a:t>6</a:t>
             </a:r>
           </a:p>
         </p:txBody>
@@ -4863,13 +8913,21 @@
           <a:noFill/>
         </p:spPr>
         <p:txBody>
-          <a:bodyPr wrap="square">
+          <a:bodyPr wrap="square" anchor="t">
             <a:spAutoFit/>
           </a:bodyPr>
           <a:lstStyle/>
           <a:p>
-            <a:r>
-              <a:rPr sz="3600" b="1">
+            <a:pPr algn="l">
+              <a:lnSpc>
+                <a:spcPct val="100000"/>
+              </a:lnSpc>
+              <a:spcAft>
+                <a:spcPts val="800"/>
+              </a:spcAft>
+            </a:pPr>
+            <a:r>
+              <a:rPr sz="3400" b="1">
                 <a:solidFill>
                   <a:srgbClr val="4A90D9"/>
                 </a:solidFill>
@@ -4882,14 +8940,148 @@
       </p:sp>
       <p:sp>
         <p:nvSpPr>
-          <p:cNvPr id="3" name="TextBox 2"/>
+          <p:cNvPr id="3" name="Rectangle 2"/>
+          <p:cNvSpPr/>
+          <p:nvPr/>
+        </p:nvSpPr>
+        <p:spPr>
+          <a:xfrm>
+            <a:off x="777240" y="1280160"/>
+            <a:ext cx="2011680" cy="45720"/>
+          </a:xfrm>
+          <a:prstGeom prst="rect">
+            <a:avLst/>
+          </a:prstGeom>
+          <a:solidFill>
+            <a:srgbClr val="2EC4B6"/>
+          </a:solidFill>
+          <a:ln>
+            <a:noFill/>
+          </a:ln>
+          <a:effectLst/>
+        </p:spPr>
+        <p:style>
+          <a:lnRef idx="1">
+            <a:schemeClr val="accent1"/>
+          </a:lnRef>
+          <a:fillRef idx="3">
+            <a:schemeClr val="accent1"/>
+          </a:fillRef>
+          <a:effectRef idx="2">
+            <a:schemeClr val="accent1"/>
+          </a:effectRef>
+          <a:fontRef idx="minor">
+            <a:schemeClr val="lt1"/>
+          </a:fontRef>
+        </p:style>
+        <p:txBody>
+          <a:bodyPr rtlCol="0" anchor="ctr"/>
+          <a:lstStyle/>
+          <a:p>
+            <a:pPr algn="ctr"/>
+          </a:p>
+        </p:txBody>
+      </p:sp>
+      <p:sp>
+        <p:nvSpPr>
+          <p:cNvPr id="4" name="Rounded Rectangle 3"/>
+          <p:cNvSpPr/>
+          <p:nvPr/>
+        </p:nvSpPr>
+        <p:spPr>
+          <a:xfrm>
+            <a:off x="731520" y="1737360"/>
+            <a:ext cx="3383280" cy="3108960"/>
+          </a:xfrm>
+          <a:prstGeom prst="roundRect">
+            <a:avLst/>
+          </a:prstGeom>
+          <a:solidFill>
+            <a:srgbClr val="262640"/>
+          </a:solidFill>
+          <a:ln w="19050">
+            <a:solidFill>
+              <a:srgbClr val="2EC4B6"/>
+            </a:solidFill>
+          </a:ln>
+          <a:effectLst/>
+        </p:spPr>
+        <p:style>
+          <a:lnRef idx="1">
+            <a:schemeClr val="accent1"/>
+          </a:lnRef>
+          <a:fillRef idx="3">
+            <a:schemeClr val="accent1"/>
+          </a:fillRef>
+          <a:effectRef idx="2">
+            <a:schemeClr val="accent1"/>
+          </a:effectRef>
+          <a:fontRef idx="minor">
+            <a:schemeClr val="lt1"/>
+          </a:fontRef>
+        </p:style>
+        <p:txBody>
+          <a:bodyPr rtlCol="0" anchor="ctr"/>
+          <a:lstStyle/>
+          <a:p>
+            <a:pPr algn="ctr"/>
+          </a:p>
+        </p:txBody>
+      </p:sp>
+      <p:sp>
+        <p:nvSpPr>
+          <p:cNvPr id="5" name="Rounded Rectangle 4"/>
+          <p:cNvSpPr/>
+          <p:nvPr/>
+        </p:nvSpPr>
+        <p:spPr>
+          <a:xfrm>
+            <a:off x="731520" y="1737360"/>
+            <a:ext cx="3383280" cy="128016"/>
+          </a:xfrm>
+          <a:prstGeom prst="roundRect">
+            <a:avLst/>
+          </a:prstGeom>
+          <a:solidFill>
+            <a:srgbClr val="2EC4B6"/>
+          </a:solidFill>
+          <a:ln>
+            <a:noFill/>
+          </a:ln>
+          <a:effectLst/>
+        </p:spPr>
+        <p:style>
+          <a:lnRef idx="1">
+            <a:schemeClr val="accent1"/>
+          </a:lnRef>
+          <a:fillRef idx="3">
+            <a:schemeClr val="accent1"/>
+          </a:fillRef>
+          <a:effectRef idx="2">
+            <a:schemeClr val="accent1"/>
+          </a:effectRef>
+          <a:fontRef idx="minor">
+            <a:schemeClr val="lt1"/>
+          </a:fontRef>
+        </p:style>
+        <p:txBody>
+          <a:bodyPr rtlCol="0" anchor="ctr"/>
+          <a:lstStyle/>
+          <a:p>
+            <a:pPr algn="ctr"/>
+          </a:p>
+        </p:txBody>
+      </p:sp>
+      <p:sp>
+        <p:nvSpPr>
+          <p:cNvPr id="6" name="TextBox 5"/>
           <p:cNvSpPr txBox="1"/>
           <p:nvPr/>
         </p:nvSpPr>
         <p:spPr>
           <a:xfrm>
-            <a:off x="731520" y="1554480"/>
-            <a:ext cx="10698480" cy="4846320"/>
+            <a:off x="960120" y="2011679"/>
+            <a:ext cx="2926080" cy="640080"/>
           </a:xfrm>
           <a:prstGeom prst="rect">
             <a:avLst/>
@@ -4897,88 +9089,705 @@
           <a:noFill/>
         </p:spPr>
         <p:txBody>
-          <a:bodyPr wrap="square">
+          <a:bodyPr wrap="square" anchor="t">
             <a:spAutoFit/>
           </a:bodyPr>
           <a:lstStyle/>
           <a:p>
-            <a:pPr>
+            <a:pPr algn="l">
+              <a:lnSpc>
+                <a:spcPct val="100000"/>
+              </a:lnSpc>
               <a:spcAft>
-                <a:spcPts val="1200"/>
+                <a:spcPts val="800"/>
               </a:spcAft>
             </a:pPr>
             <a:r>
-              <a:rPr sz="1800">
+              <a:rPr sz="2000" b="1">
                 <a:solidFill>
                   <a:srgbClr val="FFFFFF"/>
                 </a:solidFill>
                 <a:latin typeface="微软雅黑"/>
               </a:rPr>
-              <a:t>收获：掌握多Agent编排、事件驱动、沙箱隔离、CI/CD 全套工程方法</a:t>
-            </a:r>
-          </a:p>
-          <a:p>
-            <a:pPr>
+              <a:t>收获</a:t>
+            </a:r>
+          </a:p>
+        </p:txBody>
+      </p:sp>
+      <p:sp>
+        <p:nvSpPr>
+          <p:cNvPr id="7" name="TextBox 6"/>
+          <p:cNvSpPr txBox="1"/>
+          <p:nvPr/>
+        </p:nvSpPr>
+        <p:spPr>
+          <a:xfrm>
+            <a:off x="960120" y="2651760"/>
+            <a:ext cx="2926080" cy="2011680"/>
+          </a:xfrm>
+          <a:prstGeom prst="rect">
+            <a:avLst/>
+          </a:prstGeom>
+          <a:noFill/>
+        </p:spPr>
+        <p:txBody>
+          <a:bodyPr wrap="square" anchor="t">
+            <a:spAutoFit/>
+          </a:bodyPr>
+          <a:lstStyle/>
+          <a:p>
+            <a:pPr algn="l">
+              <a:lnSpc>
+                <a:spcPct val="100000"/>
+              </a:lnSpc>
               <a:spcAft>
-                <a:spcPts val="1200"/>
+                <a:spcPts val="600"/>
               </a:spcAft>
             </a:pPr>
             <a:r>
-              <a:rPr sz="1800">
-                <a:solidFill>
-                  <a:srgbClr val="FFFFFF"/>
+              <a:rPr sz="1500" b="0">
+                <a:solidFill>
+                  <a:srgbClr val="B4B9C8"/>
                 </a:solidFill>
                 <a:latin typeface="微软雅黑"/>
               </a:rPr>
-              <a:t>不足：仅支持单文件 Python 项目，Debug 依赖 LLM 质量</a:t>
-            </a:r>
-          </a:p>
-          <a:p>
-            <a:pPr>
+              <a:t>多Agent 编排与事件驱动</a:t>
+            </a:r>
+          </a:p>
+          <a:p>
+            <a:pPr algn="l">
+              <a:lnSpc>
+                <a:spcPct val="100000"/>
+              </a:lnSpc>
               <a:spcAft>
-                <a:spcPts val="1200"/>
+                <a:spcPts val="600"/>
               </a:spcAft>
             </a:pPr>
             <a:r>
-              <a:rPr sz="1800">
-                <a:solidFill>
-                  <a:srgbClr val="FFFFFF"/>
+              <a:rPr sz="1500" b="0">
+                <a:solidFill>
+                  <a:srgbClr val="B4B9C8"/>
                 </a:solidFill>
                 <a:latin typeface="微软雅黑"/>
               </a:rPr>
-              <a:t>展望：支持多文件与依赖安装、加入测试生成 Agent、Benchmark 统计</a:t>
-            </a:r>
-          </a:p>
-          <a:p>
-            <a:pPr>
+              <a:t>沙箱隔离 / LLM 抽象 / CI-CD</a:t>
+            </a:r>
+          </a:p>
+          <a:p>
+            <a:pPr algn="l">
+              <a:lnSpc>
+                <a:spcPct val="100000"/>
+              </a:lnSpc>
               <a:spcAft>
-                <a:spcPts val="1200"/>
+                <a:spcPts val="600"/>
               </a:spcAft>
             </a:pPr>
             <a:r>
-              <a:rPr sz="1800">
-                <a:solidFill>
-                  <a:srgbClr val="FFFFFF"/>
+              <a:rPr sz="1500" b="0">
+                <a:solidFill>
+                  <a:srgbClr val="B4B9C8"/>
                 </a:solidFill>
                 <a:latin typeface="微软雅黑"/>
               </a:rPr>
-              <a:t/>
-            </a:r>
-          </a:p>
-          <a:p>
-            <a:pPr>
+              <a:t>完整工程化交付经验</a:t>
+            </a:r>
+          </a:p>
+        </p:txBody>
+      </p:sp>
+      <p:sp>
+        <p:nvSpPr>
+          <p:cNvPr id="8" name="Rounded Rectangle 7"/>
+          <p:cNvSpPr/>
+          <p:nvPr/>
+        </p:nvSpPr>
+        <p:spPr>
+          <a:xfrm>
+            <a:off x="4389120" y="1737360"/>
+            <a:ext cx="3383280" cy="3108960"/>
+          </a:xfrm>
+          <a:prstGeom prst="roundRect">
+            <a:avLst/>
+          </a:prstGeom>
+          <a:solidFill>
+            <a:srgbClr val="262640"/>
+          </a:solidFill>
+          <a:ln w="19050">
+            <a:solidFill>
+              <a:srgbClr val="E07A5F"/>
+            </a:solidFill>
+          </a:ln>
+          <a:effectLst/>
+        </p:spPr>
+        <p:style>
+          <a:lnRef idx="1">
+            <a:schemeClr val="accent1"/>
+          </a:lnRef>
+          <a:fillRef idx="3">
+            <a:schemeClr val="accent1"/>
+          </a:fillRef>
+          <a:effectRef idx="2">
+            <a:schemeClr val="accent1"/>
+          </a:effectRef>
+          <a:fontRef idx="minor">
+            <a:schemeClr val="lt1"/>
+          </a:fontRef>
+        </p:style>
+        <p:txBody>
+          <a:bodyPr rtlCol="0" anchor="ctr"/>
+          <a:lstStyle/>
+          <a:p>
+            <a:pPr algn="ctr"/>
+          </a:p>
+        </p:txBody>
+      </p:sp>
+      <p:sp>
+        <p:nvSpPr>
+          <p:cNvPr id="9" name="Rounded Rectangle 8"/>
+          <p:cNvSpPr/>
+          <p:nvPr/>
+        </p:nvSpPr>
+        <p:spPr>
+          <a:xfrm>
+            <a:off x="4389120" y="1737360"/>
+            <a:ext cx="3383280" cy="128016"/>
+          </a:xfrm>
+          <a:prstGeom prst="roundRect">
+            <a:avLst/>
+          </a:prstGeom>
+          <a:solidFill>
+            <a:srgbClr val="E07A5F"/>
+          </a:solidFill>
+          <a:ln>
+            <a:noFill/>
+          </a:ln>
+          <a:effectLst/>
+        </p:spPr>
+        <p:style>
+          <a:lnRef idx="1">
+            <a:schemeClr val="accent1"/>
+          </a:lnRef>
+          <a:fillRef idx="3">
+            <a:schemeClr val="accent1"/>
+          </a:fillRef>
+          <a:effectRef idx="2">
+            <a:schemeClr val="accent1"/>
+          </a:effectRef>
+          <a:fontRef idx="minor">
+            <a:schemeClr val="lt1"/>
+          </a:fontRef>
+        </p:style>
+        <p:txBody>
+          <a:bodyPr rtlCol="0" anchor="ctr"/>
+          <a:lstStyle/>
+          <a:p>
+            <a:pPr algn="ctr"/>
+          </a:p>
+        </p:txBody>
+      </p:sp>
+      <p:sp>
+        <p:nvSpPr>
+          <p:cNvPr id="10" name="TextBox 9"/>
+          <p:cNvSpPr txBox="1"/>
+          <p:nvPr/>
+        </p:nvSpPr>
+        <p:spPr>
+          <a:xfrm>
+            <a:off x="4617720" y="2011679"/>
+            <a:ext cx="2926080" cy="640080"/>
+          </a:xfrm>
+          <a:prstGeom prst="rect">
+            <a:avLst/>
+          </a:prstGeom>
+          <a:noFill/>
+        </p:spPr>
+        <p:txBody>
+          <a:bodyPr wrap="square" anchor="t">
+            <a:spAutoFit/>
+          </a:bodyPr>
+          <a:lstStyle/>
+          <a:p>
+            <a:pPr algn="l">
+              <a:lnSpc>
+                <a:spcPct val="100000"/>
+              </a:lnSpc>
               <a:spcAft>
-                <a:spcPts val="1200"/>
+                <a:spcPts val="800"/>
               </a:spcAft>
             </a:pPr>
             <a:r>
-              <a:rPr sz="1800">
+              <a:rPr sz="2000" b="1">
                 <a:solidFill>
                   <a:srgbClr val="FFFFFF"/>
+                </a:solidFill>
+                <a:latin typeface="微软雅黑"/>
+              </a:rPr>
+              <a:t>不足</a:t>
+            </a:r>
+          </a:p>
+        </p:txBody>
+      </p:sp>
+      <p:sp>
+        <p:nvSpPr>
+          <p:cNvPr id="11" name="TextBox 10"/>
+          <p:cNvSpPr txBox="1"/>
+          <p:nvPr/>
+        </p:nvSpPr>
+        <p:spPr>
+          <a:xfrm>
+            <a:off x="4617720" y="2651760"/>
+            <a:ext cx="2926080" cy="2011680"/>
+          </a:xfrm>
+          <a:prstGeom prst="rect">
+            <a:avLst/>
+          </a:prstGeom>
+          <a:noFill/>
+        </p:spPr>
+        <p:txBody>
+          <a:bodyPr wrap="square" anchor="t">
+            <a:spAutoFit/>
+          </a:bodyPr>
+          <a:lstStyle/>
+          <a:p>
+            <a:pPr algn="l">
+              <a:lnSpc>
+                <a:spcPct val="100000"/>
+              </a:lnSpc>
+              <a:spcAft>
+                <a:spcPts val="600"/>
+              </a:spcAft>
+            </a:pPr>
+            <a:r>
+              <a:rPr sz="1500" b="0">
+                <a:solidFill>
+                  <a:srgbClr val="B4B9C8"/>
+                </a:solidFill>
+                <a:latin typeface="微软雅黑"/>
+              </a:rPr>
+              <a:t>仅支持单文件 Python 项目</a:t>
+            </a:r>
+          </a:p>
+          <a:p>
+            <a:pPr algn="l">
+              <a:lnSpc>
+                <a:spcPct val="100000"/>
+              </a:lnSpc>
+              <a:spcAft>
+                <a:spcPts val="600"/>
+              </a:spcAft>
+            </a:pPr>
+            <a:r>
+              <a:rPr sz="1500" b="0">
+                <a:solidFill>
+                  <a:srgbClr val="B4B9C8"/>
+                </a:solidFill>
+                <a:latin typeface="微软雅黑"/>
+              </a:rPr>
+              <a:t>修复质量依赖 LLM 能力</a:t>
+            </a:r>
+          </a:p>
+          <a:p>
+            <a:pPr algn="l">
+              <a:lnSpc>
+                <a:spcPct val="100000"/>
+              </a:lnSpc>
+              <a:spcAft>
+                <a:spcPts val="600"/>
+              </a:spcAft>
+            </a:pPr>
+            <a:r>
+              <a:rPr sz="1500" b="0">
+                <a:solidFill>
+                  <a:srgbClr val="B4B9C8"/>
+                </a:solidFill>
+                <a:latin typeface="微软雅黑"/>
+              </a:rPr>
+              <a:t>缺少系统 Benchmark 统计</a:t>
+            </a:r>
+          </a:p>
+        </p:txBody>
+      </p:sp>
+      <p:sp>
+        <p:nvSpPr>
+          <p:cNvPr id="12" name="Rounded Rectangle 11"/>
+          <p:cNvSpPr/>
+          <p:nvPr/>
+        </p:nvSpPr>
+        <p:spPr>
+          <a:xfrm>
+            <a:off x="8046720" y="1737360"/>
+            <a:ext cx="3383280" cy="3108960"/>
+          </a:xfrm>
+          <a:prstGeom prst="roundRect">
+            <a:avLst/>
+          </a:prstGeom>
+          <a:solidFill>
+            <a:srgbClr val="262640"/>
+          </a:solidFill>
+          <a:ln w="19050">
+            <a:solidFill>
+              <a:srgbClr val="4A90D9"/>
+            </a:solidFill>
+          </a:ln>
+          <a:effectLst/>
+        </p:spPr>
+        <p:style>
+          <a:lnRef idx="1">
+            <a:schemeClr val="accent1"/>
+          </a:lnRef>
+          <a:fillRef idx="3">
+            <a:schemeClr val="accent1"/>
+          </a:fillRef>
+          <a:effectRef idx="2">
+            <a:schemeClr val="accent1"/>
+          </a:effectRef>
+          <a:fontRef idx="minor">
+            <a:schemeClr val="lt1"/>
+          </a:fontRef>
+        </p:style>
+        <p:txBody>
+          <a:bodyPr rtlCol="0" anchor="ctr"/>
+          <a:lstStyle/>
+          <a:p>
+            <a:pPr algn="ctr"/>
+          </a:p>
+        </p:txBody>
+      </p:sp>
+      <p:sp>
+        <p:nvSpPr>
+          <p:cNvPr id="13" name="Rounded Rectangle 12"/>
+          <p:cNvSpPr/>
+          <p:nvPr/>
+        </p:nvSpPr>
+        <p:spPr>
+          <a:xfrm>
+            <a:off x="8046720" y="1737360"/>
+            <a:ext cx="3383280" cy="128016"/>
+          </a:xfrm>
+          <a:prstGeom prst="roundRect">
+            <a:avLst/>
+          </a:prstGeom>
+          <a:solidFill>
+            <a:srgbClr val="4A90D9"/>
+          </a:solidFill>
+          <a:ln>
+            <a:noFill/>
+          </a:ln>
+          <a:effectLst/>
+        </p:spPr>
+        <p:style>
+          <a:lnRef idx="1">
+            <a:schemeClr val="accent1"/>
+          </a:lnRef>
+          <a:fillRef idx="3">
+            <a:schemeClr val="accent1"/>
+          </a:fillRef>
+          <a:effectRef idx="2">
+            <a:schemeClr val="accent1"/>
+          </a:effectRef>
+          <a:fontRef idx="minor">
+            <a:schemeClr val="lt1"/>
+          </a:fontRef>
+        </p:style>
+        <p:txBody>
+          <a:bodyPr rtlCol="0" anchor="ctr"/>
+          <a:lstStyle/>
+          <a:p>
+            <a:pPr algn="ctr"/>
+          </a:p>
+        </p:txBody>
+      </p:sp>
+      <p:sp>
+        <p:nvSpPr>
+          <p:cNvPr id="14" name="TextBox 13"/>
+          <p:cNvSpPr txBox="1"/>
+          <p:nvPr/>
+        </p:nvSpPr>
+        <p:spPr>
+          <a:xfrm>
+            <a:off x="8275320" y="2011679"/>
+            <a:ext cx="2926080" cy="640080"/>
+          </a:xfrm>
+          <a:prstGeom prst="rect">
+            <a:avLst/>
+          </a:prstGeom>
+          <a:noFill/>
+        </p:spPr>
+        <p:txBody>
+          <a:bodyPr wrap="square" anchor="t">
+            <a:spAutoFit/>
+          </a:bodyPr>
+          <a:lstStyle/>
+          <a:p>
+            <a:pPr algn="l">
+              <a:lnSpc>
+                <a:spcPct val="100000"/>
+              </a:lnSpc>
+              <a:spcAft>
+                <a:spcPts val="800"/>
+              </a:spcAft>
+            </a:pPr>
+            <a:r>
+              <a:rPr sz="2000" b="1">
+                <a:solidFill>
+                  <a:srgbClr val="FFFFFF"/>
+                </a:solidFill>
+                <a:latin typeface="微软雅黑"/>
+              </a:rPr>
+              <a:t>展望</a:t>
+            </a:r>
+          </a:p>
+        </p:txBody>
+      </p:sp>
+      <p:sp>
+        <p:nvSpPr>
+          <p:cNvPr id="15" name="TextBox 14"/>
+          <p:cNvSpPr txBox="1"/>
+          <p:nvPr/>
+        </p:nvSpPr>
+        <p:spPr>
+          <a:xfrm>
+            <a:off x="8275320" y="2651760"/>
+            <a:ext cx="2926080" cy="2011680"/>
+          </a:xfrm>
+          <a:prstGeom prst="rect">
+            <a:avLst/>
+          </a:prstGeom>
+          <a:noFill/>
+        </p:spPr>
+        <p:txBody>
+          <a:bodyPr wrap="square" anchor="t">
+            <a:spAutoFit/>
+          </a:bodyPr>
+          <a:lstStyle/>
+          <a:p>
+            <a:pPr algn="l">
+              <a:lnSpc>
+                <a:spcPct val="100000"/>
+              </a:lnSpc>
+              <a:spcAft>
+                <a:spcPts val="600"/>
+              </a:spcAft>
+            </a:pPr>
+            <a:r>
+              <a:rPr sz="1500" b="0">
+                <a:solidFill>
+                  <a:srgbClr val="B4B9C8"/>
+                </a:solidFill>
+                <a:latin typeface="微软雅黑"/>
+              </a:rPr>
+              <a:t>支持多文件与依赖安装</a:t>
+            </a:r>
+          </a:p>
+          <a:p>
+            <a:pPr algn="l">
+              <a:lnSpc>
+                <a:spcPct val="100000"/>
+              </a:lnSpc>
+              <a:spcAft>
+                <a:spcPts val="600"/>
+              </a:spcAft>
+            </a:pPr>
+            <a:r>
+              <a:rPr sz="1500" b="0">
+                <a:solidFill>
+                  <a:srgbClr val="B4B9C8"/>
+                </a:solidFill>
+                <a:latin typeface="微软雅黑"/>
+              </a:rPr>
+              <a:t>新增测试生成 Agent</a:t>
+            </a:r>
+          </a:p>
+          <a:p>
+            <a:pPr algn="l">
+              <a:lnSpc>
+                <a:spcPct val="100000"/>
+              </a:lnSpc>
+              <a:spcAft>
+                <a:spcPts val="600"/>
+              </a:spcAft>
+            </a:pPr>
+            <a:r>
+              <a:rPr sz="1500" b="0">
+                <a:solidFill>
+                  <a:srgbClr val="B4B9C8"/>
+                </a:solidFill>
+                <a:latin typeface="微软雅黑"/>
+              </a:rPr>
+              <a:t>建立成功率/耗时量化评估</a:t>
+            </a:r>
+          </a:p>
+        </p:txBody>
+      </p:sp>
+      <p:sp>
+        <p:nvSpPr>
+          <p:cNvPr id="16" name="Rounded Rectangle 15"/>
+          <p:cNvSpPr/>
+          <p:nvPr/>
+        </p:nvSpPr>
+        <p:spPr>
+          <a:xfrm>
+            <a:off x="731520" y="5212080"/>
+            <a:ext cx="10698480" cy="1005840"/>
+          </a:xfrm>
+          <a:prstGeom prst="roundRect">
+            <a:avLst>
+              <a:gd name="adj" fmla="val 20000"/>
+            </a:avLst>
+          </a:prstGeom>
+          <a:solidFill>
+            <a:srgbClr val="4A90D9"/>
+          </a:solidFill>
+          <a:ln>
+            <a:noFill/>
+          </a:ln>
+          <a:effectLst/>
+        </p:spPr>
+        <p:style>
+          <a:lnRef idx="1">
+            <a:schemeClr val="accent1"/>
+          </a:lnRef>
+          <a:fillRef idx="3">
+            <a:schemeClr val="accent1"/>
+          </a:fillRef>
+          <a:effectRef idx="2">
+            <a:schemeClr val="accent1"/>
+          </a:effectRef>
+          <a:fontRef idx="minor">
+            <a:schemeClr val="lt1"/>
+          </a:fontRef>
+        </p:style>
+        <p:txBody>
+          <a:bodyPr rtlCol="0" anchor="ctr"/>
+          <a:lstStyle/>
+          <a:p>
+            <a:pPr algn="ctr"/>
+          </a:p>
+        </p:txBody>
+      </p:sp>
+      <p:sp>
+        <p:nvSpPr>
+          <p:cNvPr id="17" name="TextBox 16"/>
+          <p:cNvSpPr txBox="1"/>
+          <p:nvPr/>
+        </p:nvSpPr>
+        <p:spPr>
+          <a:xfrm>
+            <a:off x="731520" y="5486400"/>
+            <a:ext cx="10698480" cy="548640"/>
+          </a:xfrm>
+          <a:prstGeom prst="rect">
+            <a:avLst/>
+          </a:prstGeom>
+          <a:noFill/>
+        </p:spPr>
+        <p:txBody>
+          <a:bodyPr wrap="square" anchor="t">
+            <a:spAutoFit/>
+          </a:bodyPr>
+          <a:lstStyle/>
+          <a:p>
+            <a:pPr algn="ctr">
+              <a:lnSpc>
+                <a:spcPct val="100000"/>
+              </a:lnSpc>
+              <a:spcAft>
+                <a:spcPts val="800"/>
+              </a:spcAft>
+            </a:pPr>
+            <a:r>
+              <a:rPr sz="2400" b="1">
+                <a:solidFill>
+                  <a:srgbClr val="1A1A2E"/>
                 </a:solidFill>
                 <a:latin typeface="微软雅黑"/>
               </a:rPr>
               <a:t>感谢聆听，敬请指正！</a:t>
+            </a:r>
+          </a:p>
+        </p:txBody>
+      </p:sp>
+      <p:sp>
+        <p:nvSpPr>
+          <p:cNvPr id="18" name="Rectangle 17"/>
+          <p:cNvSpPr/>
+          <p:nvPr/>
+        </p:nvSpPr>
+        <p:spPr>
+          <a:xfrm>
+            <a:off x="0" y="6601968"/>
+            <a:ext cx="12191695" cy="27432"/>
+          </a:xfrm>
+          <a:prstGeom prst="rect">
+            <a:avLst/>
+          </a:prstGeom>
+          <a:solidFill>
+            <a:srgbClr val="4A90D9"/>
+          </a:solidFill>
+          <a:ln>
+            <a:noFill/>
+          </a:ln>
+          <a:effectLst/>
+        </p:spPr>
+        <p:style>
+          <a:lnRef idx="1">
+            <a:schemeClr val="accent1"/>
+          </a:lnRef>
+          <a:fillRef idx="3">
+            <a:schemeClr val="accent1"/>
+          </a:fillRef>
+          <a:effectRef idx="2">
+            <a:schemeClr val="accent1"/>
+          </a:effectRef>
+          <a:fontRef idx="minor">
+            <a:schemeClr val="lt1"/>
+          </a:fontRef>
+        </p:style>
+        <p:txBody>
+          <a:bodyPr rtlCol="0" anchor="ctr"/>
+          <a:lstStyle/>
+          <a:p>
+            <a:pPr algn="ctr"/>
+          </a:p>
+        </p:txBody>
+      </p:sp>
+      <p:sp>
+        <p:nvSpPr>
+          <p:cNvPr id="19" name="TextBox 18"/>
+          <p:cNvSpPr txBox="1"/>
+          <p:nvPr/>
+        </p:nvSpPr>
+        <p:spPr>
+          <a:xfrm>
+            <a:off x="11094415" y="6629400"/>
+            <a:ext cx="914400" cy="228600"/>
+          </a:xfrm>
+          <a:prstGeom prst="rect">
+            <a:avLst/>
+          </a:prstGeom>
+          <a:noFill/>
+        </p:spPr>
+        <p:txBody>
+          <a:bodyPr wrap="square" anchor="t">
+            <a:spAutoFit/>
+          </a:bodyPr>
+          <a:lstStyle/>
+          <a:p>
+            <a:pPr algn="r">
+              <a:lnSpc>
+                <a:spcPct val="100000"/>
+              </a:lnSpc>
+              <a:spcAft>
+                <a:spcPts val="800"/>
+              </a:spcAft>
+            </a:pPr>
+            <a:r>
+              <a:rPr sz="1200" b="0">
+                <a:solidFill>
+                  <a:srgbClr val="B4B9C8"/>
+                </a:solidFill>
+                <a:latin typeface="微软雅黑"/>
+              </a:rPr>
+              <a:t>7</a:t>
             </a:r>
           </a:p>
         </p:txBody>

--- a/output/slides/AI_Agent_Project_I_答辩.pptx
+++ b/output/slides/AI_Agent_Project_I_答辩.pptx
@@ -12,6 +12,7 @@
     <p:sldId id="260" r:id="rId12"/>
     <p:sldId id="261" r:id="rId13"/>
     <p:sldId id="262" r:id="rId14"/>
+    <p:sldId id="263" r:id="rId15"/>
   </p:sldIdLst>
   <p:sldSz cx="12191695" cy="6858000" type="screen4x3"/>
   <p:notesSz cx="6858000" cy="9144000"/>
@@ -858,7 +859,7 @@
           <a:lstStyle/>
           <a:p>
             <a:r>
-              <a:t>用数据说话，展示仓库地址和CI截图。</a:t>
+              <a:t>这是本项目最核心的亮点：Test Agent 测试失败时，通过协作消息反馈给 Debug Agent，Debug 修复后复用同一份测试复测，形成真实的跨 Agent 协作闭环——这正是『多智能体』而非『单 Agent 流水线』的关键证据。</a:t>
             </a:r>
           </a:p>
         </p:txBody>
@@ -884,6 +885,76 @@
 </file>
 
 <file path=ppt/notesSlides/notesSlide7.xml><?xml version="1.0" encoding="utf-8"?>
+<p:notes xmlns:a="http://schemas.openxmlformats.org/drawingml/2006/main" xmlns:p="http://schemas.openxmlformats.org/presentationml/2006/main" xmlns:r="http://schemas.openxmlformats.org/officeDocument/2006/relationships">
+  <p:cSld>
+    <p:spTree>
+      <p:nvGrpSpPr>
+        <p:cNvPr id="1" name=""/>
+        <p:cNvGrpSpPr/>
+        <p:nvPr/>
+      </p:nvGrpSpPr>
+      <p:grpSpPr>
+        <a:xfrm>
+          <a:off x="0" y="0"/>
+          <a:ext cx="0" cy="0"/>
+          <a:chOff x="0" y="0"/>
+          <a:chExt cx="0" cy="0"/>
+        </a:xfrm>
+      </p:grpSpPr>
+      <p:sp>
+        <p:nvSpPr>
+          <p:cNvPr id="2" name="Slide Image Placeholder 1"/>
+          <p:cNvSpPr>
+            <a:spLocks noGrp="1"/>
+          </p:cNvSpPr>
+          <p:nvPr>
+            <p:ph type="sldImg" idx="2"/>
+          </p:nvPr>
+        </p:nvSpPr>
+        <p:spPr/>
+      </p:sp>
+      <p:sp>
+        <p:nvSpPr>
+          <p:cNvPr id="3" name="Notes Placeholder 2"/>
+          <p:cNvSpPr>
+            <a:spLocks noGrp="1"/>
+          </p:cNvSpPr>
+          <p:nvPr>
+            <p:ph type="body" idx="3" sz="quarter"/>
+          </p:nvPr>
+        </p:nvSpPr>
+        <p:spPr/>
+        <p:txBody>
+          <a:bodyPr/>
+          <a:lstStyle/>
+          <a:p>
+            <a:r>
+              <a:t>用数据说话：25 个测试全过、Benchmark 10 个任务结果全对、CI 全绿，展示仓库地址和 CI 截图。</a:t>
+            </a:r>
+          </a:p>
+        </p:txBody>
+      </p:sp>
+      <p:sp>
+        <p:nvSpPr>
+          <p:cNvPr id="4" name="Slide Number Placeholder 3"/>
+          <p:cNvSpPr>
+            <a:spLocks noGrp="1"/>
+          </p:cNvSpPr>
+          <p:nvPr>
+            <p:ph type="sldNum" idx="5" sz="quarter"/>
+          </p:nvPr>
+        </p:nvSpPr>
+        <p:spPr/>
+      </p:sp>
+    </p:spTree>
+  </p:cSld>
+  <p:clrMapOvr>
+    <a:masterClrMapping/>
+  </p:clrMapOvr>
+</p:notes>
+</file>
+
+<file path=ppt/notesSlides/notesSlide8.xml><?xml version="1.0" encoding="utf-8"?>
 <p:notes xmlns:a="http://schemas.openxmlformats.org/drawingml/2006/main" xmlns:p="http://schemas.openxmlformats.org/presentationml/2006/main" xmlns:r="http://schemas.openxmlformats.org/officeDocument/2006/relationships">
   <p:cSld>
     <p:spTree>
@@ -5600,8 +5671,8 @@
         </p:nvSpPr>
         <p:spPr>
           <a:xfrm>
-            <a:off x="914400" y="4754880"/>
-            <a:ext cx="1371600" cy="1165860"/>
+            <a:off x="685800" y="4754880"/>
+            <a:ext cx="1097280" cy="932688"/>
           </a:xfrm>
           <a:prstGeom prst="roundRect">
             <a:avLst/>
@@ -5646,8 +5717,8 @@
         </p:nvSpPr>
         <p:spPr>
           <a:xfrm>
-            <a:off x="1161288" y="5138928"/>
-            <a:ext cx="274320" cy="274320"/>
+            <a:off x="883310" y="5062118"/>
+            <a:ext cx="219456" cy="219456"/>
           </a:xfrm>
           <a:prstGeom prst="ellipse">
             <a:avLst/>
@@ -5690,8 +5761,8 @@
         </p:nvSpPr>
         <p:spPr>
           <a:xfrm>
-            <a:off x="1764792" y="5138928"/>
-            <a:ext cx="274320" cy="274320"/>
+            <a:off x="1366113" y="5062118"/>
+            <a:ext cx="219456" cy="219456"/>
           </a:xfrm>
           <a:prstGeom prst="ellipse">
             <a:avLst/>
@@ -5734,8 +5805,8 @@
         </p:nvSpPr>
         <p:spPr>
           <a:xfrm>
-            <a:off x="1325880" y="5577840"/>
-            <a:ext cx="548640" cy="164592"/>
+            <a:off x="1014983" y="5413248"/>
+            <a:ext cx="438912" cy="131673"/>
           </a:xfrm>
           <a:prstGeom prst="ellipse">
             <a:avLst/>
@@ -5778,8 +5849,8 @@
         </p:nvSpPr>
         <p:spPr>
           <a:xfrm>
-            <a:off x="804672" y="5056632"/>
-            <a:ext cx="164592" cy="685800"/>
+            <a:off x="576072" y="4996281"/>
+            <a:ext cx="131673" cy="548640"/>
           </a:xfrm>
           <a:prstGeom prst="ellipse">
             <a:avLst/>
@@ -5822,8 +5893,8 @@
         </p:nvSpPr>
         <p:spPr>
           <a:xfrm>
-            <a:off x="2267712" y="5056632"/>
-            <a:ext cx="164592" cy="685800"/>
+            <a:off x="1764792" y="4996281"/>
+            <a:ext cx="131673" cy="548640"/>
           </a:xfrm>
           <a:prstGeom prst="ellipse">
             <a:avLst/>
@@ -6441,7 +6512,7 @@
         <p:spPr>
           <a:xfrm>
             <a:off x="914400" y="1920240"/>
-            <a:ext cx="10332720" cy="1188720"/>
+            <a:ext cx="8138160" cy="1188720"/>
           </a:xfrm>
           <a:prstGeom prst="rect">
             <a:avLst/>
@@ -6511,7 +6582,7 @@
                 </a:solidFill>
                 <a:latin typeface="微软雅黑"/>
               </a:rPr>
-              <a:t>Coordinator + Code / Debug / Doc Agent 自动化流水线</a:t>
+              <a:t>Coordinator + Code / Debug / Doc / Test Agent 多智能体协作</a:t>
             </a:r>
           </a:p>
         </p:txBody>
@@ -6566,8 +6637,8 @@
         </p:nvSpPr>
         <p:spPr>
           <a:xfrm>
-            <a:off x="2651760" y="5074920"/>
-            <a:ext cx="2194560" cy="777240"/>
+            <a:off x="2011680" y="5074920"/>
+            <a:ext cx="1965960" cy="777240"/>
           </a:xfrm>
           <a:prstGeom prst="roundRect">
             <a:avLst>
@@ -6614,8 +6685,8 @@
         </p:nvSpPr>
         <p:spPr>
           <a:xfrm>
-            <a:off x="2651760" y="5212080"/>
-            <a:ext cx="2194560" cy="502920"/>
+            <a:off x="2011680" y="5212080"/>
+            <a:ext cx="1965960" cy="502920"/>
           </a:xfrm>
           <a:prstGeom prst="rect">
             <a:avLst/>
@@ -6637,7 +6708,7 @@
               </a:spcAft>
             </a:pPr>
             <a:r>
-              <a:rPr sz="1800" b="1">
+              <a:rPr sz="1600" b="1">
                 <a:solidFill>
                   <a:srgbClr val="4A90D9"/>
                 </a:solidFill>
@@ -6656,8 +6727,8 @@
         </p:nvSpPr>
         <p:spPr>
           <a:xfrm>
-            <a:off x="5394960" y="5074920"/>
-            <a:ext cx="2194560" cy="777240"/>
+            <a:off x="4160520" y="5074920"/>
+            <a:ext cx="1965960" cy="777240"/>
           </a:xfrm>
           <a:prstGeom prst="roundRect">
             <a:avLst>
@@ -6704,8 +6775,8 @@
         </p:nvSpPr>
         <p:spPr>
           <a:xfrm>
-            <a:off x="5394960" y="5212080"/>
-            <a:ext cx="2194560" cy="502920"/>
+            <a:off x="4160520" y="5212080"/>
+            <a:ext cx="1965960" cy="502920"/>
           </a:xfrm>
           <a:prstGeom prst="rect">
             <a:avLst/>
@@ -6727,7 +6798,7 @@
               </a:spcAft>
             </a:pPr>
             <a:r>
-              <a:rPr sz="1800" b="1">
+              <a:rPr sz="1600" b="1">
                 <a:solidFill>
                   <a:srgbClr val="FF69B4"/>
                 </a:solidFill>
@@ -6746,8 +6817,8 @@
         </p:nvSpPr>
         <p:spPr>
           <a:xfrm>
-            <a:off x="8138160" y="5074920"/>
-            <a:ext cx="2194560" cy="777240"/>
+            <a:off x="6309360" y="5074920"/>
+            <a:ext cx="1965960" cy="777240"/>
           </a:xfrm>
           <a:prstGeom prst="roundRect">
             <a:avLst>
@@ -6794,8 +6865,8 @@
         </p:nvSpPr>
         <p:spPr>
           <a:xfrm>
-            <a:off x="8138160" y="5212080"/>
-            <a:ext cx="2194560" cy="502920"/>
+            <a:off x="6309360" y="5212080"/>
+            <a:ext cx="1965960" cy="502920"/>
           </a:xfrm>
           <a:prstGeom prst="rect">
             <a:avLst/>
@@ -6817,7 +6888,7 @@
               </a:spcAft>
             </a:pPr>
             <a:r>
-              <a:rPr sz="1800" b="1">
+              <a:rPr sz="1600" b="1">
                 <a:solidFill>
                   <a:srgbClr val="2EC4B6"/>
                 </a:solidFill>
@@ -6830,7 +6901,97 @@
       </p:sp>
       <p:sp>
         <p:nvSpPr>
-          <p:cNvPr id="73" name="TextBox 72"/>
+          <p:cNvPr id="73" name="Rounded Rectangle 72"/>
+          <p:cNvSpPr/>
+          <p:nvPr/>
+        </p:nvSpPr>
+        <p:spPr>
+          <a:xfrm>
+            <a:off x="8458200" y="5074920"/>
+            <a:ext cx="1965960" cy="777240"/>
+          </a:xfrm>
+          <a:prstGeom prst="roundRect">
+            <a:avLst>
+              <a:gd name="adj" fmla="val 50000"/>
+            </a:avLst>
+          </a:prstGeom>
+          <a:solidFill>
+            <a:srgbClr val="1C1E3A"/>
+          </a:solidFill>
+          <a:ln w="25400">
+            <a:solidFill>
+              <a:srgbClr val="FF9248"/>
+            </a:solidFill>
+          </a:ln>
+          <a:effectLst/>
+        </p:spPr>
+        <p:style>
+          <a:lnRef idx="1">
+            <a:schemeClr val="accent1"/>
+          </a:lnRef>
+          <a:fillRef idx="3">
+            <a:schemeClr val="accent1"/>
+          </a:fillRef>
+          <a:effectRef idx="2">
+            <a:schemeClr val="accent1"/>
+          </a:effectRef>
+          <a:fontRef idx="minor">
+            <a:schemeClr val="lt1"/>
+          </a:fontRef>
+        </p:style>
+        <p:txBody>
+          <a:bodyPr rtlCol="0" anchor="ctr"/>
+          <a:lstStyle/>
+          <a:p>
+            <a:pPr algn="ctr"/>
+          </a:p>
+        </p:txBody>
+      </p:sp>
+      <p:sp>
+        <p:nvSpPr>
+          <p:cNvPr id="74" name="TextBox 73"/>
+          <p:cNvSpPr txBox="1"/>
+          <p:nvPr/>
+        </p:nvSpPr>
+        <p:spPr>
+          <a:xfrm>
+            <a:off x="8458200" y="5212080"/>
+            <a:ext cx="1965960" cy="502920"/>
+          </a:xfrm>
+          <a:prstGeom prst="rect">
+            <a:avLst/>
+          </a:prstGeom>
+          <a:noFill/>
+        </p:spPr>
+        <p:txBody>
+          <a:bodyPr wrap="square" anchor="ctr">
+            <a:spAutoFit/>
+          </a:bodyPr>
+          <a:lstStyle/>
+          <a:p>
+            <a:pPr algn="ctr">
+              <a:lnSpc>
+                <a:spcPct val="100000"/>
+              </a:lnSpc>
+              <a:spcAft>
+                <a:spcPts val="800"/>
+              </a:spcAft>
+            </a:pPr>
+            <a:r>
+              <a:rPr sz="1600" b="1">
+                <a:solidFill>
+                  <a:srgbClr val="FF9248"/>
+                </a:solidFill>
+                <a:latin typeface="微软雅黑"/>
+              </a:rPr>
+              <a:t>自动测试</a:t>
+            </a:r>
+          </a:p>
+        </p:txBody>
+      </p:sp>
+      <p:sp>
+        <p:nvSpPr>
+          <p:cNvPr id="75" name="TextBox 74"/>
           <p:cNvSpPr txBox="1"/>
           <p:nvPr/>
         </p:nvSpPr>
@@ -8891,8 +9052,8 @@
         </p:nvSpPr>
         <p:spPr>
           <a:xfrm>
-            <a:off x="1005840" y="3657600"/>
-            <a:ext cx="2651760" cy="1645920"/>
+            <a:off x="640080" y="3657600"/>
+            <a:ext cx="2514600" cy="1645920"/>
           </a:xfrm>
           <a:prstGeom prst="roundRect">
             <a:avLst/>
@@ -8937,8 +9098,8 @@
         </p:nvSpPr>
         <p:spPr>
           <a:xfrm>
-            <a:off x="1005840" y="3931920"/>
-            <a:ext cx="2651760" cy="548640"/>
+            <a:off x="640080" y="3931920"/>
+            <a:ext cx="2514600" cy="548640"/>
           </a:xfrm>
           <a:prstGeom prst="rect">
             <a:avLst/>
@@ -8960,7 +9121,7 @@
               </a:spcAft>
             </a:pPr>
             <a:r>
-              <a:rPr sz="1900" b="1">
+              <a:rPr sz="1800" b="1">
                 <a:solidFill>
                   <a:srgbClr val="FFFFFF"/>
                 </a:solidFill>
@@ -8979,8 +9140,8 @@
         </p:nvSpPr>
         <p:spPr>
           <a:xfrm>
-            <a:off x="1005840" y="4526280"/>
-            <a:ext cx="2651760" cy="457200"/>
+            <a:off x="640080" y="4526280"/>
+            <a:ext cx="2514600" cy="457200"/>
           </a:xfrm>
           <a:prstGeom prst="rect">
             <a:avLst/>
@@ -9002,7 +9163,7 @@
               </a:spcAft>
             </a:pPr>
             <a:r>
-              <a:rPr sz="1400" b="0">
+              <a:rPr sz="1300" b="0">
                 <a:solidFill>
                   <a:srgbClr val="2EC4B6"/>
                 </a:solidFill>
@@ -9021,8 +9182,8 @@
         </p:nvSpPr>
         <p:spPr>
           <a:xfrm>
-            <a:off x="4754880" y="3657600"/>
-            <a:ext cx="2651760" cy="1645920"/>
+            <a:off x="3429000" y="3657600"/>
+            <a:ext cx="2514600" cy="1645920"/>
           </a:xfrm>
           <a:prstGeom prst="roundRect">
             <a:avLst/>
@@ -9067,8 +9228,8 @@
         </p:nvSpPr>
         <p:spPr>
           <a:xfrm>
-            <a:off x="4754880" y="3931920"/>
-            <a:ext cx="2651760" cy="548640"/>
+            <a:off x="3429000" y="3931920"/>
+            <a:ext cx="2514600" cy="548640"/>
           </a:xfrm>
           <a:prstGeom prst="rect">
             <a:avLst/>
@@ -9090,7 +9251,7 @@
               </a:spcAft>
             </a:pPr>
             <a:r>
-              <a:rPr sz="1900" b="1">
+              <a:rPr sz="1800" b="1">
                 <a:solidFill>
                   <a:srgbClr val="FFFFFF"/>
                 </a:solidFill>
@@ -9109,8 +9270,8 @@
         </p:nvSpPr>
         <p:spPr>
           <a:xfrm>
-            <a:off x="4754880" y="4526280"/>
-            <a:ext cx="2651760" cy="457200"/>
+            <a:off x="3429000" y="4526280"/>
+            <a:ext cx="2514600" cy="457200"/>
           </a:xfrm>
           <a:prstGeom prst="rect">
             <a:avLst/>
@@ -9132,7 +9293,7 @@
               </a:spcAft>
             </a:pPr>
             <a:r>
-              <a:rPr sz="1400" b="0">
+              <a:rPr sz="1300" b="0">
                 <a:solidFill>
                   <a:srgbClr val="FF69B4"/>
                 </a:solidFill>
@@ -9151,8 +9312,8 @@
         </p:nvSpPr>
         <p:spPr>
           <a:xfrm>
-            <a:off x="8595360" y="3657600"/>
-            <a:ext cx="2651760" cy="1645920"/>
+            <a:off x="6217920" y="3657600"/>
+            <a:ext cx="2514600" cy="1645920"/>
           </a:xfrm>
           <a:prstGeom prst="roundRect">
             <a:avLst/>
@@ -9197,8 +9358,8 @@
         </p:nvSpPr>
         <p:spPr>
           <a:xfrm>
-            <a:off x="8595360" y="3931920"/>
-            <a:ext cx="2651760" cy="548640"/>
+            <a:off x="6217920" y="3931920"/>
+            <a:ext cx="2514600" cy="548640"/>
           </a:xfrm>
           <a:prstGeom prst="rect">
             <a:avLst/>
@@ -9220,7 +9381,7 @@
               </a:spcAft>
             </a:pPr>
             <a:r>
-              <a:rPr sz="1900" b="1">
+              <a:rPr sz="1800" b="1">
                 <a:solidFill>
                   <a:srgbClr val="FFFFFF"/>
                 </a:solidFill>
@@ -9239,8 +9400,8 @@
         </p:nvSpPr>
         <p:spPr>
           <a:xfrm>
-            <a:off x="8595360" y="4526280"/>
-            <a:ext cx="2651760" cy="457200"/>
+            <a:off x="6217920" y="4526280"/>
+            <a:ext cx="2514600" cy="457200"/>
           </a:xfrm>
           <a:prstGeom prst="rect">
             <a:avLst/>
@@ -9262,7 +9423,7 @@
               </a:spcAft>
             </a:pPr>
             <a:r>
-              <a:rPr sz="1400" b="0">
+              <a:rPr sz="1300" b="0">
                 <a:solidFill>
                   <a:srgbClr val="9C78FF"/>
                 </a:solidFill>
@@ -9273,172 +9434,62 @@
           </a:p>
         </p:txBody>
       </p:sp>
-      <p:cxnSp>
-        <p:nvCxnSpPr>
-          <p:cNvPr id="24" name="Connector 23"/>
-          <p:cNvCxnSpPr/>
-          <p:nvPr/>
-        </p:nvCxnSpPr>
-        <p:spPr>
-          <a:xfrm flipH="1">
-            <a:off x="2331720" y="2560320"/>
-            <a:ext cx="3749040" cy="1097280"/>
-          </a:xfrm>
-          <a:prstGeom prst="line">
-            <a:avLst/>
-          </a:prstGeom>
-          <a:ln w="19050">
+      <p:sp>
+        <p:nvSpPr>
+          <p:cNvPr id="24" name="Rounded Rectangle 23"/>
+          <p:cNvSpPr/>
+          <p:nvPr/>
+        </p:nvSpPr>
+        <p:spPr>
+          <a:xfrm>
+            <a:off x="9006840" y="3657600"/>
+            <a:ext cx="2514600" cy="1645920"/>
+          </a:xfrm>
+          <a:prstGeom prst="roundRect">
+            <a:avLst/>
+          </a:prstGeom>
+          <a:solidFill>
+            <a:srgbClr val="1C1E3A"/>
+          </a:solidFill>
+          <a:ln w="25400">
             <a:solidFill>
-              <a:srgbClr val="6E78AA"/>
+              <a:srgbClr val="FF9248"/>
             </a:solidFill>
           </a:ln>
           <a:effectLst/>
         </p:spPr>
         <p:style>
-          <a:lnRef idx="2">
-            <a:schemeClr val="accent1"/>
-          </a:lnRef>
-          <a:fillRef idx="0">
-            <a:schemeClr val="accent1"/>
-          </a:fillRef>
-          <a:effectRef idx="1">
-            <a:schemeClr val="accent1"/>
-          </a:effectRef>
-          <a:fontRef idx="minor">
-            <a:schemeClr val="tx1"/>
-          </a:fontRef>
-        </p:style>
-      </p:cxnSp>
-      <p:cxnSp>
-        <p:nvCxnSpPr>
-          <p:cNvPr id="25" name="Connector 24"/>
-          <p:cNvCxnSpPr/>
-          <p:nvPr/>
-        </p:nvCxnSpPr>
-        <p:spPr>
-          <a:xfrm>
-            <a:off x="6080760" y="2560320"/>
-            <a:ext cx="0" cy="1097280"/>
-          </a:xfrm>
-          <a:prstGeom prst="line">
-            <a:avLst/>
-          </a:prstGeom>
-          <a:ln w="19050">
-            <a:solidFill>
-              <a:srgbClr val="6E78AA"/>
-            </a:solidFill>
-          </a:ln>
-          <a:effectLst/>
-        </p:spPr>
-        <p:style>
-          <a:lnRef idx="2">
-            <a:schemeClr val="accent1"/>
-          </a:lnRef>
-          <a:fillRef idx="0">
-            <a:schemeClr val="accent1"/>
-          </a:fillRef>
-          <a:effectRef idx="1">
-            <a:schemeClr val="accent1"/>
-          </a:effectRef>
-          <a:fontRef idx="minor">
-            <a:schemeClr val="tx1"/>
-          </a:fontRef>
-        </p:style>
-      </p:cxnSp>
-      <p:cxnSp>
-        <p:nvCxnSpPr>
-          <p:cNvPr id="26" name="Connector 25"/>
-          <p:cNvCxnSpPr/>
-          <p:nvPr/>
-        </p:nvCxnSpPr>
-        <p:spPr>
-          <a:xfrm>
-            <a:off x="6080760" y="2560320"/>
-            <a:ext cx="3840480" cy="1097280"/>
-          </a:xfrm>
-          <a:prstGeom prst="line">
-            <a:avLst/>
-          </a:prstGeom>
-          <a:ln w="19050">
-            <a:solidFill>
-              <a:srgbClr val="6E78AA"/>
-            </a:solidFill>
-          </a:ln>
-          <a:effectLst/>
-        </p:spPr>
-        <p:style>
-          <a:lnRef idx="2">
-            <a:schemeClr val="accent1"/>
-          </a:lnRef>
-          <a:fillRef idx="0">
-            <a:schemeClr val="accent1"/>
-          </a:fillRef>
-          <a:effectRef idx="1">
-            <a:schemeClr val="accent1"/>
-          </a:effectRef>
-          <a:fontRef idx="minor">
-            <a:schemeClr val="tx1"/>
-          </a:fontRef>
-        </p:style>
-      </p:cxnSp>
-      <p:sp>
-        <p:nvSpPr>
-          <p:cNvPr id="27" name="Rounded Rectangle 26"/>
-          <p:cNvSpPr/>
-          <p:nvPr/>
-        </p:nvSpPr>
-        <p:spPr>
-          <a:xfrm>
-            <a:off x="731520" y="5623560"/>
-            <a:ext cx="10698480" cy="640080"/>
-          </a:xfrm>
-          <a:prstGeom prst="roundRect">
-            <a:avLst>
-              <a:gd name="adj" fmla="val 30000"/>
-            </a:avLst>
-          </a:prstGeom>
-          <a:solidFill>
-            <a:srgbClr val="282B50"/>
-          </a:solidFill>
-          <a:ln w="19050">
-            <a:solidFill>
-              <a:srgbClr val="2EC4B6"/>
-            </a:solidFill>
-          </a:ln>
-          <a:effectLst/>
-        </p:spPr>
-        <p:style>
-          <a:lnRef idx="1">
-            <a:schemeClr val="accent1"/>
-          </a:lnRef>
-          <a:fillRef idx="3">
-            <a:schemeClr val="accent1"/>
-          </a:fillRef>
-          <a:effectRef idx="2">
-            <a:schemeClr val="accent1"/>
-          </a:effectRef>
-          <a:fontRef idx="minor">
-            <a:schemeClr val="lt1"/>
-          </a:fontRef>
-        </p:style>
-        <p:txBody>
-          <a:bodyPr rtlCol="0" anchor="ctr"/>
-          <a:lstStyle/>
-          <a:p>
-            <a:pPr algn="ctr"/>
-          </a:p>
-        </p:txBody>
-      </p:sp>
-      <p:sp>
-        <p:nvSpPr>
-          <p:cNvPr id="28" name="TextBox 27"/>
+          <a:lnRef idx="1">
+            <a:schemeClr val="accent1"/>
+          </a:lnRef>
+          <a:fillRef idx="3">
+            <a:schemeClr val="accent1"/>
+          </a:fillRef>
+          <a:effectRef idx="2">
+            <a:schemeClr val="accent1"/>
+          </a:effectRef>
+          <a:fontRef idx="minor">
+            <a:schemeClr val="lt1"/>
+          </a:fontRef>
+        </p:style>
+        <p:txBody>
+          <a:bodyPr rtlCol="0" anchor="ctr"/>
+          <a:lstStyle/>
+          <a:p>
+            <a:pPr algn="ctr"/>
+          </a:p>
+        </p:txBody>
+      </p:sp>
+      <p:sp>
+        <p:nvSpPr>
+          <p:cNvPr id="25" name="TextBox 24"/>
           <p:cNvSpPr txBox="1"/>
           <p:nvPr/>
         </p:nvSpPr>
         <p:spPr>
           <a:xfrm>
-            <a:off x="731520" y="5760720"/>
-            <a:ext cx="10698480" cy="365760"/>
+            <a:off x="9006840" y="3931920"/>
+            <a:ext cx="2514600" cy="548640"/>
           </a:xfrm>
           <a:prstGeom prst="rect">
             <a:avLst/>
@@ -9460,20 +9511,296 @@
               </a:spcAft>
             </a:pPr>
             <a:r>
-              <a:rPr sz="1600" b="1">
+              <a:rPr sz="1800" b="1">
                 <a:solidFill>
                   <a:srgbClr val="FFFFFF"/>
                 </a:solidFill>
                 <a:latin typeface="微软雅黑"/>
               </a:rPr>
-              <a:t>事件流 EventBus → CLI / SSE / Streamlit 实时展示</a:t>
+              <a:t>Test Agent</a:t>
             </a:r>
           </a:p>
         </p:txBody>
       </p:sp>
       <p:sp>
         <p:nvSpPr>
-          <p:cNvPr id="29" name="Rounded Rectangle 28"/>
+          <p:cNvPr id="26" name="TextBox 25"/>
+          <p:cNvSpPr txBox="1"/>
+          <p:nvPr/>
+        </p:nvSpPr>
+        <p:spPr>
+          <a:xfrm>
+            <a:off x="9006840" y="4526280"/>
+            <a:ext cx="2514600" cy="457200"/>
+          </a:xfrm>
+          <a:prstGeom prst="rect">
+            <a:avLst/>
+          </a:prstGeom>
+          <a:noFill/>
+        </p:spPr>
+        <p:txBody>
+          <a:bodyPr wrap="square" anchor="t">
+            <a:spAutoFit/>
+          </a:bodyPr>
+          <a:lstStyle/>
+          <a:p>
+            <a:pPr algn="ctr">
+              <a:lnSpc>
+                <a:spcPct val="100000"/>
+              </a:lnSpc>
+              <a:spcAft>
+                <a:spcPts val="800"/>
+              </a:spcAft>
+            </a:pPr>
+            <a:r>
+              <a:rPr sz="1300" b="0">
+                <a:solidFill>
+                  <a:srgbClr val="FF9248"/>
+                </a:solidFill>
+                <a:latin typeface="微软雅黑"/>
+              </a:rPr>
+              <a:t>自动生成测试</a:t>
+            </a:r>
+          </a:p>
+        </p:txBody>
+      </p:sp>
+      <p:cxnSp>
+        <p:nvCxnSpPr>
+          <p:cNvPr id="27" name="Connector 26"/>
+          <p:cNvCxnSpPr/>
+          <p:nvPr/>
+        </p:nvCxnSpPr>
+        <p:spPr>
+          <a:xfrm flipH="1">
+            <a:off x="1901952" y="2560320"/>
+            <a:ext cx="4178808" cy="1097280"/>
+          </a:xfrm>
+          <a:prstGeom prst="line">
+            <a:avLst/>
+          </a:prstGeom>
+          <a:ln w="19050">
+            <a:solidFill>
+              <a:srgbClr val="6E78AA"/>
+            </a:solidFill>
+          </a:ln>
+          <a:effectLst/>
+        </p:spPr>
+        <p:style>
+          <a:lnRef idx="2">
+            <a:schemeClr val="accent1"/>
+          </a:lnRef>
+          <a:fillRef idx="0">
+            <a:schemeClr val="accent1"/>
+          </a:fillRef>
+          <a:effectRef idx="1">
+            <a:schemeClr val="accent1"/>
+          </a:effectRef>
+          <a:fontRef idx="minor">
+            <a:schemeClr val="tx1"/>
+          </a:fontRef>
+        </p:style>
+      </p:cxnSp>
+      <p:cxnSp>
+        <p:nvCxnSpPr>
+          <p:cNvPr id="28" name="Connector 27"/>
+          <p:cNvCxnSpPr/>
+          <p:nvPr/>
+        </p:nvCxnSpPr>
+        <p:spPr>
+          <a:xfrm flipH="1">
+            <a:off x="4690872" y="2560320"/>
+            <a:ext cx="1389888" cy="1097280"/>
+          </a:xfrm>
+          <a:prstGeom prst="line">
+            <a:avLst/>
+          </a:prstGeom>
+          <a:ln w="19050">
+            <a:solidFill>
+              <a:srgbClr val="6E78AA"/>
+            </a:solidFill>
+          </a:ln>
+          <a:effectLst/>
+        </p:spPr>
+        <p:style>
+          <a:lnRef idx="2">
+            <a:schemeClr val="accent1"/>
+          </a:lnRef>
+          <a:fillRef idx="0">
+            <a:schemeClr val="accent1"/>
+          </a:fillRef>
+          <a:effectRef idx="1">
+            <a:schemeClr val="accent1"/>
+          </a:effectRef>
+          <a:fontRef idx="minor">
+            <a:schemeClr val="tx1"/>
+          </a:fontRef>
+        </p:style>
+      </p:cxnSp>
+      <p:cxnSp>
+        <p:nvCxnSpPr>
+          <p:cNvPr id="29" name="Connector 28"/>
+          <p:cNvCxnSpPr/>
+          <p:nvPr/>
+        </p:nvCxnSpPr>
+        <p:spPr>
+          <a:xfrm>
+            <a:off x="6080760" y="2560320"/>
+            <a:ext cx="1399032" cy="1097280"/>
+          </a:xfrm>
+          <a:prstGeom prst="line">
+            <a:avLst/>
+          </a:prstGeom>
+          <a:ln w="19050">
+            <a:solidFill>
+              <a:srgbClr val="6E78AA"/>
+            </a:solidFill>
+          </a:ln>
+          <a:effectLst/>
+        </p:spPr>
+        <p:style>
+          <a:lnRef idx="2">
+            <a:schemeClr val="accent1"/>
+          </a:lnRef>
+          <a:fillRef idx="0">
+            <a:schemeClr val="accent1"/>
+          </a:fillRef>
+          <a:effectRef idx="1">
+            <a:schemeClr val="accent1"/>
+          </a:effectRef>
+          <a:fontRef idx="minor">
+            <a:schemeClr val="tx1"/>
+          </a:fontRef>
+        </p:style>
+      </p:cxnSp>
+      <p:cxnSp>
+        <p:nvCxnSpPr>
+          <p:cNvPr id="30" name="Connector 29"/>
+          <p:cNvCxnSpPr/>
+          <p:nvPr/>
+        </p:nvCxnSpPr>
+        <p:spPr>
+          <a:xfrm>
+            <a:off x="6080760" y="2560320"/>
+            <a:ext cx="4187952" cy="1097280"/>
+          </a:xfrm>
+          <a:prstGeom prst="line">
+            <a:avLst/>
+          </a:prstGeom>
+          <a:ln w="19050">
+            <a:solidFill>
+              <a:srgbClr val="6E78AA"/>
+            </a:solidFill>
+          </a:ln>
+          <a:effectLst/>
+        </p:spPr>
+        <p:style>
+          <a:lnRef idx="2">
+            <a:schemeClr val="accent1"/>
+          </a:lnRef>
+          <a:fillRef idx="0">
+            <a:schemeClr val="accent1"/>
+          </a:fillRef>
+          <a:effectRef idx="1">
+            <a:schemeClr val="accent1"/>
+          </a:effectRef>
+          <a:fontRef idx="minor">
+            <a:schemeClr val="tx1"/>
+          </a:fontRef>
+        </p:style>
+      </p:cxnSp>
+      <p:sp>
+        <p:nvSpPr>
+          <p:cNvPr id="31" name="Rounded Rectangle 30"/>
+          <p:cNvSpPr/>
+          <p:nvPr/>
+        </p:nvSpPr>
+        <p:spPr>
+          <a:xfrm>
+            <a:off x="731520" y="5623560"/>
+            <a:ext cx="10698480" cy="640080"/>
+          </a:xfrm>
+          <a:prstGeom prst="roundRect">
+            <a:avLst>
+              <a:gd name="adj" fmla="val 30000"/>
+            </a:avLst>
+          </a:prstGeom>
+          <a:solidFill>
+            <a:srgbClr val="282B50"/>
+          </a:solidFill>
+          <a:ln w="19050">
+            <a:solidFill>
+              <a:srgbClr val="2EC4B6"/>
+            </a:solidFill>
+          </a:ln>
+          <a:effectLst/>
+        </p:spPr>
+        <p:style>
+          <a:lnRef idx="1">
+            <a:schemeClr val="accent1"/>
+          </a:lnRef>
+          <a:fillRef idx="3">
+            <a:schemeClr val="accent1"/>
+          </a:fillRef>
+          <a:effectRef idx="2">
+            <a:schemeClr val="accent1"/>
+          </a:effectRef>
+          <a:fontRef idx="minor">
+            <a:schemeClr val="lt1"/>
+          </a:fontRef>
+        </p:style>
+        <p:txBody>
+          <a:bodyPr rtlCol="0" anchor="ctr"/>
+          <a:lstStyle/>
+          <a:p>
+            <a:pPr algn="ctr"/>
+          </a:p>
+        </p:txBody>
+      </p:sp>
+      <p:sp>
+        <p:nvSpPr>
+          <p:cNvPr id="32" name="TextBox 31"/>
+          <p:cNvSpPr txBox="1"/>
+          <p:nvPr/>
+        </p:nvSpPr>
+        <p:spPr>
+          <a:xfrm>
+            <a:off x="731520" y="5760720"/>
+            <a:ext cx="10698480" cy="365760"/>
+          </a:xfrm>
+          <a:prstGeom prst="rect">
+            <a:avLst/>
+          </a:prstGeom>
+          <a:noFill/>
+        </p:spPr>
+        <p:txBody>
+          <a:bodyPr wrap="square" anchor="t">
+            <a:spAutoFit/>
+          </a:bodyPr>
+          <a:lstStyle/>
+          <a:p>
+            <a:pPr algn="ctr">
+              <a:lnSpc>
+                <a:spcPct val="100000"/>
+              </a:lnSpc>
+              <a:spcAft>
+                <a:spcPts val="800"/>
+              </a:spcAft>
+            </a:pPr>
+            <a:r>
+              <a:rPr sz="1500" b="1">
+                <a:solidFill>
+                  <a:srgbClr val="FFFFFF"/>
+                </a:solidFill>
+                <a:latin typeface="微软雅黑"/>
+              </a:rPr>
+              <a:t>事件流 EventBus 实时展示 · Test→Debug 协作回环：测试失败 → Debug 修复 → 复测</a:t>
+            </a:r>
+          </a:p>
+        </p:txBody>
+      </p:sp>
+      <p:sp>
+        <p:nvSpPr>
+          <p:cNvPr id="33" name="Rounded Rectangle 32"/>
           <p:cNvSpPr/>
           <p:nvPr/>
         </p:nvSpPr>
@@ -9519,7 +9846,7 @@
       </p:sp>
       <p:sp>
         <p:nvSpPr>
-          <p:cNvPr id="30" name="Rectangle 29"/>
+          <p:cNvPr id="34" name="Rectangle 33"/>
           <p:cNvSpPr/>
           <p:nvPr/>
         </p:nvSpPr>
@@ -9563,7 +9890,7 @@
       </p:sp>
       <p:sp>
         <p:nvSpPr>
-          <p:cNvPr id="31" name="Rectangle 30"/>
+          <p:cNvPr id="35" name="Rectangle 34"/>
           <p:cNvSpPr/>
           <p:nvPr/>
         </p:nvSpPr>
@@ -9607,7 +9934,7 @@
       </p:sp>
       <p:sp>
         <p:nvSpPr>
-          <p:cNvPr id="32" name="Rectangle 31"/>
+          <p:cNvPr id="36" name="Rectangle 35"/>
           <p:cNvSpPr/>
           <p:nvPr/>
         </p:nvSpPr>
@@ -9651,7 +9978,7 @@
       </p:sp>
       <p:sp>
         <p:nvSpPr>
-          <p:cNvPr id="33" name="Rectangle 32"/>
+          <p:cNvPr id="37" name="Rectangle 36"/>
           <p:cNvSpPr/>
           <p:nvPr/>
         </p:nvSpPr>
@@ -9695,7 +10022,7 @@
       </p:sp>
       <p:sp>
         <p:nvSpPr>
-          <p:cNvPr id="34" name="Rectangle 33"/>
+          <p:cNvPr id="38" name="Rectangle 37"/>
           <p:cNvSpPr/>
           <p:nvPr/>
         </p:nvSpPr>
@@ -9739,7 +10066,7 @@
       </p:sp>
       <p:sp>
         <p:nvSpPr>
-          <p:cNvPr id="35" name="Rectangle 34"/>
+          <p:cNvPr id="39" name="Rectangle 38"/>
           <p:cNvSpPr/>
           <p:nvPr/>
         </p:nvSpPr>
@@ -9783,7 +10110,7 @@
       </p:sp>
       <p:sp>
         <p:nvSpPr>
-          <p:cNvPr id="36" name="Rectangle 35"/>
+          <p:cNvPr id="40" name="Rectangle 39"/>
           <p:cNvSpPr/>
           <p:nvPr/>
         </p:nvSpPr>
@@ -9827,7 +10154,7 @@
       </p:sp>
       <p:sp>
         <p:nvSpPr>
-          <p:cNvPr id="37" name="Rectangle 36"/>
+          <p:cNvPr id="41" name="Rectangle 40"/>
           <p:cNvSpPr/>
           <p:nvPr/>
         </p:nvSpPr>
@@ -9871,7 +10198,7 @@
       </p:sp>
       <p:sp>
         <p:nvSpPr>
-          <p:cNvPr id="38" name="Rectangle 37"/>
+          <p:cNvPr id="42" name="Rectangle 41"/>
           <p:cNvSpPr/>
           <p:nvPr/>
         </p:nvSpPr>
@@ -9915,7 +10242,7 @@
       </p:sp>
       <p:sp>
         <p:nvSpPr>
-          <p:cNvPr id="39" name="Rectangle 38"/>
+          <p:cNvPr id="43" name="Rectangle 42"/>
           <p:cNvSpPr/>
           <p:nvPr/>
         </p:nvSpPr>
@@ -9959,7 +10286,7 @@
       </p:sp>
       <p:sp>
         <p:nvSpPr>
-          <p:cNvPr id="40" name="Rectangle 39"/>
+          <p:cNvPr id="44" name="Rectangle 43"/>
           <p:cNvSpPr/>
           <p:nvPr/>
         </p:nvSpPr>
@@ -10003,7 +10330,7 @@
       </p:sp>
       <p:sp>
         <p:nvSpPr>
-          <p:cNvPr id="41" name="Rectangle 40"/>
+          <p:cNvPr id="45" name="Rectangle 44"/>
           <p:cNvSpPr/>
           <p:nvPr/>
         </p:nvSpPr>
@@ -10047,7 +10374,7 @@
       </p:sp>
       <p:sp>
         <p:nvSpPr>
-          <p:cNvPr id="42" name="Rectangle 41"/>
+          <p:cNvPr id="46" name="Rectangle 45"/>
           <p:cNvSpPr/>
           <p:nvPr/>
         </p:nvSpPr>
@@ -10091,7 +10418,7 @@
       </p:sp>
       <p:sp>
         <p:nvSpPr>
-          <p:cNvPr id="43" name="TextBox 42"/>
+          <p:cNvPr id="47" name="TextBox 46"/>
           <p:cNvSpPr txBox="1"/>
           <p:nvPr/>
         </p:nvSpPr>
@@ -10133,7 +10460,7 @@
       </p:sp>
       <p:sp>
         <p:nvSpPr>
-          <p:cNvPr id="44" name="TextBox 43"/>
+          <p:cNvPr id="48" name="TextBox 47"/>
           <p:cNvSpPr txBox="1"/>
           <p:nvPr/>
         </p:nvSpPr>
@@ -14268,7 +14595,7 @@
                 </a:solidFill>
                 <a:latin typeface="微软雅黑"/>
               </a:rPr>
-              <a:t>成果与数据</a:t>
+              <a:t>多智能体协作与 Harness 架构</a:t>
             </a:r>
           </a:p>
         </p:txBody>
@@ -14354,7 +14681,7 @@
                 </a:solidFill>
                 <a:latin typeface="微软雅黑"/>
               </a:rPr>
-              <a:t>用数据证明项目可用</a:t>
+              <a:t>Harness 统一基础设施 · Test→Debug 协作回环</a:t>
             </a:r>
           </a:p>
         </p:txBody>
@@ -14367,11 +14694,13 @@
         </p:nvSpPr>
         <p:spPr>
           <a:xfrm>
-            <a:off x="731520" y="1737360"/>
-            <a:ext cx="5120640" cy="2286000"/>
+            <a:off x="731520" y="1645920"/>
+            <a:ext cx="5120640" cy="3931920"/>
           </a:xfrm>
           <a:prstGeom prst="roundRect">
-            <a:avLst/>
+            <a:avLst>
+              <a:gd name="adj" fmla="val 15000"/>
+            </a:avLst>
           </a:prstGeom>
           <a:solidFill>
             <a:srgbClr val="1C1E3A"/>
@@ -14413,8 +14742,8 @@
         </p:nvSpPr>
         <p:spPr>
           <a:xfrm>
-            <a:off x="1005840" y="2011679"/>
-            <a:ext cx="4572000" cy="1005840"/>
+            <a:off x="960120" y="1783080"/>
+            <a:ext cx="4663440" cy="457200"/>
           </a:xfrm>
           <a:prstGeom prst="rect">
             <a:avLst/>
@@ -14436,27 +14765,73 @@
               </a:spcAft>
             </a:pPr>
             <a:r>
-              <a:rPr sz="5000" b="1">
+              <a:rPr sz="2000" b="1">
                 <a:solidFill>
                   <a:srgbClr val="2EC4B6"/>
                 </a:solidFill>
                 <a:latin typeface="微软雅黑"/>
               </a:rPr>
-              <a:t>15</a:t>
+              <a:t>Harness 基础设施层</a:t>
             </a:r>
           </a:p>
         </p:txBody>
       </p:sp>
       <p:sp>
         <p:nvSpPr>
-          <p:cNvPr id="15" name="TextBox 14"/>
+          <p:cNvPr id="15" name="Rounded Rectangle 14"/>
+          <p:cNvSpPr/>
+          <p:nvPr/>
+        </p:nvSpPr>
+        <p:spPr>
+          <a:xfrm>
+            <a:off x="960120" y="2377440"/>
+            <a:ext cx="2286000" cy="1188720"/>
+          </a:xfrm>
+          <a:prstGeom prst="roundRect">
+            <a:avLst/>
+          </a:prstGeom>
+          <a:solidFill>
+            <a:srgbClr val="282B50"/>
+          </a:solidFill>
+          <a:ln w="19050">
+            <a:solidFill>
+              <a:srgbClr val="4A90D9"/>
+            </a:solidFill>
+          </a:ln>
+          <a:effectLst/>
+        </p:spPr>
+        <p:style>
+          <a:lnRef idx="1">
+            <a:schemeClr val="accent1"/>
+          </a:lnRef>
+          <a:fillRef idx="3">
+            <a:schemeClr val="accent1"/>
+          </a:fillRef>
+          <a:effectRef idx="2">
+            <a:schemeClr val="accent1"/>
+          </a:effectRef>
+          <a:fontRef idx="minor">
+            <a:schemeClr val="lt1"/>
+          </a:fontRef>
+        </p:style>
+        <p:txBody>
+          <a:bodyPr rtlCol="0" anchor="ctr"/>
+          <a:lstStyle/>
+          <a:p>
+            <a:pPr algn="ctr"/>
+          </a:p>
+        </p:txBody>
+      </p:sp>
+      <p:sp>
+        <p:nvSpPr>
+          <p:cNvPr id="16" name="TextBox 15"/>
           <p:cNvSpPr txBox="1"/>
           <p:nvPr/>
         </p:nvSpPr>
         <p:spPr>
           <a:xfrm>
-            <a:off x="1005840" y="2834639"/>
-            <a:ext cx="4572000" cy="548640"/>
+            <a:off x="1097280" y="2487168"/>
+            <a:ext cx="2011680" cy="365760"/>
           </a:xfrm>
           <a:prstGeom prst="rect">
             <a:avLst/>
@@ -14478,60 +14853,14 @@
               </a:spcAft>
             </a:pPr>
             <a:r>
-              <a:rPr sz="1600" b="0">
+              <a:rPr sz="1500" b="1">
                 <a:solidFill>
-                  <a:srgbClr val="FFFFFF"/>
+                  <a:srgbClr val="4A90D9"/>
                 </a:solidFill>
                 <a:latin typeface="微软雅黑"/>
               </a:rPr>
-              <a:t>pytest 测试全部通过</a:t>
+              <a:t>沙箱隔离</a:t>
             </a:r>
-          </a:p>
-        </p:txBody>
-      </p:sp>
-      <p:sp>
-        <p:nvSpPr>
-          <p:cNvPr id="16" name="Rounded Rectangle 15"/>
-          <p:cNvSpPr/>
-          <p:nvPr/>
-        </p:nvSpPr>
-        <p:spPr>
-          <a:xfrm>
-            <a:off x="6309360" y="1737360"/>
-            <a:ext cx="5120640" cy="2286000"/>
-          </a:xfrm>
-          <a:prstGeom prst="roundRect">
-            <a:avLst/>
-          </a:prstGeom>
-          <a:solidFill>
-            <a:srgbClr val="1C1E3A"/>
-          </a:solidFill>
-          <a:ln w="25400">
-            <a:solidFill>
-              <a:srgbClr val="4A90D9"/>
-            </a:solidFill>
-          </a:ln>
-          <a:effectLst/>
-        </p:spPr>
-        <p:style>
-          <a:lnRef idx="1">
-            <a:schemeClr val="accent1"/>
-          </a:lnRef>
-          <a:fillRef idx="3">
-            <a:schemeClr val="accent1"/>
-          </a:fillRef>
-          <a:effectRef idx="2">
-            <a:schemeClr val="accent1"/>
-          </a:effectRef>
-          <a:fontRef idx="minor">
-            <a:schemeClr val="lt1"/>
-          </a:fontRef>
-        </p:style>
-        <p:txBody>
-          <a:bodyPr rtlCol="0" anchor="ctr"/>
-          <a:lstStyle/>
-          <a:p>
-            <a:pPr algn="ctr"/>
           </a:p>
         </p:txBody>
       </p:sp>
@@ -14543,8 +14872,96 @@
         </p:nvSpPr>
         <p:spPr>
           <a:xfrm>
-            <a:off x="6583680" y="2011679"/>
-            <a:ext cx="4572000" cy="1005840"/>
+            <a:off x="1097280" y="2926080"/>
+            <a:ext cx="2011680" cy="566928"/>
+          </a:xfrm>
+          <a:prstGeom prst="rect">
+            <a:avLst/>
+          </a:prstGeom>
+          <a:noFill/>
+        </p:spPr>
+        <p:txBody>
+          <a:bodyPr wrap="square" anchor="t">
+            <a:spAutoFit/>
+          </a:bodyPr>
+          <a:lstStyle/>
+          <a:p>
+            <a:pPr algn="l">
+              <a:lnSpc>
+                <a:spcPct val="110000"/>
+              </a:lnSpc>
+              <a:spcAft>
+                <a:spcPts val="800"/>
+              </a:spcAft>
+            </a:pPr>
+            <a:r>
+              <a:rPr sz="1100" b="0">
+                <a:solidFill>
+                  <a:srgbClr val="A0A5BE"/>
+                </a:solidFill>
+                <a:latin typeface="微软雅黑"/>
+              </a:rPr>
+              <a:t>subprocess + 临时目录 + 超时</a:t>
+            </a:r>
+          </a:p>
+        </p:txBody>
+      </p:sp>
+      <p:sp>
+        <p:nvSpPr>
+          <p:cNvPr id="18" name="Rounded Rectangle 17"/>
+          <p:cNvSpPr/>
+          <p:nvPr/>
+        </p:nvSpPr>
+        <p:spPr>
+          <a:xfrm>
+            <a:off x="3337560" y="2377440"/>
+            <a:ext cx="2286000" cy="1188720"/>
+          </a:xfrm>
+          <a:prstGeom prst="roundRect">
+            <a:avLst/>
+          </a:prstGeom>
+          <a:solidFill>
+            <a:srgbClr val="282B50"/>
+          </a:solidFill>
+          <a:ln w="19050">
+            <a:solidFill>
+              <a:srgbClr val="9C78FF"/>
+            </a:solidFill>
+          </a:ln>
+          <a:effectLst/>
+        </p:spPr>
+        <p:style>
+          <a:lnRef idx="1">
+            <a:schemeClr val="accent1"/>
+          </a:lnRef>
+          <a:fillRef idx="3">
+            <a:schemeClr val="accent1"/>
+          </a:fillRef>
+          <a:effectRef idx="2">
+            <a:schemeClr val="accent1"/>
+          </a:effectRef>
+          <a:fontRef idx="minor">
+            <a:schemeClr val="lt1"/>
+          </a:fontRef>
+        </p:style>
+        <p:txBody>
+          <a:bodyPr rtlCol="0" anchor="ctr"/>
+          <a:lstStyle/>
+          <a:p>
+            <a:pPr algn="ctr"/>
+          </a:p>
+        </p:txBody>
+      </p:sp>
+      <p:sp>
+        <p:nvSpPr>
+          <p:cNvPr id="19" name="TextBox 18"/>
+          <p:cNvSpPr txBox="1"/>
+          <p:nvPr/>
+        </p:nvSpPr>
+        <p:spPr>
+          <a:xfrm>
+            <a:off x="3474720" y="2487168"/>
+            <a:ext cx="2011680" cy="365760"/>
           </a:xfrm>
           <a:prstGeom prst="rect">
             <a:avLst/>
@@ -14566,27 +14983,115 @@
               </a:spcAft>
             </a:pPr>
             <a:r>
-              <a:rPr sz="5000" b="1">
+              <a:rPr sz="1500" b="1">
                 <a:solidFill>
-                  <a:srgbClr val="4A90D9"/>
+                  <a:srgbClr val="9C78FF"/>
                 </a:solidFill>
                 <a:latin typeface="微软雅黑"/>
               </a:rPr>
-              <a:t>7.5s</a:t>
+              <a:t>事件总线</a:t>
             </a:r>
           </a:p>
         </p:txBody>
       </p:sp>
       <p:sp>
         <p:nvSpPr>
-          <p:cNvPr id="18" name="TextBox 17"/>
+          <p:cNvPr id="20" name="TextBox 19"/>
           <p:cNvSpPr txBox="1"/>
           <p:nvPr/>
         </p:nvSpPr>
         <p:spPr>
           <a:xfrm>
-            <a:off x="6583680" y="2834639"/>
-            <a:ext cx="4572000" cy="548640"/>
+            <a:off x="3474720" y="2926080"/>
+            <a:ext cx="2011680" cy="566928"/>
+          </a:xfrm>
+          <a:prstGeom prst="rect">
+            <a:avLst/>
+          </a:prstGeom>
+          <a:noFill/>
+        </p:spPr>
+        <p:txBody>
+          <a:bodyPr wrap="square" anchor="t">
+            <a:spAutoFit/>
+          </a:bodyPr>
+          <a:lstStyle/>
+          <a:p>
+            <a:pPr algn="l">
+              <a:lnSpc>
+                <a:spcPct val="110000"/>
+              </a:lnSpc>
+              <a:spcAft>
+                <a:spcPts val="800"/>
+              </a:spcAft>
+            </a:pPr>
+            <a:r>
+              <a:rPr sz="1100" b="0">
+                <a:solidFill>
+                  <a:srgbClr val="A0A5BE"/>
+                </a:solidFill>
+                <a:latin typeface="微软雅黑"/>
+              </a:rPr>
+              <a:t>EventBus 实时事件流</a:t>
+            </a:r>
+          </a:p>
+        </p:txBody>
+      </p:sp>
+      <p:sp>
+        <p:nvSpPr>
+          <p:cNvPr id="21" name="Rounded Rectangle 20"/>
+          <p:cNvSpPr/>
+          <p:nvPr/>
+        </p:nvSpPr>
+        <p:spPr>
+          <a:xfrm>
+            <a:off x="960120" y="3703320"/>
+            <a:ext cx="2286000" cy="1188720"/>
+          </a:xfrm>
+          <a:prstGeom prst="roundRect">
+            <a:avLst/>
+          </a:prstGeom>
+          <a:solidFill>
+            <a:srgbClr val="282B50"/>
+          </a:solidFill>
+          <a:ln w="19050">
+            <a:solidFill>
+              <a:srgbClr val="FF9248"/>
+            </a:solidFill>
+          </a:ln>
+          <a:effectLst/>
+        </p:spPr>
+        <p:style>
+          <a:lnRef idx="1">
+            <a:schemeClr val="accent1"/>
+          </a:lnRef>
+          <a:fillRef idx="3">
+            <a:schemeClr val="accent1"/>
+          </a:fillRef>
+          <a:effectRef idx="2">
+            <a:schemeClr val="accent1"/>
+          </a:effectRef>
+          <a:fontRef idx="minor">
+            <a:schemeClr val="lt1"/>
+          </a:fontRef>
+        </p:style>
+        <p:txBody>
+          <a:bodyPr rtlCol="0" anchor="ctr"/>
+          <a:lstStyle/>
+          <a:p>
+            <a:pPr algn="ctr"/>
+          </a:p>
+        </p:txBody>
+      </p:sp>
+      <p:sp>
+        <p:nvSpPr>
+          <p:cNvPr id="22" name="TextBox 21"/>
+          <p:cNvSpPr txBox="1"/>
+          <p:nvPr/>
+        </p:nvSpPr>
+        <p:spPr>
+          <a:xfrm>
+            <a:off x="1097280" y="3813048"/>
+            <a:ext cx="2011680" cy="365760"/>
           </a:xfrm>
           <a:prstGeom prst="rect">
             <a:avLst/>
@@ -14608,37 +15113,79 @@
               </a:spcAft>
             </a:pPr>
             <a:r>
-              <a:rPr sz="1600" b="0">
+              <a:rPr sz="1500" b="1">
                 <a:solidFill>
-                  <a:srgbClr val="FFFFFF"/>
+                  <a:srgbClr val="FF9248"/>
                 </a:solidFill>
                 <a:latin typeface="微软雅黑"/>
               </a:rPr>
-              <a:t>端到端真实运行耗时</a:t>
+              <a:t>工具注册</a:t>
             </a:r>
           </a:p>
         </p:txBody>
       </p:sp>
       <p:sp>
         <p:nvSpPr>
-          <p:cNvPr id="19" name="Rounded Rectangle 18"/>
-          <p:cNvSpPr/>
-          <p:nvPr/>
-        </p:nvSpPr>
-        <p:spPr>
-          <a:xfrm>
-            <a:off x="731520" y="4206240"/>
-            <a:ext cx="5120640" cy="1737360"/>
+          <p:cNvPr id="23" name="TextBox 22"/>
+          <p:cNvSpPr txBox="1"/>
+          <p:nvPr/>
+        </p:nvSpPr>
+        <p:spPr>
+          <a:xfrm>
+            <a:off x="1097280" y="4251959"/>
+            <a:ext cx="2011680" cy="566928"/>
+          </a:xfrm>
+          <a:prstGeom prst="rect">
+            <a:avLst/>
+          </a:prstGeom>
+          <a:noFill/>
+        </p:spPr>
+        <p:txBody>
+          <a:bodyPr wrap="square" anchor="t">
+            <a:spAutoFit/>
+          </a:bodyPr>
+          <a:lstStyle/>
+          <a:p>
+            <a:pPr algn="l">
+              <a:lnSpc>
+                <a:spcPct val="110000"/>
+              </a:lnSpc>
+              <a:spcAft>
+                <a:spcPts val="800"/>
+              </a:spcAft>
+            </a:pPr>
+            <a:r>
+              <a:rPr sz="1100" b="0">
+                <a:solidFill>
+                  <a:srgbClr val="A0A5BE"/>
+                </a:solidFill>
+                <a:latin typeface="微软雅黑"/>
+              </a:rPr>
+              <a:t>ToolRegistry 沙箱能力</a:t>
+            </a:r>
+          </a:p>
+        </p:txBody>
+      </p:sp>
+      <p:sp>
+        <p:nvSpPr>
+          <p:cNvPr id="24" name="Rounded Rectangle 23"/>
+          <p:cNvSpPr/>
+          <p:nvPr/>
+        </p:nvSpPr>
+        <p:spPr>
+          <a:xfrm>
+            <a:off x="3337560" y="3703320"/>
+            <a:ext cx="2286000" cy="1188720"/>
           </a:xfrm>
           <a:prstGeom prst="roundRect">
             <a:avLst/>
           </a:prstGeom>
           <a:solidFill>
-            <a:srgbClr val="1C1E3A"/>
-          </a:solidFill>
-          <a:ln w="25400">
+            <a:srgbClr val="282B50"/>
+          </a:solidFill>
+          <a:ln w="19050">
             <a:solidFill>
-              <a:srgbClr val="9C78FF"/>
+              <a:srgbClr val="FF69B4"/>
             </a:solidFill>
           </a:ln>
           <a:effectLst/>
@@ -14667,14 +15214,14 @@
       </p:sp>
       <p:sp>
         <p:nvSpPr>
-          <p:cNvPr id="20" name="TextBox 19"/>
+          <p:cNvPr id="25" name="TextBox 24"/>
           <p:cNvSpPr txBox="1"/>
           <p:nvPr/>
         </p:nvSpPr>
         <p:spPr>
           <a:xfrm>
-            <a:off x="1005840" y="4480559"/>
-            <a:ext cx="4572000" cy="1005840"/>
+            <a:off x="3474720" y="3813048"/>
+            <a:ext cx="2011680" cy="365760"/>
           </a:xfrm>
           <a:prstGeom prst="rect">
             <a:avLst/>
@@ -14696,27 +15243,69 @@
               </a:spcAft>
             </a:pPr>
             <a:r>
-              <a:rPr sz="5000" b="1">
+              <a:rPr sz="1500" b="1">
                 <a:solidFill>
-                  <a:srgbClr val="9C78FF"/>
+                  <a:srgbClr val="FF69B4"/>
                 </a:solidFill>
                 <a:latin typeface="微软雅黑"/>
               </a:rPr>
-              <a:t>100%</a:t>
+              <a:t>全局配置</a:t>
             </a:r>
           </a:p>
         </p:txBody>
       </p:sp>
       <p:sp>
         <p:nvSpPr>
-          <p:cNvPr id="21" name="TextBox 20"/>
+          <p:cNvPr id="26" name="TextBox 25"/>
           <p:cNvSpPr txBox="1"/>
           <p:nvPr/>
         </p:nvSpPr>
         <p:spPr>
           <a:xfrm>
-            <a:off x="1005840" y="5303520"/>
-            <a:ext cx="4572000" cy="548640"/>
+            <a:off x="3474720" y="4251959"/>
+            <a:ext cx="2011680" cy="566928"/>
+          </a:xfrm>
+          <a:prstGeom prst="rect">
+            <a:avLst/>
+          </a:prstGeom>
+          <a:noFill/>
+        </p:spPr>
+        <p:txBody>
+          <a:bodyPr wrap="square" anchor="t">
+            <a:spAutoFit/>
+          </a:bodyPr>
+          <a:lstStyle/>
+          <a:p>
+            <a:pPr algn="l">
+              <a:lnSpc>
+                <a:spcPct val="110000"/>
+              </a:lnSpc>
+              <a:spcAft>
+                <a:spcPts val="800"/>
+              </a:spcAft>
+            </a:pPr>
+            <a:r>
+              <a:rPr sz="1100" b="0">
+                <a:solidFill>
+                  <a:srgbClr val="A0A5BE"/>
+                </a:solidFill>
+                <a:latin typeface="微软雅黑"/>
+              </a:rPr>
+              <a:t>Key / 轮次 / 超时</a:t>
+            </a:r>
+          </a:p>
+        </p:txBody>
+      </p:sp>
+      <p:sp>
+        <p:nvSpPr>
+          <p:cNvPr id="27" name="TextBox 26"/>
+          <p:cNvSpPr txBox="1"/>
+          <p:nvPr/>
+        </p:nvSpPr>
+        <p:spPr>
+          <a:xfrm>
+            <a:off x="960120" y="4983480"/>
+            <a:ext cx="4663440" cy="274320"/>
           </a:xfrm>
           <a:prstGeom prst="rect">
             <a:avLst/>
@@ -14738,30 +15327,32 @@
               </a:spcAft>
             </a:pPr>
             <a:r>
-              <a:rPr sz="1600" b="0">
+              <a:rPr sz="1100" b="0">
                 <a:solidFill>
-                  <a:srgbClr val="FFFFFF"/>
+                  <a:srgbClr val="A0A5BE"/>
                 </a:solidFill>
                 <a:latin typeface="微软雅黑"/>
               </a:rPr>
-              <a:t>CI 全绿，推送自动验证</a:t>
+              <a:t>Agent 不再各自建资源，统一从 Harness 获取</a:t>
             </a:r>
           </a:p>
         </p:txBody>
       </p:sp>
       <p:sp>
         <p:nvSpPr>
-          <p:cNvPr id="22" name="Rounded Rectangle 21"/>
-          <p:cNvSpPr/>
-          <p:nvPr/>
-        </p:nvSpPr>
-        <p:spPr>
-          <a:xfrm>
-            <a:off x="6309360" y="4206240"/>
-            <a:ext cx="5120640" cy="1737360"/>
+          <p:cNvPr id="28" name="Rounded Rectangle 27"/>
+          <p:cNvSpPr/>
+          <p:nvPr/>
+        </p:nvSpPr>
+        <p:spPr>
+          <a:xfrm>
+            <a:off x="6309360" y="1645920"/>
+            <a:ext cx="5166360" cy="3931920"/>
           </a:xfrm>
           <a:prstGeom prst="roundRect">
-            <a:avLst/>
+            <a:avLst>
+              <a:gd name="adj" fmla="val 15000"/>
+            </a:avLst>
           </a:prstGeom>
           <a:solidFill>
             <a:srgbClr val="1C1E3A"/>
@@ -14797,14 +15388,14 @@
       </p:sp>
       <p:sp>
         <p:nvSpPr>
-          <p:cNvPr id="23" name="TextBox 22"/>
+          <p:cNvPr id="29" name="TextBox 28"/>
           <p:cNvSpPr txBox="1"/>
           <p:nvPr/>
         </p:nvSpPr>
         <p:spPr>
           <a:xfrm>
-            <a:off x="6583680" y="4480559"/>
-            <a:ext cx="4572000" cy="1005840"/>
+            <a:off x="6537960" y="1783080"/>
+            <a:ext cx="4663440" cy="457200"/>
           </a:xfrm>
           <a:prstGeom prst="rect">
             <a:avLst/>
@@ -14826,27 +15417,459 @@
               </a:spcAft>
             </a:pPr>
             <a:r>
-              <a:rPr sz="5000" b="1">
+              <a:rPr sz="2000" b="1">
                 <a:solidFill>
                   <a:srgbClr val="FF9248"/>
                 </a:solidFill>
                 <a:latin typeface="微软雅黑"/>
               </a:rPr>
-              <a:t>v1.0.0</a:t>
+              <a:t>Test→Debug 协作回环</a:t>
             </a:r>
           </a:p>
         </p:txBody>
       </p:sp>
       <p:sp>
         <p:nvSpPr>
-          <p:cNvPr id="24" name="TextBox 23"/>
+          <p:cNvPr id="30" name="Rounded Rectangle 29"/>
+          <p:cNvSpPr/>
+          <p:nvPr/>
+        </p:nvSpPr>
+        <p:spPr>
+          <a:xfrm>
+            <a:off x="6583680" y="2651760"/>
+            <a:ext cx="2011680" cy="914400"/>
+          </a:xfrm>
+          <a:prstGeom prst="roundRect">
+            <a:avLst/>
+          </a:prstGeom>
+          <a:solidFill>
+            <a:srgbClr val="282B50"/>
+          </a:solidFill>
+          <a:ln w="19050">
+            <a:solidFill>
+              <a:srgbClr val="2EC4B6"/>
+            </a:solidFill>
+          </a:ln>
+          <a:effectLst/>
+        </p:spPr>
+        <p:style>
+          <a:lnRef idx="1">
+            <a:schemeClr val="accent1"/>
+          </a:lnRef>
+          <a:fillRef idx="3">
+            <a:schemeClr val="accent1"/>
+          </a:fillRef>
+          <a:effectRef idx="2">
+            <a:schemeClr val="accent1"/>
+          </a:effectRef>
+          <a:fontRef idx="minor">
+            <a:schemeClr val="lt1"/>
+          </a:fontRef>
+        </p:style>
+        <p:txBody>
+          <a:bodyPr rtlCol="0" anchor="ctr"/>
+          <a:lstStyle/>
+          <a:p>
+            <a:pPr algn="ctr"/>
+          </a:p>
+        </p:txBody>
+      </p:sp>
+      <p:sp>
+        <p:nvSpPr>
+          <p:cNvPr id="31" name="TextBox 30"/>
           <p:cNvSpPr txBox="1"/>
           <p:nvPr/>
         </p:nvSpPr>
         <p:spPr>
           <a:xfrm>
-            <a:off x="6583680" y="5303520"/>
-            <a:ext cx="4572000" cy="548640"/>
+            <a:off x="6583680" y="2788920"/>
+            <a:ext cx="2011680" cy="411480"/>
+          </a:xfrm>
+          <a:prstGeom prst="rect">
+            <a:avLst/>
+          </a:prstGeom>
+          <a:noFill/>
+        </p:spPr>
+        <p:txBody>
+          <a:bodyPr wrap="square" anchor="t">
+            <a:spAutoFit/>
+          </a:bodyPr>
+          <a:lstStyle/>
+          <a:p>
+            <a:pPr algn="ctr">
+              <a:lnSpc>
+                <a:spcPct val="100000"/>
+              </a:lnSpc>
+              <a:spcAft>
+                <a:spcPts val="800"/>
+              </a:spcAft>
+            </a:pPr>
+            <a:r>
+              <a:rPr sz="1600" b="1">
+                <a:solidFill>
+                  <a:srgbClr val="FFFFFF"/>
+                </a:solidFill>
+                <a:latin typeface="微软雅黑"/>
+              </a:rPr>
+              <a:t>Test Agent</a:t>
+            </a:r>
+          </a:p>
+        </p:txBody>
+      </p:sp>
+      <p:sp>
+        <p:nvSpPr>
+          <p:cNvPr id="32" name="TextBox 31"/>
+          <p:cNvSpPr txBox="1"/>
+          <p:nvPr/>
+        </p:nvSpPr>
+        <p:spPr>
+          <a:xfrm>
+            <a:off x="6583680" y="3218688"/>
+            <a:ext cx="2011680" cy="320040"/>
+          </a:xfrm>
+          <a:prstGeom prst="rect">
+            <a:avLst/>
+          </a:prstGeom>
+          <a:noFill/>
+        </p:spPr>
+        <p:txBody>
+          <a:bodyPr wrap="square" anchor="t">
+            <a:spAutoFit/>
+          </a:bodyPr>
+          <a:lstStyle/>
+          <a:p>
+            <a:pPr algn="ctr">
+              <a:lnSpc>
+                <a:spcPct val="100000"/>
+              </a:lnSpc>
+              <a:spcAft>
+                <a:spcPts val="800"/>
+              </a:spcAft>
+            </a:pPr>
+            <a:r>
+              <a:rPr sz="1100" b="0">
+                <a:solidFill>
+                  <a:srgbClr val="A0A5BE"/>
+                </a:solidFill>
+                <a:latin typeface="微软雅黑"/>
+              </a:rPr>
+              <a:t>生成测试并运行</a:t>
+            </a:r>
+          </a:p>
+        </p:txBody>
+      </p:sp>
+      <p:sp>
+        <p:nvSpPr>
+          <p:cNvPr id="33" name="Rounded Rectangle 32"/>
+          <p:cNvSpPr/>
+          <p:nvPr/>
+        </p:nvSpPr>
+        <p:spPr>
+          <a:xfrm>
+            <a:off x="9144000" y="2651760"/>
+            <a:ext cx="2011680" cy="914400"/>
+          </a:xfrm>
+          <a:prstGeom prst="roundRect">
+            <a:avLst/>
+          </a:prstGeom>
+          <a:solidFill>
+            <a:srgbClr val="282B50"/>
+          </a:solidFill>
+          <a:ln w="19050">
+            <a:solidFill>
+              <a:srgbClr val="FF69B4"/>
+            </a:solidFill>
+          </a:ln>
+          <a:effectLst/>
+        </p:spPr>
+        <p:style>
+          <a:lnRef idx="1">
+            <a:schemeClr val="accent1"/>
+          </a:lnRef>
+          <a:fillRef idx="3">
+            <a:schemeClr val="accent1"/>
+          </a:fillRef>
+          <a:effectRef idx="2">
+            <a:schemeClr val="accent1"/>
+          </a:effectRef>
+          <a:fontRef idx="minor">
+            <a:schemeClr val="lt1"/>
+          </a:fontRef>
+        </p:style>
+        <p:txBody>
+          <a:bodyPr rtlCol="0" anchor="ctr"/>
+          <a:lstStyle/>
+          <a:p>
+            <a:pPr algn="ctr"/>
+          </a:p>
+        </p:txBody>
+      </p:sp>
+      <p:sp>
+        <p:nvSpPr>
+          <p:cNvPr id="34" name="TextBox 33"/>
+          <p:cNvSpPr txBox="1"/>
+          <p:nvPr/>
+        </p:nvSpPr>
+        <p:spPr>
+          <a:xfrm>
+            <a:off x="9144000" y="2788920"/>
+            <a:ext cx="2011680" cy="411480"/>
+          </a:xfrm>
+          <a:prstGeom prst="rect">
+            <a:avLst/>
+          </a:prstGeom>
+          <a:noFill/>
+        </p:spPr>
+        <p:txBody>
+          <a:bodyPr wrap="square" anchor="t">
+            <a:spAutoFit/>
+          </a:bodyPr>
+          <a:lstStyle/>
+          <a:p>
+            <a:pPr algn="ctr">
+              <a:lnSpc>
+                <a:spcPct val="100000"/>
+              </a:lnSpc>
+              <a:spcAft>
+                <a:spcPts val="800"/>
+              </a:spcAft>
+            </a:pPr>
+            <a:r>
+              <a:rPr sz="1600" b="1">
+                <a:solidFill>
+                  <a:srgbClr val="FFFFFF"/>
+                </a:solidFill>
+                <a:latin typeface="微软雅黑"/>
+              </a:rPr>
+              <a:t>Debug Agent</a:t>
+            </a:r>
+          </a:p>
+        </p:txBody>
+      </p:sp>
+      <p:sp>
+        <p:nvSpPr>
+          <p:cNvPr id="35" name="TextBox 34"/>
+          <p:cNvSpPr txBox="1"/>
+          <p:nvPr/>
+        </p:nvSpPr>
+        <p:spPr>
+          <a:xfrm>
+            <a:off x="9144000" y="3218688"/>
+            <a:ext cx="2011680" cy="320040"/>
+          </a:xfrm>
+          <a:prstGeom prst="rect">
+            <a:avLst/>
+          </a:prstGeom>
+          <a:noFill/>
+        </p:spPr>
+        <p:txBody>
+          <a:bodyPr wrap="square" anchor="t">
+            <a:spAutoFit/>
+          </a:bodyPr>
+          <a:lstStyle/>
+          <a:p>
+            <a:pPr algn="ctr">
+              <a:lnSpc>
+                <a:spcPct val="100000"/>
+              </a:lnSpc>
+              <a:spcAft>
+                <a:spcPts val="800"/>
+              </a:spcAft>
+            </a:pPr>
+            <a:r>
+              <a:rPr sz="1100" b="0">
+                <a:solidFill>
+                  <a:srgbClr val="A0A5BE"/>
+                </a:solidFill>
+                <a:latin typeface="微软雅黑"/>
+              </a:rPr>
+              <a:t>按测试输出修复</a:t>
+            </a:r>
+          </a:p>
+        </p:txBody>
+      </p:sp>
+      <p:sp>
+        <p:nvSpPr>
+          <p:cNvPr id="36" name="TextBox 35"/>
+          <p:cNvSpPr txBox="1"/>
+          <p:nvPr/>
+        </p:nvSpPr>
+        <p:spPr>
+          <a:xfrm>
+            <a:off x="6537960" y="2240280"/>
+            <a:ext cx="4846320" cy="320040"/>
+          </a:xfrm>
+          <a:prstGeom prst="rect">
+            <a:avLst/>
+          </a:prstGeom>
+          <a:noFill/>
+        </p:spPr>
+        <p:txBody>
+          <a:bodyPr wrap="square" anchor="t">
+            <a:spAutoFit/>
+          </a:bodyPr>
+          <a:lstStyle/>
+          <a:p>
+            <a:pPr algn="ctr">
+              <a:lnSpc>
+                <a:spcPct val="100000"/>
+              </a:lnSpc>
+              <a:spcAft>
+                <a:spcPts val="800"/>
+              </a:spcAft>
+            </a:pPr>
+            <a:r>
+              <a:rPr sz="1200" b="0">
+                <a:solidFill>
+                  <a:srgbClr val="2EC4B6"/>
+                </a:solidFill>
+                <a:latin typeface="微软雅黑"/>
+              </a:rPr>
+              <a:t>🔁 协作消息（EV_MSG）</a:t>
+            </a:r>
+          </a:p>
+        </p:txBody>
+      </p:sp>
+      <p:sp>
+        <p:nvSpPr>
+          <p:cNvPr id="37" name="Right Arrow 36"/>
+          <p:cNvSpPr/>
+          <p:nvPr/>
+        </p:nvSpPr>
+        <p:spPr>
+          <a:xfrm>
+            <a:off x="8595360" y="2999232"/>
+            <a:ext cx="548640" cy="256032"/>
+          </a:xfrm>
+          <a:prstGeom prst="rightArrow">
+            <a:avLst/>
+          </a:prstGeom>
+          <a:solidFill>
+            <a:srgbClr val="2EC4B6"/>
+          </a:solidFill>
+          <a:ln>
+            <a:noFill/>
+          </a:ln>
+          <a:effectLst/>
+        </p:spPr>
+        <p:style>
+          <a:lnRef idx="1">
+            <a:schemeClr val="accent1"/>
+          </a:lnRef>
+          <a:fillRef idx="3">
+            <a:schemeClr val="accent1"/>
+          </a:fillRef>
+          <a:effectRef idx="2">
+            <a:schemeClr val="accent1"/>
+          </a:effectRef>
+          <a:fontRef idx="minor">
+            <a:schemeClr val="lt1"/>
+          </a:fontRef>
+        </p:style>
+        <p:txBody>
+          <a:bodyPr rtlCol="0" anchor="ctr"/>
+          <a:lstStyle/>
+          <a:p>
+            <a:pPr algn="ctr"/>
+          </a:p>
+        </p:txBody>
+      </p:sp>
+      <p:sp>
+        <p:nvSpPr>
+          <p:cNvPr id="38" name="Left Arrow 37"/>
+          <p:cNvSpPr/>
+          <p:nvPr/>
+        </p:nvSpPr>
+        <p:spPr>
+          <a:xfrm>
+            <a:off x="8595360" y="3611880"/>
+            <a:ext cx="548640" cy="256032"/>
+          </a:xfrm>
+          <a:prstGeom prst="leftArrow">
+            <a:avLst/>
+          </a:prstGeom>
+          <a:solidFill>
+            <a:srgbClr val="FF69B4"/>
+          </a:solidFill>
+          <a:ln>
+            <a:noFill/>
+          </a:ln>
+          <a:effectLst/>
+        </p:spPr>
+        <p:style>
+          <a:lnRef idx="1">
+            <a:schemeClr val="accent1"/>
+          </a:lnRef>
+          <a:fillRef idx="3">
+            <a:schemeClr val="accent1"/>
+          </a:fillRef>
+          <a:effectRef idx="2">
+            <a:schemeClr val="accent1"/>
+          </a:effectRef>
+          <a:fontRef idx="minor">
+            <a:schemeClr val="lt1"/>
+          </a:fontRef>
+        </p:style>
+        <p:txBody>
+          <a:bodyPr rtlCol="0" anchor="ctr"/>
+          <a:lstStyle/>
+          <a:p>
+            <a:pPr algn="ctr"/>
+          </a:p>
+        </p:txBody>
+      </p:sp>
+      <p:sp>
+        <p:nvSpPr>
+          <p:cNvPr id="39" name="TextBox 38"/>
+          <p:cNvSpPr txBox="1"/>
+          <p:nvPr/>
+        </p:nvSpPr>
+        <p:spPr>
+          <a:xfrm>
+            <a:off x="6537960" y="3977639"/>
+            <a:ext cx="4846320" cy="320040"/>
+          </a:xfrm>
+          <a:prstGeom prst="rect">
+            <a:avLst/>
+          </a:prstGeom>
+          <a:noFill/>
+        </p:spPr>
+        <p:txBody>
+          <a:bodyPr wrap="square" anchor="t">
+            <a:spAutoFit/>
+          </a:bodyPr>
+          <a:lstStyle/>
+          <a:p>
+            <a:pPr algn="ctr">
+              <a:lnSpc>
+                <a:spcPct val="100000"/>
+              </a:lnSpc>
+              <a:spcAft>
+                <a:spcPts val="800"/>
+              </a:spcAft>
+            </a:pPr>
+            <a:r>
+              <a:rPr sz="1200" b="0">
+                <a:solidFill>
+                  <a:srgbClr val="FF69B4"/>
+                </a:solidFill>
+                <a:latin typeface="微软雅黑"/>
+              </a:rPr>
+              <a:t>复用同一份测试复测</a:t>
+            </a:r>
+          </a:p>
+        </p:txBody>
+      </p:sp>
+      <p:sp>
+        <p:nvSpPr>
+          <p:cNvPr id="40" name="TextBox 39"/>
+          <p:cNvSpPr txBox="1"/>
+          <p:nvPr/>
+        </p:nvSpPr>
+        <p:spPr>
+          <a:xfrm>
+            <a:off x="6537960" y="4846320"/>
+            <a:ext cx="4709160" cy="731520"/>
           </a:xfrm>
           <a:prstGeom prst="rect">
             <a:avLst/>
@@ -14868,27 +15891,46 @@
               </a:spcAft>
             </a:pPr>
             <a:r>
-              <a:rPr sz="1600" b="0">
+              <a:rPr sz="1300" b="0">
                 <a:solidFill>
                   <a:srgbClr val="FFFFFF"/>
                 </a:solidFill>
                 <a:latin typeface="微软雅黑"/>
               </a:rPr>
-              <a:t>GitHub Release 已发布</a:t>
+              <a:t>一个 Agent 发现问题，另一个 Agent 解决，</a:t>
             </a:r>
           </a:p>
-        </p:txBody>
-      </p:sp>
-      <p:sp>
-        <p:nvSpPr>
-          <p:cNvPr id="25" name="Rounded Rectangle 24"/>
-          <p:cNvSpPr/>
-          <p:nvPr/>
-        </p:nvSpPr>
-        <p:spPr>
-          <a:xfrm>
-            <a:off x="731520" y="5989320"/>
-            <a:ext cx="10698480" cy="502920"/>
+          <a:p>
+            <a:pPr algn="l">
+              <a:lnSpc>
+                <a:spcPct val="100000"/>
+              </a:lnSpc>
+              <a:spcAft>
+                <a:spcPts val="800"/>
+              </a:spcAft>
+            </a:pPr>
+            <a:r>
+              <a:rPr sz="1300" b="0">
+                <a:solidFill>
+                  <a:srgbClr val="FFFFFF"/>
+                </a:solidFill>
+                <a:latin typeface="微软雅黑"/>
+              </a:rPr>
+              <a:t>直至测试通过或达到最大回环轮次</a:t>
+            </a:r>
+          </a:p>
+        </p:txBody>
+      </p:sp>
+      <p:sp>
+        <p:nvSpPr>
+          <p:cNvPr id="41" name="Rounded Rectangle 40"/>
+          <p:cNvSpPr/>
+          <p:nvPr/>
+        </p:nvSpPr>
+        <p:spPr>
+          <a:xfrm>
+            <a:off x="731520" y="5806440"/>
+            <a:ext cx="10744200" cy="502920"/>
           </a:xfrm>
           <a:prstGeom prst="roundRect">
             <a:avLst>
@@ -14929,14 +15971,14 @@
       </p:sp>
       <p:sp>
         <p:nvSpPr>
-          <p:cNvPr id="26" name="TextBox 25"/>
+          <p:cNvPr id="42" name="TextBox 41"/>
           <p:cNvSpPr txBox="1"/>
           <p:nvPr/>
         </p:nvSpPr>
         <p:spPr>
           <a:xfrm>
-            <a:off x="731520" y="6080760"/>
-            <a:ext cx="10698480" cy="365760"/>
+            <a:off x="731520" y="5897880"/>
+            <a:ext cx="10744200" cy="365760"/>
           </a:xfrm>
           <a:prstGeom prst="rect">
             <a:avLst/>
@@ -14958,26 +16000,26 @@
               </a:spcAft>
             </a:pPr>
             <a:r>
-              <a:rPr sz="1500" b="0">
+              <a:rPr sz="1500" b="1">
                 <a:solidFill>
-                  <a:srgbClr val="FFFFFF"/>
+                  <a:srgbClr val="FFD166"/>
                 </a:solidFill>
                 <a:latin typeface="微软雅黑"/>
               </a:rPr>
-              <a:t>工程规范：MIT License · CONTRIBUTING 贡献指南 · 三种入口全部实测可用</a:t>
+              <a:t>多智能体 ≠ 流水线：Test 发现 Bug → 协作消息 → Debug 修复 → 复测通过</a:t>
             </a:r>
           </a:p>
         </p:txBody>
       </p:sp>
       <p:sp>
         <p:nvSpPr>
-          <p:cNvPr id="27" name="Rounded Rectangle 26"/>
-          <p:cNvSpPr/>
-          <p:nvPr/>
-        </p:nvSpPr>
-        <p:spPr>
-          <a:xfrm>
-            <a:off x="11521440" y="6035040"/>
+          <p:cNvPr id="43" name="Rounded Rectangle 42"/>
+          <p:cNvSpPr/>
+          <p:nvPr/>
+        </p:nvSpPr>
+        <p:spPr>
+          <a:xfrm>
+            <a:off x="11521440" y="502920"/>
             <a:ext cx="457200" cy="457200"/>
           </a:xfrm>
           <a:prstGeom prst="roundRect">
@@ -14988,7 +16030,7 @@
           </a:solidFill>
           <a:ln w="25400">
             <a:solidFill>
-              <a:srgbClr val="FF69B4"/>
+              <a:srgbClr val="2EC4B6"/>
             </a:solidFill>
           </a:ln>
           <a:effectLst/>
@@ -15017,20 +16059,20 @@
       </p:sp>
       <p:sp>
         <p:nvSpPr>
-          <p:cNvPr id="28" name="Rectangle 27"/>
-          <p:cNvSpPr/>
-          <p:nvPr/>
-        </p:nvSpPr>
-        <p:spPr>
-          <a:xfrm>
-            <a:off x="11402567" y="6126479"/>
+          <p:cNvPr id="44" name="Rectangle 43"/>
+          <p:cNvSpPr/>
+          <p:nvPr/>
+        </p:nvSpPr>
+        <p:spPr>
+          <a:xfrm>
+            <a:off x="11402567" y="594360"/>
             <a:ext cx="118872" cy="45720"/>
           </a:xfrm>
           <a:prstGeom prst="rect">
             <a:avLst/>
           </a:prstGeom>
           <a:solidFill>
-            <a:srgbClr val="FF69B4"/>
+            <a:srgbClr val="2EC4B6"/>
           </a:solidFill>
           <a:ln>
             <a:noFill/>
@@ -15061,20 +16103,20 @@
       </p:sp>
       <p:sp>
         <p:nvSpPr>
-          <p:cNvPr id="29" name="Rectangle 28"/>
-          <p:cNvSpPr/>
-          <p:nvPr/>
-        </p:nvSpPr>
-        <p:spPr>
-          <a:xfrm>
-            <a:off x="11978640" y="6126479"/>
+          <p:cNvPr id="45" name="Rectangle 44"/>
+          <p:cNvSpPr/>
+          <p:nvPr/>
+        </p:nvSpPr>
+        <p:spPr>
+          <a:xfrm>
+            <a:off x="11978640" y="594360"/>
             <a:ext cx="118872" cy="45720"/>
           </a:xfrm>
           <a:prstGeom prst="rect">
             <a:avLst/>
           </a:prstGeom>
           <a:solidFill>
-            <a:srgbClr val="FF69B4"/>
+            <a:srgbClr val="2EC4B6"/>
           </a:solidFill>
           <a:ln>
             <a:noFill/>
@@ -15105,20 +16147,20 @@
       </p:sp>
       <p:sp>
         <p:nvSpPr>
-          <p:cNvPr id="30" name="Rectangle 29"/>
-          <p:cNvSpPr/>
-          <p:nvPr/>
-        </p:nvSpPr>
-        <p:spPr>
-          <a:xfrm>
-            <a:off x="11612880" y="5916168"/>
+          <p:cNvPr id="46" name="Rectangle 45"/>
+          <p:cNvSpPr/>
+          <p:nvPr/>
+        </p:nvSpPr>
+        <p:spPr>
+          <a:xfrm>
+            <a:off x="11612880" y="384048"/>
             <a:ext cx="45720" cy="118872"/>
           </a:xfrm>
           <a:prstGeom prst="rect">
             <a:avLst/>
           </a:prstGeom>
           <a:solidFill>
-            <a:srgbClr val="FF69B4"/>
+            <a:srgbClr val="2EC4B6"/>
           </a:solidFill>
           <a:ln>
             <a:noFill/>
@@ -15149,20 +16191,20 @@
       </p:sp>
       <p:sp>
         <p:nvSpPr>
-          <p:cNvPr id="31" name="Rectangle 30"/>
-          <p:cNvSpPr/>
-          <p:nvPr/>
-        </p:nvSpPr>
-        <p:spPr>
-          <a:xfrm>
-            <a:off x="11612880" y="6492240"/>
+          <p:cNvPr id="47" name="Rectangle 46"/>
+          <p:cNvSpPr/>
+          <p:nvPr/>
+        </p:nvSpPr>
+        <p:spPr>
+          <a:xfrm>
+            <a:off x="11612880" y="960120"/>
             <a:ext cx="45720" cy="118872"/>
           </a:xfrm>
           <a:prstGeom prst="rect">
             <a:avLst/>
           </a:prstGeom>
           <a:solidFill>
-            <a:srgbClr val="FF69B4"/>
+            <a:srgbClr val="2EC4B6"/>
           </a:solidFill>
           <a:ln>
             <a:noFill/>
@@ -15193,20 +16235,20 @@
       </p:sp>
       <p:sp>
         <p:nvSpPr>
-          <p:cNvPr id="32" name="Rectangle 31"/>
-          <p:cNvSpPr/>
-          <p:nvPr/>
-        </p:nvSpPr>
-        <p:spPr>
-          <a:xfrm>
-            <a:off x="11402567" y="6263640"/>
+          <p:cNvPr id="48" name="Rectangle 47"/>
+          <p:cNvSpPr/>
+          <p:nvPr/>
+        </p:nvSpPr>
+        <p:spPr>
+          <a:xfrm>
+            <a:off x="11402567" y="731520"/>
             <a:ext cx="118872" cy="45720"/>
           </a:xfrm>
           <a:prstGeom prst="rect">
             <a:avLst/>
           </a:prstGeom>
           <a:solidFill>
-            <a:srgbClr val="FF69B4"/>
+            <a:srgbClr val="2EC4B6"/>
           </a:solidFill>
           <a:ln>
             <a:noFill/>
@@ -15237,20 +16279,20 @@
       </p:sp>
       <p:sp>
         <p:nvSpPr>
-          <p:cNvPr id="33" name="Rectangle 32"/>
-          <p:cNvSpPr/>
-          <p:nvPr/>
-        </p:nvSpPr>
-        <p:spPr>
-          <a:xfrm>
-            <a:off x="11978640" y="6263640"/>
+          <p:cNvPr id="49" name="Rectangle 48"/>
+          <p:cNvSpPr/>
+          <p:nvPr/>
+        </p:nvSpPr>
+        <p:spPr>
+          <a:xfrm>
+            <a:off x="11978640" y="731520"/>
             <a:ext cx="118872" cy="45720"/>
           </a:xfrm>
           <a:prstGeom prst="rect">
             <a:avLst/>
           </a:prstGeom>
           <a:solidFill>
-            <a:srgbClr val="FF69B4"/>
+            <a:srgbClr val="2EC4B6"/>
           </a:solidFill>
           <a:ln>
             <a:noFill/>
@@ -15281,20 +16323,20 @@
       </p:sp>
       <p:sp>
         <p:nvSpPr>
-          <p:cNvPr id="34" name="Rectangle 33"/>
-          <p:cNvSpPr/>
-          <p:nvPr/>
-        </p:nvSpPr>
-        <p:spPr>
-          <a:xfrm>
-            <a:off x="11750040" y="5916168"/>
+          <p:cNvPr id="50" name="Rectangle 49"/>
+          <p:cNvSpPr/>
+          <p:nvPr/>
+        </p:nvSpPr>
+        <p:spPr>
+          <a:xfrm>
+            <a:off x="11750040" y="384048"/>
             <a:ext cx="45720" cy="118872"/>
           </a:xfrm>
           <a:prstGeom prst="rect">
             <a:avLst/>
           </a:prstGeom>
           <a:solidFill>
-            <a:srgbClr val="FF69B4"/>
+            <a:srgbClr val="2EC4B6"/>
           </a:solidFill>
           <a:ln>
             <a:noFill/>
@@ -15325,20 +16367,20 @@
       </p:sp>
       <p:sp>
         <p:nvSpPr>
-          <p:cNvPr id="35" name="Rectangle 34"/>
-          <p:cNvSpPr/>
-          <p:nvPr/>
-        </p:nvSpPr>
-        <p:spPr>
-          <a:xfrm>
-            <a:off x="11750040" y="6492240"/>
+          <p:cNvPr id="51" name="Rectangle 50"/>
+          <p:cNvSpPr/>
+          <p:nvPr/>
+        </p:nvSpPr>
+        <p:spPr>
+          <a:xfrm>
+            <a:off x="11750040" y="960120"/>
             <a:ext cx="45720" cy="118872"/>
           </a:xfrm>
           <a:prstGeom prst="rect">
             <a:avLst/>
           </a:prstGeom>
           <a:solidFill>
-            <a:srgbClr val="FF69B4"/>
+            <a:srgbClr val="2EC4B6"/>
           </a:solidFill>
           <a:ln>
             <a:noFill/>
@@ -15369,20 +16411,20 @@
       </p:sp>
       <p:sp>
         <p:nvSpPr>
-          <p:cNvPr id="36" name="Rectangle 35"/>
-          <p:cNvSpPr/>
-          <p:nvPr/>
-        </p:nvSpPr>
-        <p:spPr>
-          <a:xfrm>
-            <a:off x="11402567" y="6400799"/>
+          <p:cNvPr id="52" name="Rectangle 51"/>
+          <p:cNvSpPr/>
+          <p:nvPr/>
+        </p:nvSpPr>
+        <p:spPr>
+          <a:xfrm>
+            <a:off x="11402567" y="868680"/>
             <a:ext cx="118872" cy="45720"/>
           </a:xfrm>
           <a:prstGeom prst="rect">
             <a:avLst/>
           </a:prstGeom>
           <a:solidFill>
-            <a:srgbClr val="FF69B4"/>
+            <a:srgbClr val="2EC4B6"/>
           </a:solidFill>
           <a:ln>
             <a:noFill/>
@@ -15413,20 +16455,20 @@
       </p:sp>
       <p:sp>
         <p:nvSpPr>
-          <p:cNvPr id="37" name="Rectangle 36"/>
-          <p:cNvSpPr/>
-          <p:nvPr/>
-        </p:nvSpPr>
-        <p:spPr>
-          <a:xfrm>
-            <a:off x="11978640" y="6400799"/>
+          <p:cNvPr id="53" name="Rectangle 52"/>
+          <p:cNvSpPr/>
+          <p:nvPr/>
+        </p:nvSpPr>
+        <p:spPr>
+          <a:xfrm>
+            <a:off x="11978640" y="868680"/>
             <a:ext cx="118872" cy="45720"/>
           </a:xfrm>
           <a:prstGeom prst="rect">
             <a:avLst/>
           </a:prstGeom>
           <a:solidFill>
-            <a:srgbClr val="FF69B4"/>
+            <a:srgbClr val="2EC4B6"/>
           </a:solidFill>
           <a:ln>
             <a:noFill/>
@@ -15457,20 +16499,20 @@
       </p:sp>
       <p:sp>
         <p:nvSpPr>
-          <p:cNvPr id="38" name="Rectangle 37"/>
-          <p:cNvSpPr/>
-          <p:nvPr/>
-        </p:nvSpPr>
-        <p:spPr>
-          <a:xfrm>
-            <a:off x="11887200" y="5916168"/>
+          <p:cNvPr id="54" name="Rectangle 53"/>
+          <p:cNvSpPr/>
+          <p:nvPr/>
+        </p:nvSpPr>
+        <p:spPr>
+          <a:xfrm>
+            <a:off x="11887200" y="384048"/>
             <a:ext cx="45720" cy="118872"/>
           </a:xfrm>
           <a:prstGeom prst="rect">
             <a:avLst/>
           </a:prstGeom>
           <a:solidFill>
-            <a:srgbClr val="FF69B4"/>
+            <a:srgbClr val="2EC4B6"/>
           </a:solidFill>
           <a:ln>
             <a:noFill/>
@@ -15501,20 +16543,20 @@
       </p:sp>
       <p:sp>
         <p:nvSpPr>
-          <p:cNvPr id="39" name="Rectangle 38"/>
-          <p:cNvSpPr/>
-          <p:nvPr/>
-        </p:nvSpPr>
-        <p:spPr>
-          <a:xfrm>
-            <a:off x="11887200" y="6492240"/>
+          <p:cNvPr id="55" name="Rectangle 54"/>
+          <p:cNvSpPr/>
+          <p:nvPr/>
+        </p:nvSpPr>
+        <p:spPr>
+          <a:xfrm>
+            <a:off x="11887200" y="960120"/>
             <a:ext cx="45720" cy="118872"/>
           </a:xfrm>
           <a:prstGeom prst="rect">
             <a:avLst/>
           </a:prstGeom>
           <a:solidFill>
-            <a:srgbClr val="FF69B4"/>
+            <a:srgbClr val="2EC4B6"/>
           </a:solidFill>
           <a:ln>
             <a:noFill/>
@@ -15545,7 +16587,7 @@
       </p:sp>
       <p:sp>
         <p:nvSpPr>
-          <p:cNvPr id="40" name="Rectangle 39"/>
+          <p:cNvPr id="56" name="Rectangle 55"/>
           <p:cNvSpPr/>
           <p:nvPr/>
         </p:nvSpPr>
@@ -15589,7 +16631,7 @@
       </p:sp>
       <p:sp>
         <p:nvSpPr>
-          <p:cNvPr id="41" name="TextBox 40"/>
+          <p:cNvPr id="57" name="TextBox 56"/>
           <p:cNvSpPr txBox="1"/>
           <p:nvPr/>
         </p:nvSpPr>
@@ -15624,14 +16666,14 @@
                 </a:solidFill>
                 <a:latin typeface="微软雅黑"/>
               </a:rPr>
-              <a:t>成果与数据</a:t>
+              <a:t>多智能体协作与 Harness</a:t>
             </a:r>
           </a:p>
         </p:txBody>
       </p:sp>
       <p:sp>
         <p:nvSpPr>
-          <p:cNvPr id="42" name="TextBox 41"/>
+          <p:cNvPr id="58" name="TextBox 57"/>
           <p:cNvSpPr txBox="1"/>
           <p:nvPr/>
         </p:nvSpPr>
@@ -15749,6 +16791,1824 @@
         </p:nvSpPr>
         <p:spPr>
           <a:xfrm>
+            <a:off x="11415127" y="6162620"/>
+            <a:ext cx="73152" cy="73152"/>
+          </a:xfrm>
+          <a:prstGeom prst="ellipse">
+            <a:avLst/>
+          </a:prstGeom>
+          <a:solidFill>
+            <a:srgbClr val="FF9248"/>
+          </a:solidFill>
+          <a:ln>
+            <a:noFill/>
+          </a:ln>
+          <a:effectLst/>
+        </p:spPr>
+        <p:style>
+          <a:lnRef idx="1">
+            <a:schemeClr val="accent1"/>
+          </a:lnRef>
+          <a:fillRef idx="3">
+            <a:schemeClr val="accent1"/>
+          </a:fillRef>
+          <a:effectRef idx="2">
+            <a:schemeClr val="accent1"/>
+          </a:effectRef>
+          <a:fontRef idx="minor">
+            <a:schemeClr val="lt1"/>
+          </a:fontRef>
+        </p:style>
+        <p:txBody>
+          <a:bodyPr rtlCol="0" anchor="ctr"/>
+          <a:lstStyle/>
+          <a:p>
+            <a:pPr algn="ctr"/>
+          </a:p>
+        </p:txBody>
+      </p:sp>
+      <p:sp>
+        <p:nvSpPr>
+          <p:cNvPr id="4" name="Oval 3"/>
+          <p:cNvSpPr/>
+          <p:nvPr/>
+        </p:nvSpPr>
+        <p:spPr>
+          <a:xfrm>
+            <a:off x="10410034" y="5945341"/>
+            <a:ext cx="73152" cy="73152"/>
+          </a:xfrm>
+          <a:prstGeom prst="ellipse">
+            <a:avLst/>
+          </a:prstGeom>
+          <a:solidFill>
+            <a:srgbClr val="9C78FF"/>
+          </a:solidFill>
+          <a:ln>
+            <a:noFill/>
+          </a:ln>
+          <a:effectLst/>
+        </p:spPr>
+        <p:style>
+          <a:lnRef idx="1">
+            <a:schemeClr val="accent1"/>
+          </a:lnRef>
+          <a:fillRef idx="3">
+            <a:schemeClr val="accent1"/>
+          </a:fillRef>
+          <a:effectRef idx="2">
+            <a:schemeClr val="accent1"/>
+          </a:effectRef>
+          <a:fontRef idx="minor">
+            <a:schemeClr val="lt1"/>
+          </a:fontRef>
+        </p:style>
+        <p:txBody>
+          <a:bodyPr rtlCol="0" anchor="ctr"/>
+          <a:lstStyle/>
+          <a:p>
+            <a:pPr algn="ctr"/>
+          </a:p>
+        </p:txBody>
+      </p:sp>
+      <p:sp>
+        <p:nvSpPr>
+          <p:cNvPr id="5" name="Oval 4"/>
+          <p:cNvSpPr/>
+          <p:nvPr/>
+        </p:nvSpPr>
+        <p:spPr>
+          <a:xfrm>
+            <a:off x="10964895" y="6338448"/>
+            <a:ext cx="73152" cy="73152"/>
+          </a:xfrm>
+          <a:prstGeom prst="ellipse">
+            <a:avLst/>
+          </a:prstGeom>
+          <a:solidFill>
+            <a:srgbClr val="FF9248"/>
+          </a:solidFill>
+          <a:ln>
+            <a:noFill/>
+          </a:ln>
+          <a:effectLst/>
+        </p:spPr>
+        <p:style>
+          <a:lnRef idx="1">
+            <a:schemeClr val="accent1"/>
+          </a:lnRef>
+          <a:fillRef idx="3">
+            <a:schemeClr val="accent1"/>
+          </a:fillRef>
+          <a:effectRef idx="2">
+            <a:schemeClr val="accent1"/>
+          </a:effectRef>
+          <a:fontRef idx="minor">
+            <a:schemeClr val="lt1"/>
+          </a:fontRef>
+        </p:style>
+        <p:txBody>
+          <a:bodyPr rtlCol="0" anchor="ctr"/>
+          <a:lstStyle/>
+          <a:p>
+            <a:pPr algn="ctr"/>
+          </a:p>
+        </p:txBody>
+      </p:sp>
+      <p:sp>
+        <p:nvSpPr>
+          <p:cNvPr id="6" name="Oval 5"/>
+          <p:cNvSpPr/>
+          <p:nvPr/>
+        </p:nvSpPr>
+        <p:spPr>
+          <a:xfrm>
+            <a:off x="10771759" y="5866171"/>
+            <a:ext cx="73152" cy="73152"/>
+          </a:xfrm>
+          <a:prstGeom prst="ellipse">
+            <a:avLst/>
+          </a:prstGeom>
+          <a:solidFill>
+            <a:srgbClr val="9C78FF"/>
+          </a:solidFill>
+          <a:ln>
+            <a:noFill/>
+          </a:ln>
+          <a:effectLst/>
+        </p:spPr>
+        <p:style>
+          <a:lnRef idx="1">
+            <a:schemeClr val="accent1"/>
+          </a:lnRef>
+          <a:fillRef idx="3">
+            <a:schemeClr val="accent1"/>
+          </a:fillRef>
+          <a:effectRef idx="2">
+            <a:schemeClr val="accent1"/>
+          </a:effectRef>
+          <a:fontRef idx="minor">
+            <a:schemeClr val="lt1"/>
+          </a:fontRef>
+        </p:style>
+        <p:txBody>
+          <a:bodyPr rtlCol="0" anchor="ctr"/>
+          <a:lstStyle/>
+          <a:p>
+            <a:pPr algn="ctr"/>
+          </a:p>
+        </p:txBody>
+      </p:sp>
+      <p:sp>
+        <p:nvSpPr>
+          <p:cNvPr id="7" name="Oval 6"/>
+          <p:cNvSpPr/>
+          <p:nvPr/>
+        </p:nvSpPr>
+        <p:spPr>
+          <a:xfrm>
+            <a:off x="11389475" y="6319306"/>
+            <a:ext cx="73152" cy="73152"/>
+          </a:xfrm>
+          <a:prstGeom prst="ellipse">
+            <a:avLst/>
+          </a:prstGeom>
+          <a:solidFill>
+            <a:srgbClr val="FF69B4"/>
+          </a:solidFill>
+          <a:ln>
+            <a:noFill/>
+          </a:ln>
+          <a:effectLst/>
+        </p:spPr>
+        <p:style>
+          <a:lnRef idx="1">
+            <a:schemeClr val="accent1"/>
+          </a:lnRef>
+          <a:fillRef idx="3">
+            <a:schemeClr val="accent1"/>
+          </a:fillRef>
+          <a:effectRef idx="2">
+            <a:schemeClr val="accent1"/>
+          </a:effectRef>
+          <a:fontRef idx="minor">
+            <a:schemeClr val="lt1"/>
+          </a:fontRef>
+        </p:style>
+        <p:txBody>
+          <a:bodyPr rtlCol="0" anchor="ctr"/>
+          <a:lstStyle/>
+          <a:p>
+            <a:pPr algn="ctr"/>
+          </a:p>
+        </p:txBody>
+      </p:sp>
+      <p:sp>
+        <p:nvSpPr>
+          <p:cNvPr id="8" name="Oval 7"/>
+          <p:cNvSpPr/>
+          <p:nvPr/>
+        </p:nvSpPr>
+        <p:spPr>
+          <a:xfrm>
+            <a:off x="11528573" y="6197323"/>
+            <a:ext cx="73152" cy="73152"/>
+          </a:xfrm>
+          <a:prstGeom prst="ellipse">
+            <a:avLst/>
+          </a:prstGeom>
+          <a:solidFill>
+            <a:srgbClr val="FF69B4"/>
+          </a:solidFill>
+          <a:ln>
+            <a:noFill/>
+          </a:ln>
+          <a:effectLst/>
+        </p:spPr>
+        <p:style>
+          <a:lnRef idx="1">
+            <a:schemeClr val="accent1"/>
+          </a:lnRef>
+          <a:fillRef idx="3">
+            <a:schemeClr val="accent1"/>
+          </a:fillRef>
+          <a:effectRef idx="2">
+            <a:schemeClr val="accent1"/>
+          </a:effectRef>
+          <a:fontRef idx="minor">
+            <a:schemeClr val="lt1"/>
+          </a:fontRef>
+        </p:style>
+        <p:txBody>
+          <a:bodyPr rtlCol="0" anchor="ctr"/>
+          <a:lstStyle/>
+          <a:p>
+            <a:pPr algn="ctr"/>
+          </a:p>
+        </p:txBody>
+      </p:sp>
+      <p:sp>
+        <p:nvSpPr>
+          <p:cNvPr id="9" name="Rectangle 8"/>
+          <p:cNvSpPr/>
+          <p:nvPr/>
+        </p:nvSpPr>
+        <p:spPr>
+          <a:xfrm>
+            <a:off x="0" y="6309360"/>
+            <a:ext cx="12191695" cy="27432"/>
+          </a:xfrm>
+          <a:prstGeom prst="rect">
+            <a:avLst/>
+          </a:prstGeom>
+          <a:solidFill>
+            <a:srgbClr val="3C416E"/>
+          </a:solidFill>
+          <a:ln>
+            <a:noFill/>
+          </a:ln>
+          <a:effectLst/>
+        </p:spPr>
+        <p:style>
+          <a:lnRef idx="1">
+            <a:schemeClr val="accent1"/>
+          </a:lnRef>
+          <a:fillRef idx="3">
+            <a:schemeClr val="accent1"/>
+          </a:fillRef>
+          <a:effectRef idx="2">
+            <a:schemeClr val="accent1"/>
+          </a:effectRef>
+          <a:fontRef idx="minor">
+            <a:schemeClr val="lt1"/>
+          </a:fontRef>
+        </p:style>
+        <p:txBody>
+          <a:bodyPr rtlCol="0" anchor="ctr"/>
+          <a:lstStyle/>
+          <a:p>
+            <a:pPr algn="ctr"/>
+          </a:p>
+        </p:txBody>
+      </p:sp>
+      <p:sp>
+        <p:nvSpPr>
+          <p:cNvPr id="10" name="TextBox 9"/>
+          <p:cNvSpPr txBox="1"/>
+          <p:nvPr/>
+        </p:nvSpPr>
+        <p:spPr>
+          <a:xfrm>
+            <a:off x="731520" y="411480"/>
+            <a:ext cx="10698480" cy="914400"/>
+          </a:xfrm>
+          <a:prstGeom prst="rect">
+            <a:avLst/>
+          </a:prstGeom>
+          <a:noFill/>
+        </p:spPr>
+        <p:txBody>
+          <a:bodyPr wrap="square" anchor="t">
+            <a:spAutoFit/>
+          </a:bodyPr>
+          <a:lstStyle/>
+          <a:p>
+            <a:pPr algn="l">
+              <a:lnSpc>
+                <a:spcPct val="100000"/>
+              </a:lnSpc>
+              <a:spcAft>
+                <a:spcPts val="800"/>
+              </a:spcAft>
+            </a:pPr>
+            <a:r>
+              <a:rPr sz="3400" b="1">
+                <a:solidFill>
+                  <a:srgbClr val="FFFFFF"/>
+                </a:solidFill>
+                <a:latin typeface="微软雅黑"/>
+              </a:rPr>
+              <a:t>成果与数据</a:t>
+            </a:r>
+          </a:p>
+        </p:txBody>
+      </p:sp>
+      <p:sp>
+        <p:nvSpPr>
+          <p:cNvPr id="11" name="Rounded Rectangle 10"/>
+          <p:cNvSpPr/>
+          <p:nvPr/>
+        </p:nvSpPr>
+        <p:spPr>
+          <a:xfrm>
+            <a:off x="777240" y="1234440"/>
+            <a:ext cx="2011680" cy="45720"/>
+          </a:xfrm>
+          <a:prstGeom prst="roundRect">
+            <a:avLst/>
+          </a:prstGeom>
+          <a:solidFill>
+            <a:srgbClr val="2EC4B6"/>
+          </a:solidFill>
+          <a:ln>
+            <a:noFill/>
+          </a:ln>
+          <a:effectLst/>
+        </p:spPr>
+        <p:style>
+          <a:lnRef idx="1">
+            <a:schemeClr val="accent1"/>
+          </a:lnRef>
+          <a:fillRef idx="3">
+            <a:schemeClr val="accent1"/>
+          </a:fillRef>
+          <a:effectRef idx="2">
+            <a:schemeClr val="accent1"/>
+          </a:effectRef>
+          <a:fontRef idx="minor">
+            <a:schemeClr val="lt1"/>
+          </a:fontRef>
+        </p:style>
+        <p:txBody>
+          <a:bodyPr rtlCol="0" anchor="ctr"/>
+          <a:lstStyle/>
+          <a:p>
+            <a:pPr algn="ctr"/>
+          </a:p>
+        </p:txBody>
+      </p:sp>
+      <p:sp>
+        <p:nvSpPr>
+          <p:cNvPr id="12" name="TextBox 11"/>
+          <p:cNvSpPr txBox="1"/>
+          <p:nvPr/>
+        </p:nvSpPr>
+        <p:spPr>
+          <a:xfrm>
+            <a:off x="2926080" y="1097280"/>
+            <a:ext cx="8595360" cy="365760"/>
+          </a:xfrm>
+          <a:prstGeom prst="rect">
+            <a:avLst/>
+          </a:prstGeom>
+          <a:noFill/>
+        </p:spPr>
+        <p:txBody>
+          <a:bodyPr wrap="square" anchor="t">
+            <a:spAutoFit/>
+          </a:bodyPr>
+          <a:lstStyle/>
+          <a:p>
+            <a:pPr algn="l">
+              <a:lnSpc>
+                <a:spcPct val="100000"/>
+              </a:lnSpc>
+              <a:spcAft>
+                <a:spcPts val="800"/>
+              </a:spcAft>
+            </a:pPr>
+            <a:r>
+              <a:rPr sz="1300" b="0">
+                <a:solidFill>
+                  <a:srgbClr val="A0A5BE"/>
+                </a:solidFill>
+                <a:latin typeface="微软雅黑"/>
+              </a:rPr>
+              <a:t>用数据证明项目可用</a:t>
+            </a:r>
+          </a:p>
+        </p:txBody>
+      </p:sp>
+      <p:sp>
+        <p:nvSpPr>
+          <p:cNvPr id="13" name="Rounded Rectangle 12"/>
+          <p:cNvSpPr/>
+          <p:nvPr/>
+        </p:nvSpPr>
+        <p:spPr>
+          <a:xfrm>
+            <a:off x="731520" y="1737360"/>
+            <a:ext cx="5120640" cy="2286000"/>
+          </a:xfrm>
+          <a:prstGeom prst="roundRect">
+            <a:avLst/>
+          </a:prstGeom>
+          <a:solidFill>
+            <a:srgbClr val="1C1E3A"/>
+          </a:solidFill>
+          <a:ln w="25400">
+            <a:solidFill>
+              <a:srgbClr val="2EC4B6"/>
+            </a:solidFill>
+          </a:ln>
+          <a:effectLst/>
+        </p:spPr>
+        <p:style>
+          <a:lnRef idx="1">
+            <a:schemeClr val="accent1"/>
+          </a:lnRef>
+          <a:fillRef idx="3">
+            <a:schemeClr val="accent1"/>
+          </a:fillRef>
+          <a:effectRef idx="2">
+            <a:schemeClr val="accent1"/>
+          </a:effectRef>
+          <a:fontRef idx="minor">
+            <a:schemeClr val="lt1"/>
+          </a:fontRef>
+        </p:style>
+        <p:txBody>
+          <a:bodyPr rtlCol="0" anchor="ctr"/>
+          <a:lstStyle/>
+          <a:p>
+            <a:pPr algn="ctr"/>
+          </a:p>
+        </p:txBody>
+      </p:sp>
+      <p:sp>
+        <p:nvSpPr>
+          <p:cNvPr id="14" name="TextBox 13"/>
+          <p:cNvSpPr txBox="1"/>
+          <p:nvPr/>
+        </p:nvSpPr>
+        <p:spPr>
+          <a:xfrm>
+            <a:off x="1005840" y="2011679"/>
+            <a:ext cx="4572000" cy="822960"/>
+          </a:xfrm>
+          <a:prstGeom prst="rect">
+            <a:avLst/>
+          </a:prstGeom>
+          <a:noFill/>
+        </p:spPr>
+        <p:txBody>
+          <a:bodyPr wrap="square" anchor="t">
+            <a:spAutoFit/>
+          </a:bodyPr>
+          <a:lstStyle/>
+          <a:p>
+            <a:pPr algn="l">
+              <a:lnSpc>
+                <a:spcPct val="100000"/>
+              </a:lnSpc>
+              <a:spcAft>
+                <a:spcPts val="800"/>
+              </a:spcAft>
+            </a:pPr>
+            <a:r>
+              <a:rPr sz="5000" b="1">
+                <a:solidFill>
+                  <a:srgbClr val="2EC4B6"/>
+                </a:solidFill>
+                <a:latin typeface="微软雅黑"/>
+              </a:rPr>
+              <a:t>25</a:t>
+            </a:r>
+          </a:p>
+        </p:txBody>
+      </p:sp>
+      <p:sp>
+        <p:nvSpPr>
+          <p:cNvPr id="15" name="TextBox 14"/>
+          <p:cNvSpPr txBox="1"/>
+          <p:nvPr/>
+        </p:nvSpPr>
+        <p:spPr>
+          <a:xfrm>
+            <a:off x="1005840" y="2834639"/>
+            <a:ext cx="4572000" cy="548640"/>
+          </a:xfrm>
+          <a:prstGeom prst="rect">
+            <a:avLst/>
+          </a:prstGeom>
+          <a:noFill/>
+        </p:spPr>
+        <p:txBody>
+          <a:bodyPr wrap="square" anchor="t">
+            <a:spAutoFit/>
+          </a:bodyPr>
+          <a:lstStyle/>
+          <a:p>
+            <a:pPr algn="l">
+              <a:lnSpc>
+                <a:spcPct val="100000"/>
+              </a:lnSpc>
+              <a:spcAft>
+                <a:spcPts val="800"/>
+              </a:spcAft>
+            </a:pPr>
+            <a:r>
+              <a:rPr sz="1600" b="0">
+                <a:solidFill>
+                  <a:srgbClr val="FFFFFF"/>
+                </a:solidFill>
+                <a:latin typeface="微软雅黑"/>
+              </a:rPr>
+              <a:t>pytest 测试全部通过</a:t>
+            </a:r>
+          </a:p>
+        </p:txBody>
+      </p:sp>
+      <p:sp>
+        <p:nvSpPr>
+          <p:cNvPr id="16" name="Rounded Rectangle 15"/>
+          <p:cNvSpPr/>
+          <p:nvPr/>
+        </p:nvSpPr>
+        <p:spPr>
+          <a:xfrm>
+            <a:off x="6309360" y="1737360"/>
+            <a:ext cx="5120640" cy="2286000"/>
+          </a:xfrm>
+          <a:prstGeom prst="roundRect">
+            <a:avLst/>
+          </a:prstGeom>
+          <a:solidFill>
+            <a:srgbClr val="1C1E3A"/>
+          </a:solidFill>
+          <a:ln w="25400">
+            <a:solidFill>
+              <a:srgbClr val="4A90D9"/>
+            </a:solidFill>
+          </a:ln>
+          <a:effectLst/>
+        </p:spPr>
+        <p:style>
+          <a:lnRef idx="1">
+            <a:schemeClr val="accent1"/>
+          </a:lnRef>
+          <a:fillRef idx="3">
+            <a:schemeClr val="accent1"/>
+          </a:fillRef>
+          <a:effectRef idx="2">
+            <a:schemeClr val="accent1"/>
+          </a:effectRef>
+          <a:fontRef idx="minor">
+            <a:schemeClr val="lt1"/>
+          </a:fontRef>
+        </p:style>
+        <p:txBody>
+          <a:bodyPr rtlCol="0" anchor="ctr"/>
+          <a:lstStyle/>
+          <a:p>
+            <a:pPr algn="ctr"/>
+          </a:p>
+        </p:txBody>
+      </p:sp>
+      <p:sp>
+        <p:nvSpPr>
+          <p:cNvPr id="17" name="TextBox 16"/>
+          <p:cNvSpPr txBox="1"/>
+          <p:nvPr/>
+        </p:nvSpPr>
+        <p:spPr>
+          <a:xfrm>
+            <a:off x="6583680" y="2011679"/>
+            <a:ext cx="4572000" cy="822960"/>
+          </a:xfrm>
+          <a:prstGeom prst="rect">
+            <a:avLst/>
+          </a:prstGeom>
+          <a:noFill/>
+        </p:spPr>
+        <p:txBody>
+          <a:bodyPr wrap="square" anchor="t">
+            <a:spAutoFit/>
+          </a:bodyPr>
+          <a:lstStyle/>
+          <a:p>
+            <a:pPr algn="l">
+              <a:lnSpc>
+                <a:spcPct val="100000"/>
+              </a:lnSpc>
+              <a:spcAft>
+                <a:spcPts val="800"/>
+              </a:spcAft>
+            </a:pPr>
+            <a:r>
+              <a:rPr sz="5000" b="1">
+                <a:solidFill>
+                  <a:srgbClr val="4A90D9"/>
+                </a:solidFill>
+                <a:latin typeface="微软雅黑"/>
+              </a:rPr>
+              <a:t>10/10</a:t>
+            </a:r>
+          </a:p>
+        </p:txBody>
+      </p:sp>
+      <p:sp>
+        <p:nvSpPr>
+          <p:cNvPr id="18" name="TextBox 17"/>
+          <p:cNvSpPr txBox="1"/>
+          <p:nvPr/>
+        </p:nvSpPr>
+        <p:spPr>
+          <a:xfrm>
+            <a:off x="6583680" y="2834639"/>
+            <a:ext cx="4572000" cy="548640"/>
+          </a:xfrm>
+          <a:prstGeom prst="rect">
+            <a:avLst/>
+          </a:prstGeom>
+          <a:noFill/>
+        </p:spPr>
+        <p:txBody>
+          <a:bodyPr wrap="square" anchor="t">
+            <a:spAutoFit/>
+          </a:bodyPr>
+          <a:lstStyle/>
+          <a:p>
+            <a:pPr algn="l">
+              <a:lnSpc>
+                <a:spcPct val="100000"/>
+              </a:lnSpc>
+              <a:spcAft>
+                <a:spcPts val="800"/>
+              </a:spcAft>
+            </a:pPr>
+            <a:r>
+              <a:rPr sz="1600" b="0">
+                <a:solidFill>
+                  <a:srgbClr val="FFFFFF"/>
+                </a:solidFill>
+                <a:latin typeface="微软雅黑"/>
+              </a:rPr>
+              <a:t>Benchmark 任务结果正确</a:t>
+            </a:r>
+          </a:p>
+        </p:txBody>
+      </p:sp>
+      <p:sp>
+        <p:nvSpPr>
+          <p:cNvPr id="19" name="Rounded Rectangle 18"/>
+          <p:cNvSpPr/>
+          <p:nvPr/>
+        </p:nvSpPr>
+        <p:spPr>
+          <a:xfrm>
+            <a:off x="731520" y="4206240"/>
+            <a:ext cx="5120640" cy="1737360"/>
+          </a:xfrm>
+          <a:prstGeom prst="roundRect">
+            <a:avLst/>
+          </a:prstGeom>
+          <a:solidFill>
+            <a:srgbClr val="1C1E3A"/>
+          </a:solidFill>
+          <a:ln w="25400">
+            <a:solidFill>
+              <a:srgbClr val="FF69B4"/>
+            </a:solidFill>
+          </a:ln>
+          <a:effectLst/>
+        </p:spPr>
+        <p:style>
+          <a:lnRef idx="1">
+            <a:schemeClr val="accent1"/>
+          </a:lnRef>
+          <a:fillRef idx="3">
+            <a:schemeClr val="accent1"/>
+          </a:fillRef>
+          <a:effectRef idx="2">
+            <a:schemeClr val="accent1"/>
+          </a:effectRef>
+          <a:fontRef idx="minor">
+            <a:schemeClr val="lt1"/>
+          </a:fontRef>
+        </p:style>
+        <p:txBody>
+          <a:bodyPr rtlCol="0" anchor="ctr"/>
+          <a:lstStyle/>
+          <a:p>
+            <a:pPr algn="ctr"/>
+          </a:p>
+        </p:txBody>
+      </p:sp>
+      <p:sp>
+        <p:nvSpPr>
+          <p:cNvPr id="20" name="TextBox 19"/>
+          <p:cNvSpPr txBox="1"/>
+          <p:nvPr/>
+        </p:nvSpPr>
+        <p:spPr>
+          <a:xfrm>
+            <a:off x="1005840" y="4480559"/>
+            <a:ext cx="4572000" cy="822960"/>
+          </a:xfrm>
+          <a:prstGeom prst="rect">
+            <a:avLst/>
+          </a:prstGeom>
+          <a:noFill/>
+        </p:spPr>
+        <p:txBody>
+          <a:bodyPr wrap="square" anchor="t">
+            <a:spAutoFit/>
+          </a:bodyPr>
+          <a:lstStyle/>
+          <a:p>
+            <a:pPr algn="l">
+              <a:lnSpc>
+                <a:spcPct val="100000"/>
+              </a:lnSpc>
+              <a:spcAft>
+                <a:spcPts val="800"/>
+              </a:spcAft>
+            </a:pPr>
+            <a:r>
+              <a:rPr sz="5000" b="1">
+                <a:solidFill>
+                  <a:srgbClr val="FF69B4"/>
+                </a:solidFill>
+                <a:latin typeface="微软雅黑"/>
+              </a:rPr>
+              <a:t>9/10</a:t>
+            </a:r>
+          </a:p>
+        </p:txBody>
+      </p:sp>
+      <p:sp>
+        <p:nvSpPr>
+          <p:cNvPr id="21" name="TextBox 20"/>
+          <p:cNvSpPr txBox="1"/>
+          <p:nvPr/>
+        </p:nvSpPr>
+        <p:spPr>
+          <a:xfrm>
+            <a:off x="1005840" y="5303520"/>
+            <a:ext cx="4572000" cy="548640"/>
+          </a:xfrm>
+          <a:prstGeom prst="rect">
+            <a:avLst/>
+          </a:prstGeom>
+          <a:noFill/>
+        </p:spPr>
+        <p:txBody>
+          <a:bodyPr wrap="square" anchor="t">
+            <a:spAutoFit/>
+          </a:bodyPr>
+          <a:lstStyle/>
+          <a:p>
+            <a:pPr algn="l">
+              <a:lnSpc>
+                <a:spcPct val="100000"/>
+              </a:lnSpc>
+              <a:spcAft>
+                <a:spcPts val="800"/>
+              </a:spcAft>
+            </a:pPr>
+            <a:r>
+              <a:rPr sz="1600" b="0">
+                <a:solidFill>
+                  <a:srgbClr val="FFFFFF"/>
+                </a:solidFill>
+                <a:latin typeface="微软雅黑"/>
+              </a:rPr>
+              <a:t>自动测试通过率</a:t>
+            </a:r>
+          </a:p>
+        </p:txBody>
+      </p:sp>
+      <p:sp>
+        <p:nvSpPr>
+          <p:cNvPr id="22" name="Rounded Rectangle 21"/>
+          <p:cNvSpPr/>
+          <p:nvPr/>
+        </p:nvSpPr>
+        <p:spPr>
+          <a:xfrm>
+            <a:off x="6309360" y="4206240"/>
+            <a:ext cx="5120640" cy="1737360"/>
+          </a:xfrm>
+          <a:prstGeom prst="roundRect">
+            <a:avLst/>
+          </a:prstGeom>
+          <a:solidFill>
+            <a:srgbClr val="1C1E3A"/>
+          </a:solidFill>
+          <a:ln w="25400">
+            <a:solidFill>
+              <a:srgbClr val="9C78FF"/>
+            </a:solidFill>
+          </a:ln>
+          <a:effectLst/>
+        </p:spPr>
+        <p:style>
+          <a:lnRef idx="1">
+            <a:schemeClr val="accent1"/>
+          </a:lnRef>
+          <a:fillRef idx="3">
+            <a:schemeClr val="accent1"/>
+          </a:fillRef>
+          <a:effectRef idx="2">
+            <a:schemeClr val="accent1"/>
+          </a:effectRef>
+          <a:fontRef idx="minor">
+            <a:schemeClr val="lt1"/>
+          </a:fontRef>
+        </p:style>
+        <p:txBody>
+          <a:bodyPr rtlCol="0" anchor="ctr"/>
+          <a:lstStyle/>
+          <a:p>
+            <a:pPr algn="ctr"/>
+          </a:p>
+        </p:txBody>
+      </p:sp>
+      <p:sp>
+        <p:nvSpPr>
+          <p:cNvPr id="23" name="TextBox 22"/>
+          <p:cNvSpPr txBox="1"/>
+          <p:nvPr/>
+        </p:nvSpPr>
+        <p:spPr>
+          <a:xfrm>
+            <a:off x="6583680" y="4480559"/>
+            <a:ext cx="4572000" cy="822960"/>
+          </a:xfrm>
+          <a:prstGeom prst="rect">
+            <a:avLst/>
+          </a:prstGeom>
+          <a:noFill/>
+        </p:spPr>
+        <p:txBody>
+          <a:bodyPr wrap="square" anchor="t">
+            <a:spAutoFit/>
+          </a:bodyPr>
+          <a:lstStyle/>
+          <a:p>
+            <a:pPr algn="l">
+              <a:lnSpc>
+                <a:spcPct val="100000"/>
+              </a:lnSpc>
+              <a:spcAft>
+                <a:spcPts val="800"/>
+              </a:spcAft>
+            </a:pPr>
+            <a:r>
+              <a:rPr sz="5000" b="1">
+                <a:solidFill>
+                  <a:srgbClr val="9C78FF"/>
+                </a:solidFill>
+                <a:latin typeface="微软雅黑"/>
+              </a:rPr>
+              <a:t>100%</a:t>
+            </a:r>
+          </a:p>
+        </p:txBody>
+      </p:sp>
+      <p:sp>
+        <p:nvSpPr>
+          <p:cNvPr id="24" name="TextBox 23"/>
+          <p:cNvSpPr txBox="1"/>
+          <p:nvPr/>
+        </p:nvSpPr>
+        <p:spPr>
+          <a:xfrm>
+            <a:off x="6583680" y="5303520"/>
+            <a:ext cx="4572000" cy="548640"/>
+          </a:xfrm>
+          <a:prstGeom prst="rect">
+            <a:avLst/>
+          </a:prstGeom>
+          <a:noFill/>
+        </p:spPr>
+        <p:txBody>
+          <a:bodyPr wrap="square" anchor="t">
+            <a:spAutoFit/>
+          </a:bodyPr>
+          <a:lstStyle/>
+          <a:p>
+            <a:pPr algn="l">
+              <a:lnSpc>
+                <a:spcPct val="100000"/>
+              </a:lnSpc>
+              <a:spcAft>
+                <a:spcPts val="800"/>
+              </a:spcAft>
+            </a:pPr>
+            <a:r>
+              <a:rPr sz="1600" b="0">
+                <a:solidFill>
+                  <a:srgbClr val="FFFFFF"/>
+                </a:solidFill>
+                <a:latin typeface="微软雅黑"/>
+              </a:rPr>
+              <a:t>CI 全绿，推送自动验证</a:t>
+            </a:r>
+          </a:p>
+        </p:txBody>
+      </p:sp>
+      <p:sp>
+        <p:nvSpPr>
+          <p:cNvPr id="25" name="Rounded Rectangle 24"/>
+          <p:cNvSpPr/>
+          <p:nvPr/>
+        </p:nvSpPr>
+        <p:spPr>
+          <a:xfrm>
+            <a:off x="731520" y="5989320"/>
+            <a:ext cx="10698480" cy="502920"/>
+          </a:xfrm>
+          <a:prstGeom prst="roundRect">
+            <a:avLst>
+              <a:gd name="adj" fmla="val 30000"/>
+            </a:avLst>
+          </a:prstGeom>
+          <a:solidFill>
+            <a:srgbClr val="282B50"/>
+          </a:solidFill>
+          <a:ln w="19050">
+            <a:solidFill>
+              <a:srgbClr val="FFD166"/>
+            </a:solidFill>
+          </a:ln>
+          <a:effectLst/>
+        </p:spPr>
+        <p:style>
+          <a:lnRef idx="1">
+            <a:schemeClr val="accent1"/>
+          </a:lnRef>
+          <a:fillRef idx="3">
+            <a:schemeClr val="accent1"/>
+          </a:fillRef>
+          <a:effectRef idx="2">
+            <a:schemeClr val="accent1"/>
+          </a:effectRef>
+          <a:fontRef idx="minor">
+            <a:schemeClr val="lt1"/>
+          </a:fontRef>
+        </p:style>
+        <p:txBody>
+          <a:bodyPr rtlCol="0" anchor="ctr"/>
+          <a:lstStyle/>
+          <a:p>
+            <a:pPr algn="ctr"/>
+          </a:p>
+        </p:txBody>
+      </p:sp>
+      <p:sp>
+        <p:nvSpPr>
+          <p:cNvPr id="26" name="TextBox 25"/>
+          <p:cNvSpPr txBox="1"/>
+          <p:nvPr/>
+        </p:nvSpPr>
+        <p:spPr>
+          <a:xfrm>
+            <a:off x="731520" y="6080760"/>
+            <a:ext cx="10698480" cy="365760"/>
+          </a:xfrm>
+          <a:prstGeom prst="rect">
+            <a:avLst/>
+          </a:prstGeom>
+          <a:noFill/>
+        </p:spPr>
+        <p:txBody>
+          <a:bodyPr wrap="square" anchor="t">
+            <a:spAutoFit/>
+          </a:bodyPr>
+          <a:lstStyle/>
+          <a:p>
+            <a:pPr algn="ctr">
+              <a:lnSpc>
+                <a:spcPct val="100000"/>
+              </a:lnSpc>
+              <a:spcAft>
+                <a:spcPts val="800"/>
+              </a:spcAft>
+            </a:pPr>
+            <a:r>
+              <a:rPr sz="1500" b="0">
+                <a:solidFill>
+                  <a:srgbClr val="FFFFFF"/>
+                </a:solidFill>
+                <a:latin typeface="微软雅黑"/>
+              </a:rPr>
+              <a:t>工程规范：MIT License · CONTRIBUTING 贡献指南 · 三种入口全部实测可用</a:t>
+            </a:r>
+          </a:p>
+        </p:txBody>
+      </p:sp>
+      <p:sp>
+        <p:nvSpPr>
+          <p:cNvPr id="27" name="Rounded Rectangle 26"/>
+          <p:cNvSpPr/>
+          <p:nvPr/>
+        </p:nvSpPr>
+        <p:spPr>
+          <a:xfrm>
+            <a:off x="11521440" y="6035040"/>
+            <a:ext cx="457200" cy="457200"/>
+          </a:xfrm>
+          <a:prstGeom prst="roundRect">
+            <a:avLst/>
+          </a:prstGeom>
+          <a:solidFill>
+            <a:srgbClr val="282B50"/>
+          </a:solidFill>
+          <a:ln w="25400">
+            <a:solidFill>
+              <a:srgbClr val="FF69B4"/>
+            </a:solidFill>
+          </a:ln>
+          <a:effectLst/>
+        </p:spPr>
+        <p:style>
+          <a:lnRef idx="1">
+            <a:schemeClr val="accent1"/>
+          </a:lnRef>
+          <a:fillRef idx="3">
+            <a:schemeClr val="accent1"/>
+          </a:fillRef>
+          <a:effectRef idx="2">
+            <a:schemeClr val="accent1"/>
+          </a:effectRef>
+          <a:fontRef idx="minor">
+            <a:schemeClr val="lt1"/>
+          </a:fontRef>
+        </p:style>
+        <p:txBody>
+          <a:bodyPr rtlCol="0" anchor="ctr"/>
+          <a:lstStyle/>
+          <a:p>
+            <a:pPr algn="ctr"/>
+          </a:p>
+        </p:txBody>
+      </p:sp>
+      <p:sp>
+        <p:nvSpPr>
+          <p:cNvPr id="28" name="Rectangle 27"/>
+          <p:cNvSpPr/>
+          <p:nvPr/>
+        </p:nvSpPr>
+        <p:spPr>
+          <a:xfrm>
+            <a:off x="11402567" y="6126479"/>
+            <a:ext cx="118872" cy="45720"/>
+          </a:xfrm>
+          <a:prstGeom prst="rect">
+            <a:avLst/>
+          </a:prstGeom>
+          <a:solidFill>
+            <a:srgbClr val="FF69B4"/>
+          </a:solidFill>
+          <a:ln>
+            <a:noFill/>
+          </a:ln>
+          <a:effectLst/>
+        </p:spPr>
+        <p:style>
+          <a:lnRef idx="1">
+            <a:schemeClr val="accent1"/>
+          </a:lnRef>
+          <a:fillRef idx="3">
+            <a:schemeClr val="accent1"/>
+          </a:fillRef>
+          <a:effectRef idx="2">
+            <a:schemeClr val="accent1"/>
+          </a:effectRef>
+          <a:fontRef idx="minor">
+            <a:schemeClr val="lt1"/>
+          </a:fontRef>
+        </p:style>
+        <p:txBody>
+          <a:bodyPr rtlCol="0" anchor="ctr"/>
+          <a:lstStyle/>
+          <a:p>
+            <a:pPr algn="ctr"/>
+          </a:p>
+        </p:txBody>
+      </p:sp>
+      <p:sp>
+        <p:nvSpPr>
+          <p:cNvPr id="29" name="Rectangle 28"/>
+          <p:cNvSpPr/>
+          <p:nvPr/>
+        </p:nvSpPr>
+        <p:spPr>
+          <a:xfrm>
+            <a:off x="11978640" y="6126479"/>
+            <a:ext cx="118872" cy="45720"/>
+          </a:xfrm>
+          <a:prstGeom prst="rect">
+            <a:avLst/>
+          </a:prstGeom>
+          <a:solidFill>
+            <a:srgbClr val="FF69B4"/>
+          </a:solidFill>
+          <a:ln>
+            <a:noFill/>
+          </a:ln>
+          <a:effectLst/>
+        </p:spPr>
+        <p:style>
+          <a:lnRef idx="1">
+            <a:schemeClr val="accent1"/>
+          </a:lnRef>
+          <a:fillRef idx="3">
+            <a:schemeClr val="accent1"/>
+          </a:fillRef>
+          <a:effectRef idx="2">
+            <a:schemeClr val="accent1"/>
+          </a:effectRef>
+          <a:fontRef idx="minor">
+            <a:schemeClr val="lt1"/>
+          </a:fontRef>
+        </p:style>
+        <p:txBody>
+          <a:bodyPr rtlCol="0" anchor="ctr"/>
+          <a:lstStyle/>
+          <a:p>
+            <a:pPr algn="ctr"/>
+          </a:p>
+        </p:txBody>
+      </p:sp>
+      <p:sp>
+        <p:nvSpPr>
+          <p:cNvPr id="30" name="Rectangle 29"/>
+          <p:cNvSpPr/>
+          <p:nvPr/>
+        </p:nvSpPr>
+        <p:spPr>
+          <a:xfrm>
+            <a:off x="11612880" y="5916168"/>
+            <a:ext cx="45720" cy="118872"/>
+          </a:xfrm>
+          <a:prstGeom prst="rect">
+            <a:avLst/>
+          </a:prstGeom>
+          <a:solidFill>
+            <a:srgbClr val="FF69B4"/>
+          </a:solidFill>
+          <a:ln>
+            <a:noFill/>
+          </a:ln>
+          <a:effectLst/>
+        </p:spPr>
+        <p:style>
+          <a:lnRef idx="1">
+            <a:schemeClr val="accent1"/>
+          </a:lnRef>
+          <a:fillRef idx="3">
+            <a:schemeClr val="accent1"/>
+          </a:fillRef>
+          <a:effectRef idx="2">
+            <a:schemeClr val="accent1"/>
+          </a:effectRef>
+          <a:fontRef idx="minor">
+            <a:schemeClr val="lt1"/>
+          </a:fontRef>
+        </p:style>
+        <p:txBody>
+          <a:bodyPr rtlCol="0" anchor="ctr"/>
+          <a:lstStyle/>
+          <a:p>
+            <a:pPr algn="ctr"/>
+          </a:p>
+        </p:txBody>
+      </p:sp>
+      <p:sp>
+        <p:nvSpPr>
+          <p:cNvPr id="31" name="Rectangle 30"/>
+          <p:cNvSpPr/>
+          <p:nvPr/>
+        </p:nvSpPr>
+        <p:spPr>
+          <a:xfrm>
+            <a:off x="11612880" y="6492240"/>
+            <a:ext cx="45720" cy="118872"/>
+          </a:xfrm>
+          <a:prstGeom prst="rect">
+            <a:avLst/>
+          </a:prstGeom>
+          <a:solidFill>
+            <a:srgbClr val="FF69B4"/>
+          </a:solidFill>
+          <a:ln>
+            <a:noFill/>
+          </a:ln>
+          <a:effectLst/>
+        </p:spPr>
+        <p:style>
+          <a:lnRef idx="1">
+            <a:schemeClr val="accent1"/>
+          </a:lnRef>
+          <a:fillRef idx="3">
+            <a:schemeClr val="accent1"/>
+          </a:fillRef>
+          <a:effectRef idx="2">
+            <a:schemeClr val="accent1"/>
+          </a:effectRef>
+          <a:fontRef idx="minor">
+            <a:schemeClr val="lt1"/>
+          </a:fontRef>
+        </p:style>
+        <p:txBody>
+          <a:bodyPr rtlCol="0" anchor="ctr"/>
+          <a:lstStyle/>
+          <a:p>
+            <a:pPr algn="ctr"/>
+          </a:p>
+        </p:txBody>
+      </p:sp>
+      <p:sp>
+        <p:nvSpPr>
+          <p:cNvPr id="32" name="Rectangle 31"/>
+          <p:cNvSpPr/>
+          <p:nvPr/>
+        </p:nvSpPr>
+        <p:spPr>
+          <a:xfrm>
+            <a:off x="11402567" y="6263640"/>
+            <a:ext cx="118872" cy="45720"/>
+          </a:xfrm>
+          <a:prstGeom prst="rect">
+            <a:avLst/>
+          </a:prstGeom>
+          <a:solidFill>
+            <a:srgbClr val="FF69B4"/>
+          </a:solidFill>
+          <a:ln>
+            <a:noFill/>
+          </a:ln>
+          <a:effectLst/>
+        </p:spPr>
+        <p:style>
+          <a:lnRef idx="1">
+            <a:schemeClr val="accent1"/>
+          </a:lnRef>
+          <a:fillRef idx="3">
+            <a:schemeClr val="accent1"/>
+          </a:fillRef>
+          <a:effectRef idx="2">
+            <a:schemeClr val="accent1"/>
+          </a:effectRef>
+          <a:fontRef idx="minor">
+            <a:schemeClr val="lt1"/>
+          </a:fontRef>
+        </p:style>
+        <p:txBody>
+          <a:bodyPr rtlCol="0" anchor="ctr"/>
+          <a:lstStyle/>
+          <a:p>
+            <a:pPr algn="ctr"/>
+          </a:p>
+        </p:txBody>
+      </p:sp>
+      <p:sp>
+        <p:nvSpPr>
+          <p:cNvPr id="33" name="Rectangle 32"/>
+          <p:cNvSpPr/>
+          <p:nvPr/>
+        </p:nvSpPr>
+        <p:spPr>
+          <a:xfrm>
+            <a:off x="11978640" y="6263640"/>
+            <a:ext cx="118872" cy="45720"/>
+          </a:xfrm>
+          <a:prstGeom prst="rect">
+            <a:avLst/>
+          </a:prstGeom>
+          <a:solidFill>
+            <a:srgbClr val="FF69B4"/>
+          </a:solidFill>
+          <a:ln>
+            <a:noFill/>
+          </a:ln>
+          <a:effectLst/>
+        </p:spPr>
+        <p:style>
+          <a:lnRef idx="1">
+            <a:schemeClr val="accent1"/>
+          </a:lnRef>
+          <a:fillRef idx="3">
+            <a:schemeClr val="accent1"/>
+          </a:fillRef>
+          <a:effectRef idx="2">
+            <a:schemeClr val="accent1"/>
+          </a:effectRef>
+          <a:fontRef idx="minor">
+            <a:schemeClr val="lt1"/>
+          </a:fontRef>
+        </p:style>
+        <p:txBody>
+          <a:bodyPr rtlCol="0" anchor="ctr"/>
+          <a:lstStyle/>
+          <a:p>
+            <a:pPr algn="ctr"/>
+          </a:p>
+        </p:txBody>
+      </p:sp>
+      <p:sp>
+        <p:nvSpPr>
+          <p:cNvPr id="34" name="Rectangle 33"/>
+          <p:cNvSpPr/>
+          <p:nvPr/>
+        </p:nvSpPr>
+        <p:spPr>
+          <a:xfrm>
+            <a:off x="11750040" y="5916168"/>
+            <a:ext cx="45720" cy="118872"/>
+          </a:xfrm>
+          <a:prstGeom prst="rect">
+            <a:avLst/>
+          </a:prstGeom>
+          <a:solidFill>
+            <a:srgbClr val="FF69B4"/>
+          </a:solidFill>
+          <a:ln>
+            <a:noFill/>
+          </a:ln>
+          <a:effectLst/>
+        </p:spPr>
+        <p:style>
+          <a:lnRef idx="1">
+            <a:schemeClr val="accent1"/>
+          </a:lnRef>
+          <a:fillRef idx="3">
+            <a:schemeClr val="accent1"/>
+          </a:fillRef>
+          <a:effectRef idx="2">
+            <a:schemeClr val="accent1"/>
+          </a:effectRef>
+          <a:fontRef idx="minor">
+            <a:schemeClr val="lt1"/>
+          </a:fontRef>
+        </p:style>
+        <p:txBody>
+          <a:bodyPr rtlCol="0" anchor="ctr"/>
+          <a:lstStyle/>
+          <a:p>
+            <a:pPr algn="ctr"/>
+          </a:p>
+        </p:txBody>
+      </p:sp>
+      <p:sp>
+        <p:nvSpPr>
+          <p:cNvPr id="35" name="Rectangle 34"/>
+          <p:cNvSpPr/>
+          <p:nvPr/>
+        </p:nvSpPr>
+        <p:spPr>
+          <a:xfrm>
+            <a:off x="11750040" y="6492240"/>
+            <a:ext cx="45720" cy="118872"/>
+          </a:xfrm>
+          <a:prstGeom prst="rect">
+            <a:avLst/>
+          </a:prstGeom>
+          <a:solidFill>
+            <a:srgbClr val="FF69B4"/>
+          </a:solidFill>
+          <a:ln>
+            <a:noFill/>
+          </a:ln>
+          <a:effectLst/>
+        </p:spPr>
+        <p:style>
+          <a:lnRef idx="1">
+            <a:schemeClr val="accent1"/>
+          </a:lnRef>
+          <a:fillRef idx="3">
+            <a:schemeClr val="accent1"/>
+          </a:fillRef>
+          <a:effectRef idx="2">
+            <a:schemeClr val="accent1"/>
+          </a:effectRef>
+          <a:fontRef idx="minor">
+            <a:schemeClr val="lt1"/>
+          </a:fontRef>
+        </p:style>
+        <p:txBody>
+          <a:bodyPr rtlCol="0" anchor="ctr"/>
+          <a:lstStyle/>
+          <a:p>
+            <a:pPr algn="ctr"/>
+          </a:p>
+        </p:txBody>
+      </p:sp>
+      <p:sp>
+        <p:nvSpPr>
+          <p:cNvPr id="36" name="Rectangle 35"/>
+          <p:cNvSpPr/>
+          <p:nvPr/>
+        </p:nvSpPr>
+        <p:spPr>
+          <a:xfrm>
+            <a:off x="11402567" y="6400799"/>
+            <a:ext cx="118872" cy="45720"/>
+          </a:xfrm>
+          <a:prstGeom prst="rect">
+            <a:avLst/>
+          </a:prstGeom>
+          <a:solidFill>
+            <a:srgbClr val="FF69B4"/>
+          </a:solidFill>
+          <a:ln>
+            <a:noFill/>
+          </a:ln>
+          <a:effectLst/>
+        </p:spPr>
+        <p:style>
+          <a:lnRef idx="1">
+            <a:schemeClr val="accent1"/>
+          </a:lnRef>
+          <a:fillRef idx="3">
+            <a:schemeClr val="accent1"/>
+          </a:fillRef>
+          <a:effectRef idx="2">
+            <a:schemeClr val="accent1"/>
+          </a:effectRef>
+          <a:fontRef idx="minor">
+            <a:schemeClr val="lt1"/>
+          </a:fontRef>
+        </p:style>
+        <p:txBody>
+          <a:bodyPr rtlCol="0" anchor="ctr"/>
+          <a:lstStyle/>
+          <a:p>
+            <a:pPr algn="ctr"/>
+          </a:p>
+        </p:txBody>
+      </p:sp>
+      <p:sp>
+        <p:nvSpPr>
+          <p:cNvPr id="37" name="Rectangle 36"/>
+          <p:cNvSpPr/>
+          <p:nvPr/>
+        </p:nvSpPr>
+        <p:spPr>
+          <a:xfrm>
+            <a:off x="11978640" y="6400799"/>
+            <a:ext cx="118872" cy="45720"/>
+          </a:xfrm>
+          <a:prstGeom prst="rect">
+            <a:avLst/>
+          </a:prstGeom>
+          <a:solidFill>
+            <a:srgbClr val="FF69B4"/>
+          </a:solidFill>
+          <a:ln>
+            <a:noFill/>
+          </a:ln>
+          <a:effectLst/>
+        </p:spPr>
+        <p:style>
+          <a:lnRef idx="1">
+            <a:schemeClr val="accent1"/>
+          </a:lnRef>
+          <a:fillRef idx="3">
+            <a:schemeClr val="accent1"/>
+          </a:fillRef>
+          <a:effectRef idx="2">
+            <a:schemeClr val="accent1"/>
+          </a:effectRef>
+          <a:fontRef idx="minor">
+            <a:schemeClr val="lt1"/>
+          </a:fontRef>
+        </p:style>
+        <p:txBody>
+          <a:bodyPr rtlCol="0" anchor="ctr"/>
+          <a:lstStyle/>
+          <a:p>
+            <a:pPr algn="ctr"/>
+          </a:p>
+        </p:txBody>
+      </p:sp>
+      <p:sp>
+        <p:nvSpPr>
+          <p:cNvPr id="38" name="Rectangle 37"/>
+          <p:cNvSpPr/>
+          <p:nvPr/>
+        </p:nvSpPr>
+        <p:spPr>
+          <a:xfrm>
+            <a:off x="11887200" y="5916168"/>
+            <a:ext cx="45720" cy="118872"/>
+          </a:xfrm>
+          <a:prstGeom prst="rect">
+            <a:avLst/>
+          </a:prstGeom>
+          <a:solidFill>
+            <a:srgbClr val="FF69B4"/>
+          </a:solidFill>
+          <a:ln>
+            <a:noFill/>
+          </a:ln>
+          <a:effectLst/>
+        </p:spPr>
+        <p:style>
+          <a:lnRef idx="1">
+            <a:schemeClr val="accent1"/>
+          </a:lnRef>
+          <a:fillRef idx="3">
+            <a:schemeClr val="accent1"/>
+          </a:fillRef>
+          <a:effectRef idx="2">
+            <a:schemeClr val="accent1"/>
+          </a:effectRef>
+          <a:fontRef idx="minor">
+            <a:schemeClr val="lt1"/>
+          </a:fontRef>
+        </p:style>
+        <p:txBody>
+          <a:bodyPr rtlCol="0" anchor="ctr"/>
+          <a:lstStyle/>
+          <a:p>
+            <a:pPr algn="ctr"/>
+          </a:p>
+        </p:txBody>
+      </p:sp>
+      <p:sp>
+        <p:nvSpPr>
+          <p:cNvPr id="39" name="Rectangle 38"/>
+          <p:cNvSpPr/>
+          <p:nvPr/>
+        </p:nvSpPr>
+        <p:spPr>
+          <a:xfrm>
+            <a:off x="11887200" y="6492240"/>
+            <a:ext cx="45720" cy="118872"/>
+          </a:xfrm>
+          <a:prstGeom prst="rect">
+            <a:avLst/>
+          </a:prstGeom>
+          <a:solidFill>
+            <a:srgbClr val="FF69B4"/>
+          </a:solidFill>
+          <a:ln>
+            <a:noFill/>
+          </a:ln>
+          <a:effectLst/>
+        </p:spPr>
+        <p:style>
+          <a:lnRef idx="1">
+            <a:schemeClr val="accent1"/>
+          </a:lnRef>
+          <a:fillRef idx="3">
+            <a:schemeClr val="accent1"/>
+          </a:fillRef>
+          <a:effectRef idx="2">
+            <a:schemeClr val="accent1"/>
+          </a:effectRef>
+          <a:fontRef idx="minor">
+            <a:schemeClr val="lt1"/>
+          </a:fontRef>
+        </p:style>
+        <p:txBody>
+          <a:bodyPr rtlCol="0" anchor="ctr"/>
+          <a:lstStyle/>
+          <a:p>
+            <a:pPr algn="ctr"/>
+          </a:p>
+        </p:txBody>
+      </p:sp>
+      <p:sp>
+        <p:nvSpPr>
+          <p:cNvPr id="40" name="Rectangle 39"/>
+          <p:cNvSpPr/>
+          <p:nvPr/>
+        </p:nvSpPr>
+        <p:spPr>
+          <a:xfrm>
+            <a:off x="0" y="6620256"/>
+            <a:ext cx="12191695" cy="27432"/>
+          </a:xfrm>
+          <a:prstGeom prst="rect">
+            <a:avLst/>
+          </a:prstGeom>
+          <a:solidFill>
+            <a:srgbClr val="4A90D9"/>
+          </a:solidFill>
+          <a:ln>
+            <a:noFill/>
+          </a:ln>
+          <a:effectLst/>
+        </p:spPr>
+        <p:style>
+          <a:lnRef idx="1">
+            <a:schemeClr val="accent1"/>
+          </a:lnRef>
+          <a:fillRef idx="3">
+            <a:schemeClr val="accent1"/>
+          </a:fillRef>
+          <a:effectRef idx="2">
+            <a:schemeClr val="accent1"/>
+          </a:effectRef>
+          <a:fontRef idx="minor">
+            <a:schemeClr val="lt1"/>
+          </a:fontRef>
+        </p:style>
+        <p:txBody>
+          <a:bodyPr rtlCol="0" anchor="ctr"/>
+          <a:lstStyle/>
+          <a:p>
+            <a:pPr algn="ctr"/>
+          </a:p>
+        </p:txBody>
+      </p:sp>
+      <p:sp>
+        <p:nvSpPr>
+          <p:cNvPr id="41" name="TextBox 40"/>
+          <p:cNvSpPr txBox="1"/>
+          <p:nvPr/>
+        </p:nvSpPr>
+        <p:spPr>
+          <a:xfrm>
+            <a:off x="365760" y="6629400"/>
+            <a:ext cx="5486400" cy="228600"/>
+          </a:xfrm>
+          <a:prstGeom prst="rect">
+            <a:avLst/>
+          </a:prstGeom>
+          <a:noFill/>
+        </p:spPr>
+        <p:txBody>
+          <a:bodyPr wrap="square" anchor="t">
+            <a:spAutoFit/>
+          </a:bodyPr>
+          <a:lstStyle/>
+          <a:p>
+            <a:pPr algn="l">
+              <a:lnSpc>
+                <a:spcPct val="100000"/>
+              </a:lnSpc>
+              <a:spcAft>
+                <a:spcPts val="800"/>
+              </a:spcAft>
+            </a:pPr>
+            <a:r>
+              <a:rPr sz="1000" b="0">
+                <a:solidFill>
+                  <a:srgbClr val="A0A5BE"/>
+                </a:solidFill>
+                <a:latin typeface="微软雅黑"/>
+              </a:rPr>
+              <a:t>成果与数据</a:t>
+            </a:r>
+          </a:p>
+        </p:txBody>
+      </p:sp>
+      <p:sp>
+        <p:nvSpPr>
+          <p:cNvPr id="42" name="TextBox 41"/>
+          <p:cNvSpPr txBox="1"/>
+          <p:nvPr/>
+        </p:nvSpPr>
+        <p:spPr>
+          <a:xfrm>
+            <a:off x="11185855" y="6629400"/>
+            <a:ext cx="731520" cy="228600"/>
+          </a:xfrm>
+          <a:prstGeom prst="rect">
+            <a:avLst/>
+          </a:prstGeom>
+          <a:noFill/>
+        </p:spPr>
+        <p:txBody>
+          <a:bodyPr wrap="square" anchor="t">
+            <a:spAutoFit/>
+          </a:bodyPr>
+          <a:lstStyle/>
+          <a:p>
+            <a:pPr algn="r">
+              <a:lnSpc>
+                <a:spcPct val="100000"/>
+              </a:lnSpc>
+              <a:spcAft>
+                <a:spcPts val="800"/>
+              </a:spcAft>
+            </a:pPr>
+            <a:r>
+              <a:rPr sz="1200" b="0">
+                <a:solidFill>
+                  <a:srgbClr val="A0A5BE"/>
+                </a:solidFill>
+                <a:latin typeface="微软雅黑"/>
+              </a:rPr>
+              <a:t>7</a:t>
+            </a:r>
+          </a:p>
+        </p:txBody>
+      </p:sp>
+    </p:spTree>
+  </p:cSld>
+  <p:clrMapOvr>
+    <a:masterClrMapping/>
+  </p:clrMapOvr>
+</p:sld>
+</file>
+
+<file path=ppt/slides/slide8.xml><?xml version="1.0" encoding="utf-8"?>
+<p:sld xmlns:a="http://schemas.openxmlformats.org/drawingml/2006/main" xmlns:p="http://schemas.openxmlformats.org/presentationml/2006/main" xmlns:r="http://schemas.openxmlformats.org/officeDocument/2006/relationships">
+  <p:cSld>
+    <p:bg>
+      <p:bgPr>
+        <a:solidFill>
+          <a:srgbClr val="0D0D1E"/>
+        </a:solidFill>
+        <a:effectLst/>
+      </p:bgPr>
+    </p:bg>
+    <p:spTree>
+      <p:nvGrpSpPr>
+        <p:cNvPr id="1" name=""/>
+        <p:cNvGrpSpPr/>
+        <p:nvPr/>
+      </p:nvGrpSpPr>
+      <p:grpSpPr/>
+      <p:sp>
+        <p:nvSpPr>
+          <p:cNvPr id="2" name="Oval 1"/>
+          <p:cNvSpPr/>
+          <p:nvPr/>
+        </p:nvSpPr>
+        <p:spPr>
+          <a:xfrm>
+            <a:off x="-822960" y="-914400"/>
+            <a:ext cx="2194560" cy="2194560"/>
+          </a:xfrm>
+          <a:prstGeom prst="ellipse">
+            <a:avLst/>
+          </a:prstGeom>
+          <a:solidFill>
+            <a:srgbClr val="1E2246"/>
+          </a:solidFill>
+          <a:ln>
+            <a:noFill/>
+          </a:ln>
+          <a:effectLst/>
+        </p:spPr>
+        <p:style>
+          <a:lnRef idx="1">
+            <a:schemeClr val="accent1"/>
+          </a:lnRef>
+          <a:fillRef idx="3">
+            <a:schemeClr val="accent1"/>
+          </a:fillRef>
+          <a:effectRef idx="2">
+            <a:schemeClr val="accent1"/>
+          </a:effectRef>
+          <a:fontRef idx="minor">
+            <a:schemeClr val="lt1"/>
+          </a:fontRef>
+        </p:style>
+        <p:txBody>
+          <a:bodyPr rtlCol="0" anchor="ctr"/>
+          <a:lstStyle/>
+          <a:p>
+            <a:pPr algn="ctr"/>
+          </a:p>
+        </p:txBody>
+      </p:sp>
+      <p:sp>
+        <p:nvSpPr>
+          <p:cNvPr id="3" name="Oval 2"/>
+          <p:cNvSpPr/>
+          <p:nvPr/>
+        </p:nvSpPr>
+        <p:spPr>
+          <a:xfrm>
             <a:off x="11576314" y="6104878"/>
             <a:ext cx="73152" cy="73152"/>
           </a:xfrm>
@@ -16346,7 +19206,7 @@
                 </a:solidFill>
                 <a:latin typeface="微软雅黑"/>
               </a:rPr>
-              <a:t>多Agent 编排与事件驱动</a:t>
+              <a:t>多Agent 编排与协作回环</a:t>
             </a:r>
           </a:p>
           <a:p>
@@ -16365,7 +19225,7 @@
                 </a:solidFill>
                 <a:latin typeface="微软雅黑"/>
               </a:rPr>
-              <a:t>沙箱隔离 / LLM 抽象</a:t>
+              <a:t>Harness 基础设施层</a:t>
             </a:r>
           </a:p>
           <a:p>
@@ -16384,7 +19244,7 @@
                 </a:solidFill>
                 <a:latin typeface="微软雅黑"/>
               </a:rPr>
-              <a:t>完整工程化交付经验</a:t>
+              <a:t>Benchmark 量化 10/10</a:t>
             </a:r>
           </a:p>
         </p:txBody>
@@ -16596,7 +19456,7 @@
                 </a:solidFill>
                 <a:latin typeface="微软雅黑"/>
               </a:rPr>
-              <a:t>缺少系统 Benchmark 统计</a:t>
+              <a:t>实时通信用 SSE 未上 WebSocket</a:t>
             </a:r>
           </a:p>
         </p:txBody>
@@ -16770,7 +19630,7 @@
                 </a:solidFill>
                 <a:latin typeface="微软雅黑"/>
               </a:rPr>
-              <a:t>支持多文件与依赖安装</a:t>
+              <a:t>WebSocket 实时双向推送</a:t>
             </a:r>
           </a:p>
           <a:p>
@@ -16789,7 +19649,7 @@
                 </a:solidFill>
                 <a:latin typeface="微软雅黑"/>
               </a:rPr>
-              <a:t>新增测试生成 Agent</a:t>
+              <a:t>支持多文件与依赖安装</a:t>
             </a:r>
           </a:p>
           <a:p>
@@ -16808,7 +19668,7 @@
                 </a:solidFill>
                 <a:latin typeface="微软雅黑"/>
               </a:rPr>
-              <a:t>建立成功率量化评估</a:t>
+              <a:t>完整 tool-calling 工具调用</a:t>
             </a:r>
           </a:p>
         </p:txBody>
@@ -17864,7 +20724,7 @@
                 </a:solidFill>
                 <a:latin typeface="微软雅黑"/>
               </a:rPr>
-              <a:t>7</a:t>
+              <a:t>8</a:t>
             </a:r>
           </a:p>
         </p:txBody>
